--- a/decks/2026_Week1_Episode2.pptx
+++ b/decks/2026_Week1_Episode2.pptx
@@ -10163,7 +10163,7 @@
                 </a:solidFill>
                 <a:latin typeface="Arial"/>
               </a:rPr>
-              <a:t>Frozen at kickoff · graded vs finals and the last pre-kick pull (Sat 10:16 ET) · leans graded vs first-seen lines</a:t>
+              <a:t>Our call frozen at kickoff · closing line = last pre-kick pull (Sat 10:16 ET) · “off by” = miss vs the final margin</a:t>
             </a:r>
           </a:p>
         </p:txBody>
@@ -10325,7 +10325,7 @@
                 </a:solidFill>
                 <a:latin typeface="Arial"/>
               </a:rPr>
-              <a:t>called TCU 25–23 · final UNC 15–10</a:t>
+              <a:t>we called TCU 25–23 · FINAL UNC 15–10</a:t>
             </a:r>
           </a:p>
         </p:txBody>
@@ -10338,8 +10338,8 @@
         </p:nvSpPr>
         <p:spPr>
           <a:xfrm>
-            <a:off x="6949440" y="1517904"/>
-            <a:ext cx="4160520" cy="274320"/>
+            <a:off x="6720840" y="1517904"/>
+            <a:ext cx="4389120" cy="274320"/>
           </a:xfrm>
           <a:prstGeom prst="rect">
             <a:avLst/>
@@ -10360,7 +10360,7 @@
                 </a:solidFill>
                 <a:latin typeface="Arial"/>
               </a:rPr>
-              <a:t>machine TCU –1.5 · close –7.5 · actual UNC by 5</a:t>
+              <a:t>our line TCU –1.5 · closing TCU –7.5</a:t>
             </a:r>
           </a:p>
         </p:txBody>
@@ -10373,29 +10373,29 @@
         </p:nvSpPr>
         <p:spPr>
           <a:xfrm>
-            <a:off x="6949440" y="1819656"/>
-            <a:ext cx="4160520" cy="274320"/>
-          </a:xfrm>
-          <a:prstGeom prst="rect">
-            <a:avLst/>
-          </a:prstGeom>
-          <a:noFill/>
-        </p:spPr>
-        <p:txBody>
-          <a:bodyPr wrap="square" lIns="0" rIns="0" tIns="0" bIns="0">
-            <a:spAutoFit/>
-          </a:bodyPr>
-          <a:lstStyle/>
-          <a:p>
-            <a:pPr algn="l"/>
-            <a:r>
-              <a:rPr sz="1050" b="1" i="0">
+            <a:off x="6720840" y="1819656"/>
+            <a:ext cx="4389120" cy="274320"/>
+          </a:xfrm>
+          <a:prstGeom prst="rect">
+            <a:avLst/>
+          </a:prstGeom>
+          <a:noFill/>
+        </p:spPr>
+        <p:txBody>
+          <a:bodyPr wrap="square" lIns="0" rIns="0" tIns="0" bIns="0">
+            <a:spAutoFit/>
+          </a:bodyPr>
+          <a:lstStyle/>
+          <a:p>
+            <a:pPr algn="l"/>
+            <a:r>
+              <a:rPr sz="1000" b="1" i="0">
                 <a:solidFill>
                   <a:srgbClr val="F47321"/>
                 </a:solidFill>
                 <a:latin typeface="Arial"/>
               </a:rPr>
-              <a:t>LEAN CASHED — UNC +6.5 won OUTRIGHT</a:t>
+              <a:t>machine off by 6.5 · market off by 12.5 — machine closer</a:t>
             </a:r>
           </a:p>
         </p:txBody>
@@ -10557,7 +10557,7 @@
                 </a:solidFill>
                 <a:latin typeface="Arial"/>
               </a:rPr>
-              <a:t>called UVA 30–23 · final UVA 34–8</a:t>
+              <a:t>we called UVA 30–23 · FINAL UVA 34–8</a:t>
             </a:r>
           </a:p>
         </p:txBody>
@@ -10570,8 +10570,8 @@
         </p:nvSpPr>
         <p:spPr>
           <a:xfrm>
-            <a:off x="6949440" y="2377440"/>
-            <a:ext cx="4160520" cy="274320"/>
+            <a:off x="6720840" y="2377440"/>
+            <a:ext cx="4389120" cy="274320"/>
           </a:xfrm>
           <a:prstGeom prst="rect">
             <a:avLst/>
@@ -10592,7 +10592,7 @@
                 </a:solidFill>
                 <a:latin typeface="Arial"/>
               </a:rPr>
-              <a:t>machine UVA –6.5 · close –4 · actual UVA by 26</a:t>
+              <a:t>our line UVA –6.5 · closing UVA –4</a:t>
             </a:r>
           </a:p>
         </p:txBody>
@@ -10605,29 +10605,29 @@
         </p:nvSpPr>
         <p:spPr>
           <a:xfrm>
-            <a:off x="6949440" y="2679192"/>
-            <a:ext cx="4160520" cy="274320"/>
-          </a:xfrm>
-          <a:prstGeom prst="rect">
-            <a:avLst/>
-          </a:prstGeom>
-          <a:noFill/>
-        </p:spPr>
-        <p:txBody>
-          <a:bodyPr wrap="square" lIns="0" rIns="0" tIns="0" bIns="0">
-            <a:spAutoFit/>
-          </a:bodyPr>
-          <a:lstStyle/>
-          <a:p>
-            <a:pPr algn="l"/>
-            <a:r>
-              <a:rPr sz="1050" b="1" i="0">
-                <a:solidFill>
-                  <a:srgbClr val="5C6B7E"/>
-                </a:solidFill>
-                <a:latin typeface="Arial"/>
-              </a:rPr>
-              <a:t>no play — right to pass</a:t>
+            <a:off x="6720840" y="2679192"/>
+            <a:ext cx="4389120" cy="274320"/>
+          </a:xfrm>
+          <a:prstGeom prst="rect">
+            <a:avLst/>
+          </a:prstGeom>
+          <a:noFill/>
+        </p:spPr>
+        <p:txBody>
+          <a:bodyPr wrap="square" lIns="0" rIns="0" tIns="0" bIns="0">
+            <a:spAutoFit/>
+          </a:bodyPr>
+          <a:lstStyle/>
+          <a:p>
+            <a:pPr algn="l"/>
+            <a:r>
+              <a:rPr sz="1000" b="1" i="0">
+                <a:solidFill>
+                  <a:srgbClr val="F47321"/>
+                </a:solidFill>
+                <a:latin typeface="Arial"/>
+              </a:rPr>
+              <a:t>machine off by 19.5 · market off by 22 — machine closer</a:t>
             </a:r>
           </a:p>
         </p:txBody>
@@ -10789,7 +10789,7 @@
                 </a:solidFill>
                 <a:latin typeface="Arial"/>
               </a:rPr>
-              <a:t>called NDSU 25–22 · final NDSU 33–7</a:t>
+              <a:t>we called NDSU 25–22 · FINAL NDSU 33–7</a:t>
             </a:r>
           </a:p>
         </p:txBody>
@@ -10802,8 +10802,8 @@
         </p:nvSpPr>
         <p:spPr>
           <a:xfrm>
-            <a:off x="6949440" y="3236976"/>
-            <a:ext cx="4160520" cy="274320"/>
+            <a:off x="6720840" y="3236976"/>
+            <a:ext cx="4389120" cy="274320"/>
           </a:xfrm>
           <a:prstGeom prst="rect">
             <a:avLst/>
@@ -10824,7 +10824,7 @@
                 </a:solidFill>
                 <a:latin typeface="Arial"/>
               </a:rPr>
-              <a:t>machine NDSU –2.5 · close –6.5 · actual NDSU by 26</a:t>
+              <a:t>our line NDSU –2.5 · closing NDSU –6.5</a:t>
             </a:r>
           </a:p>
         </p:txBody>
@@ -10837,29 +10837,29 @@
         </p:nvSpPr>
         <p:spPr>
           <a:xfrm>
-            <a:off x="6949440" y="3538728"/>
-            <a:ext cx="4160520" cy="274320"/>
-          </a:xfrm>
-          <a:prstGeom prst="rect">
-            <a:avLst/>
-          </a:prstGeom>
-          <a:noFill/>
-        </p:spPr>
-        <p:txBody>
-          <a:bodyPr wrap="square" lIns="0" rIns="0" tIns="0" bIns="0">
-            <a:spAutoFit/>
-          </a:bodyPr>
-          <a:lstStyle/>
-          <a:p>
-            <a:pPr algn="l"/>
-            <a:r>
-              <a:rPr sz="1050" b="1" i="0">
+            <a:off x="6720840" y="3538728"/>
+            <a:ext cx="4389120" cy="274320"/>
+          </a:xfrm>
+          <a:prstGeom prst="rect">
+            <a:avLst/>
+          </a:prstGeom>
+          <a:noFill/>
+        </p:spPr>
+        <p:txBody>
+          <a:bodyPr wrap="square" lIns="0" rIns="0" tIns="0" bIns="0">
+            <a:spAutoFit/>
+          </a:bodyPr>
+          <a:lstStyle/>
+          <a:p>
+            <a:pPr algn="l"/>
+            <a:r>
+              <a:rPr sz="1000" b="1" i="0">
                 <a:solidFill>
                   <a:srgbClr val="B5121B"/>
                 </a:solidFill>
                 <a:latin typeface="Arial"/>
               </a:rPr>
-              <a:t>JSU lean LOST by 19 vs the number</a:t>
+              <a:t>machine off by 23.5 · market off by 19.5 — market closer</a:t>
             </a:r>
           </a:p>
         </p:txBody>
@@ -11021,7 +11021,7 @@
                 </a:solidFill>
                 <a:latin typeface="Arial"/>
               </a:rPr>
-              <a:t>called Stanford 26–24 · final Stanford 37–27</a:t>
+              <a:t>we called Stanford 26–24 · FINAL Stanford 37–27</a:t>
             </a:r>
           </a:p>
         </p:txBody>
@@ -11034,8 +11034,8 @@
         </p:nvSpPr>
         <p:spPr>
           <a:xfrm>
-            <a:off x="6949440" y="4096512"/>
-            <a:ext cx="4160520" cy="274320"/>
+            <a:off x="6720840" y="4096512"/>
+            <a:ext cx="4389120" cy="274320"/>
           </a:xfrm>
           <a:prstGeom prst="rect">
             <a:avLst/>
@@ -11056,7 +11056,7 @@
                 </a:solidFill>
                 <a:latin typeface="Arial"/>
               </a:rPr>
-              <a:t>machine STAN –1.5 · close –4 · actual STAN by 10</a:t>
+              <a:t>our line Stanford –1.5 · closing Stanford –4</a:t>
             </a:r>
           </a:p>
         </p:txBody>
@@ -11069,29 +11069,29 @@
         </p:nvSpPr>
         <p:spPr>
           <a:xfrm>
-            <a:off x="6949440" y="4398264"/>
-            <a:ext cx="4160520" cy="274320"/>
-          </a:xfrm>
-          <a:prstGeom prst="rect">
-            <a:avLst/>
-          </a:prstGeom>
-          <a:noFill/>
-        </p:spPr>
-        <p:txBody>
-          <a:bodyPr wrap="square" lIns="0" rIns="0" tIns="0" bIns="0">
-            <a:spAutoFit/>
-          </a:bodyPr>
-          <a:lstStyle/>
-          <a:p>
-            <a:pPr algn="l"/>
-            <a:r>
-              <a:rPr sz="1050" b="1" i="0">
+            <a:off x="6720840" y="4398264"/>
+            <a:ext cx="4389120" cy="274320"/>
+          </a:xfrm>
+          <a:prstGeom prst="rect">
+            <a:avLst/>
+          </a:prstGeom>
+          <a:noFill/>
+        </p:spPr>
+        <p:txBody>
+          <a:bodyPr wrap="square" lIns="0" rIns="0" tIns="0" bIns="0">
+            <a:spAutoFit/>
+          </a:bodyPr>
+          <a:lstStyle/>
+          <a:p>
+            <a:pPr algn="l"/>
+            <a:r>
+              <a:rPr sz="1000" b="1" i="0">
                 <a:solidFill>
                   <a:srgbClr val="B5121B"/>
                 </a:solidFill>
                 <a:latin typeface="Arial"/>
               </a:rPr>
-              <a:t>Hawai'i +5.5 lean LOST</a:t>
+              <a:t>machine off by 8.5 · market off by 6 — market closer</a:t>
             </a:r>
           </a:p>
         </p:txBody>
@@ -11253,7 +11253,7 @@
                 </a:solidFill>
                 <a:latin typeface="Arial"/>
               </a:rPr>
-              <a:t>called UNLV 32–26 · final Memphis 27–21</a:t>
+              <a:t>we called UNLV 32–26 · FINAL Memphis 27–21</a:t>
             </a:r>
           </a:p>
         </p:txBody>
@@ -11266,8 +11266,8 @@
         </p:nvSpPr>
         <p:spPr>
           <a:xfrm>
-            <a:off x="6949440" y="4956048"/>
-            <a:ext cx="4160520" cy="274320"/>
+            <a:off x="6720840" y="4956048"/>
+            <a:ext cx="4389120" cy="274320"/>
           </a:xfrm>
           <a:prstGeom prst="rect">
             <a:avLst/>
@@ -11288,7 +11288,7 @@
                 </a:solidFill>
                 <a:latin typeface="Arial"/>
               </a:rPr>
-              <a:t>machine UNLV –6 · close –4 · actual MEM by 6</a:t>
+              <a:t>our line UNLV –6 · closing UNLV –4</a:t>
             </a:r>
           </a:p>
         </p:txBody>
@@ -11301,29 +11301,29 @@
         </p:nvSpPr>
         <p:spPr>
           <a:xfrm>
-            <a:off x="6949440" y="5257800"/>
-            <a:ext cx="4160520" cy="274320"/>
-          </a:xfrm>
-          <a:prstGeom prst="rect">
-            <a:avLst/>
-          </a:prstGeom>
-          <a:noFill/>
-        </p:spPr>
-        <p:txBody>
-          <a:bodyPr wrap="square" lIns="0" rIns="0" tIns="0" bIns="0">
-            <a:spAutoFit/>
-          </a:bodyPr>
-          <a:lstStyle/>
-          <a:p>
-            <a:pPr algn="l"/>
-            <a:r>
-              <a:rPr sz="1050" b="1" i="0">
-                <a:solidFill>
-                  <a:srgbClr val="5C6B7E"/>
-                </a:solidFill>
-                <a:latin typeface="Arial"/>
-              </a:rPr>
-              <a:t>watch only — machine's side lost</a:t>
+            <a:off x="6720840" y="5257800"/>
+            <a:ext cx="4389120" cy="274320"/>
+          </a:xfrm>
+          <a:prstGeom prst="rect">
+            <a:avLst/>
+          </a:prstGeom>
+          <a:noFill/>
+        </p:spPr>
+        <p:txBody>
+          <a:bodyPr wrap="square" lIns="0" rIns="0" tIns="0" bIns="0">
+            <a:spAutoFit/>
+          </a:bodyPr>
+          <a:lstStyle/>
+          <a:p>
+            <a:pPr algn="l"/>
+            <a:r>
+              <a:rPr sz="1000" b="1" i="0">
+                <a:solidFill>
+                  <a:srgbClr val="B5121B"/>
+                </a:solidFill>
+                <a:latin typeface="Arial"/>
+              </a:rPr>
+              <a:t>machine off by 12 · market off by 10 — market closer</a:t>
             </a:r>
           </a:p>
         </p:txBody>
@@ -11402,7 +11402,7 @@
                 </a:solidFill>
                 <a:latin typeface="Arial"/>
               </a:rPr>
-              <a:t>Accuracy: machine 13.9 avg margin miss vs closing market 14.0 — a dead heat in week one. Stated leans 1–2, and the win came in the game with our biggest market disagreement (18 points of win prob). Week 0 went UNDER in 4 of 5 · σ 17.9 — one week proves nothing either way.</a:t>
+              <a:t>Total miss across five games: machine 70.0 points, closing market 70.0 — a literal dead heat. Stated leans 1–2, the win coming where we disagreed with the market most (UNC, 18 points of win prob). Week 0 went UNDER in 4 of 5 · σ 17.9 — one week proves nothing either way.</a:t>
             </a:r>
           </a:p>
         </p:txBody>

--- a/decks/2026_Week1_Episode2.pptx
+++ b/decks/2026_Week1_Episode2.pptx
@@ -3436,8 +3436,8 @@
         </p:nvSpPr>
         <p:spPr>
           <a:xfrm>
-            <a:off x="8503920" y="2286000"/>
-            <a:ext cx="2651760" cy="365760"/>
+            <a:off x="7680960" y="2286000"/>
+            <a:ext cx="3474720" cy="365760"/>
           </a:xfrm>
           <a:prstGeom prst="rect">
             <a:avLst/>
@@ -3452,13 +3452,13 @@
           <a:p>
             <a:pPr algn="r"/>
             <a:r>
-              <a:rPr sz="1500" b="1" i="0">
+              <a:rPr sz="1350" b="1" i="0">
                 <a:solidFill>
                   <a:srgbClr val="F47321"/>
                 </a:solidFill>
                 <a:latin typeface="Arial"/>
               </a:rPr>
-              <a:t>Auburn –5.5</a:t>
+              <a:t>Auburn –5.5   ·   –7 / –7</a:t>
             </a:r>
           </a:p>
         </p:txBody>
@@ -3471,8 +3471,8 @@
         </p:nvSpPr>
         <p:spPr>
           <a:xfrm>
-            <a:off x="8503920" y="2624328"/>
-            <a:ext cx="2651760" cy="274320"/>
+            <a:off x="7680960" y="2624328"/>
+            <a:ext cx="3474720" cy="274320"/>
           </a:xfrm>
           <a:prstGeom prst="rect">
             <a:avLst/>
@@ -3493,7 +3493,7 @@
                 </a:solidFill>
                 <a:latin typeface="Arial"/>
               </a:rPr>
-              <a:t>machine</a:t>
+              <a:t>machine · market</a:t>
             </a:r>
           </a:p>
         </p:txBody>
@@ -3756,8 +3756,8 @@
         </p:nvSpPr>
         <p:spPr>
           <a:xfrm>
-            <a:off x="8503920" y="3090672"/>
-            <a:ext cx="2651760" cy="365760"/>
+            <a:off x="7680960" y="3090672"/>
+            <a:ext cx="3474720" cy="365760"/>
           </a:xfrm>
           <a:prstGeom prst="rect">
             <a:avLst/>
@@ -3772,13 +3772,13 @@
           <a:p>
             <a:pPr algn="r"/>
             <a:r>
-              <a:rPr sz="1500" b="1" i="0">
+              <a:rPr sz="1350" b="1" i="0">
                 <a:solidFill>
                   <a:srgbClr val="F47321"/>
                 </a:solidFill>
                 <a:latin typeface="Arial"/>
               </a:rPr>
-              <a:t>LSU –9</a:t>
+              <a:t>LSU –9   ·   –10.5 / –10.5</a:t>
             </a:r>
           </a:p>
         </p:txBody>
@@ -3791,8 +3791,8 @@
         </p:nvSpPr>
         <p:spPr>
           <a:xfrm>
-            <a:off x="8503920" y="3429000"/>
-            <a:ext cx="2651760" cy="274320"/>
+            <a:off x="7680960" y="3429000"/>
+            <a:ext cx="3474720" cy="274320"/>
           </a:xfrm>
           <a:prstGeom prst="rect">
             <a:avLst/>
@@ -3813,7 +3813,7 @@
                 </a:solidFill>
                 <a:latin typeface="Arial"/>
               </a:rPr>
-              <a:t>machine</a:t>
+              <a:t>machine · market</a:t>
             </a:r>
           </a:p>
         </p:txBody>
@@ -4076,8 +4076,8 @@
         </p:nvSpPr>
         <p:spPr>
           <a:xfrm>
-            <a:off x="8503920" y="3895344"/>
-            <a:ext cx="2651760" cy="365760"/>
+            <a:off x="7680960" y="3895344"/>
+            <a:ext cx="3474720" cy="365760"/>
           </a:xfrm>
           <a:prstGeom prst="rect">
             <a:avLst/>
@@ -4092,13 +4092,13 @@
           <a:p>
             <a:pPr algn="r"/>
             <a:r>
-              <a:rPr sz="1500" b="1" i="0">
+              <a:rPr sz="1350" b="1" i="0">
                 <a:solidFill>
                   <a:srgbClr val="F47321"/>
                 </a:solidFill>
                 <a:latin typeface="Arial"/>
               </a:rPr>
-              <a:t>Ole Miss –6.5</a:t>
+              <a:t>Ole Miss –6.5   ·   –7 / –6.5</a:t>
             </a:r>
           </a:p>
         </p:txBody>
@@ -4111,8 +4111,8 @@
         </p:nvSpPr>
         <p:spPr>
           <a:xfrm>
-            <a:off x="8503920" y="4233672"/>
-            <a:ext cx="2651760" cy="274320"/>
+            <a:off x="7680960" y="4233672"/>
+            <a:ext cx="3474720" cy="274320"/>
           </a:xfrm>
           <a:prstGeom prst="rect">
             <a:avLst/>
@@ -4133,7 +4133,7 @@
                 </a:solidFill>
                 <a:latin typeface="Arial"/>
               </a:rPr>
-              <a:t>machine</a:t>
+              <a:t>machine · market</a:t>
             </a:r>
           </a:p>
         </p:txBody>
@@ -4396,8 +4396,8 @@
         </p:nvSpPr>
         <p:spPr>
           <a:xfrm>
-            <a:off x="8503920" y="4700016"/>
-            <a:ext cx="2651760" cy="365760"/>
+            <a:off x="7680960" y="4700016"/>
+            <a:ext cx="3474720" cy="365760"/>
           </a:xfrm>
           <a:prstGeom prst="rect">
             <a:avLst/>
@@ -4412,13 +4412,13 @@
           <a:p>
             <a:pPr algn="r"/>
             <a:r>
-              <a:rPr sz="1500" b="1" i="0">
+              <a:rPr sz="1350" b="1" i="0">
                 <a:solidFill>
                   <a:srgbClr val="F47321"/>
                 </a:solidFill>
                 <a:latin typeface="Arial"/>
               </a:rPr>
-              <a:t>ND –21</a:t>
+              <a:t>ND –21   ·   –20.5 / –20</a:t>
             </a:r>
           </a:p>
         </p:txBody>
@@ -4431,8 +4431,8 @@
         </p:nvSpPr>
         <p:spPr>
           <a:xfrm>
-            <a:off x="8503920" y="5038344"/>
-            <a:ext cx="2651760" cy="274320"/>
+            <a:off x="7680960" y="5038344"/>
+            <a:ext cx="3474720" cy="274320"/>
           </a:xfrm>
           <a:prstGeom prst="rect">
             <a:avLst/>
@@ -4453,7 +4453,7 @@
                 </a:solidFill>
                 <a:latin typeface="Arial"/>
               </a:rPr>
-              <a:t>machine</a:t>
+              <a:t>machine · market</a:t>
             </a:r>
           </a:p>
         </p:txBody>
@@ -4716,8 +4716,8 @@
         </p:nvSpPr>
         <p:spPr>
           <a:xfrm>
-            <a:off x="8503920" y="5504688"/>
-            <a:ext cx="2651760" cy="365760"/>
+            <a:off x="7680960" y="5504688"/>
+            <a:ext cx="3474720" cy="365760"/>
           </a:xfrm>
           <a:prstGeom prst="rect">
             <a:avLst/>
@@ -4732,13 +4732,13 @@
           <a:p>
             <a:pPr algn="r"/>
             <a:r>
-              <a:rPr sz="1500" b="1" i="0">
+              <a:rPr sz="1350" b="1" i="0">
                 <a:solidFill>
                   <a:srgbClr val="F47321"/>
                 </a:solidFill>
                 <a:latin typeface="Arial"/>
               </a:rPr>
-              <a:t>FSU –0.5</a:t>
+              <a:t>FSU –0.5   ·   +3 / +3</a:t>
             </a:r>
           </a:p>
         </p:txBody>
@@ -4751,8 +4751,8 @@
         </p:nvSpPr>
         <p:spPr>
           <a:xfrm>
-            <a:off x="8503920" y="5843016"/>
-            <a:ext cx="2651760" cy="274320"/>
+            <a:off x="7680960" y="5843016"/>
+            <a:ext cx="3474720" cy="274320"/>
           </a:xfrm>
           <a:prstGeom prst="rect">
             <a:avLst/>
@@ -4773,7 +4773,7 @@
                 </a:solidFill>
                 <a:latin typeface="Arial"/>
               </a:rPr>
-              <a:t>machine</a:t>
+              <a:t>machine · market</a:t>
             </a:r>
           </a:p>
         </p:txBody>

--- a/decks/2026_Week1_Episode2.pptx
+++ b/decks/2026_Week1_Episode2.pptx
@@ -4940,14 +4940,268 @@
       </p:sp>
       <p:sp>
         <p:nvSpPr>
-          <p:cNvPr id="5" name="Oval 4"/>
+          <p:cNvPr id="5" name="Rounded Rectangle 4"/>
           <p:cNvSpPr/>
           <p:nvPr/>
         </p:nvSpPr>
         <p:spPr>
           <a:xfrm>
-            <a:off x="914400" y="2276856"/>
-            <a:ext cx="146304" cy="146304"/>
+            <a:off x="822960" y="1783080"/>
+            <a:ext cx="10515600" cy="960120"/>
+          </a:xfrm>
+          <a:prstGeom prst="roundRect">
+            <a:avLst/>
+          </a:prstGeom>
+          <a:solidFill>
+            <a:srgbClr val="EAF0F8"/>
+          </a:solidFill>
+          <a:ln>
+            <a:noFill/>
+          </a:ln>
+          <a:effectLst/>
+        </p:spPr>
+        <p:style>
+          <a:lnRef idx="1">
+            <a:schemeClr val="accent1"/>
+          </a:lnRef>
+          <a:fillRef idx="3">
+            <a:schemeClr val="accent1"/>
+          </a:fillRef>
+          <a:effectRef idx="2">
+            <a:schemeClr val="accent1"/>
+          </a:effectRef>
+          <a:fontRef idx="minor">
+            <a:schemeClr val="lt1"/>
+          </a:fontRef>
+        </p:style>
+        <p:txBody>
+          <a:bodyPr rtlCol="0" anchor="ctr"/>
+          <a:lstStyle/>
+          <a:p>
+            <a:pPr algn="ctr"/>
+          </a:p>
+        </p:txBody>
+      </p:sp>
+      <p:sp>
+        <p:nvSpPr>
+          <p:cNvPr id="6" name="TextBox 5"/>
+          <p:cNvSpPr txBox="1"/>
+          <p:nvPr/>
+        </p:nvSpPr>
+        <p:spPr>
+          <a:xfrm>
+            <a:off x="1051560" y="1901952"/>
+            <a:ext cx="3246120" cy="228600"/>
+          </a:xfrm>
+          <a:prstGeom prst="rect">
+            <a:avLst/>
+          </a:prstGeom>
+          <a:noFill/>
+        </p:spPr>
+        <p:txBody>
+          <a:bodyPr wrap="square" lIns="0" rIns="0" tIns="0" bIns="0">
+            <a:spAutoFit/>
+          </a:bodyPr>
+          <a:lstStyle/>
+          <a:p>
+            <a:pPr algn="l"/>
+            <a:r>
+              <a:rPr sz="950" b="1" i="0">
+                <a:solidFill>
+                  <a:srgbClr val="F47321"/>
+                </a:solidFill>
+                <a:latin typeface="Arial"/>
+              </a:rPr>
+              <a:t>COACH</a:t>
+            </a:r>
+          </a:p>
+        </p:txBody>
+      </p:sp>
+      <p:sp>
+        <p:nvSpPr>
+          <p:cNvPr id="7" name="TextBox 6"/>
+          <p:cNvSpPr txBox="1"/>
+          <p:nvPr/>
+        </p:nvSpPr>
+        <p:spPr>
+          <a:xfrm>
+            <a:off x="1051560" y="2139696"/>
+            <a:ext cx="3246120" cy="548640"/>
+          </a:xfrm>
+          <a:prstGeom prst="rect">
+            <a:avLst/>
+          </a:prstGeom>
+          <a:noFill/>
+        </p:spPr>
+        <p:txBody>
+          <a:bodyPr wrap="square" lIns="0" rIns="0" tIns="0" bIns="0">
+            <a:spAutoFit/>
+          </a:bodyPr>
+          <a:lstStyle/>
+          <a:p>
+            <a:pPr algn="l"/>
+            <a:r>
+              <a:rPr sz="1050" b="0" i="0">
+                <a:solidFill>
+                  <a:srgbClr val="16273D"/>
+                </a:solidFill>
+                <a:latin typeface="Arial"/>
+              </a:rPr>
+              <a:t>Brohm, year 4</a:t>
+            </a:r>
+          </a:p>
+        </p:txBody>
+      </p:sp>
+      <p:sp>
+        <p:nvSpPr>
+          <p:cNvPr id="8" name="TextBox 7"/>
+          <p:cNvSpPr txBox="1"/>
+          <p:nvPr/>
+        </p:nvSpPr>
+        <p:spPr>
+          <a:xfrm>
+            <a:off x="4572000" y="1901952"/>
+            <a:ext cx="3246120" cy="228600"/>
+          </a:xfrm>
+          <a:prstGeom prst="rect">
+            <a:avLst/>
+          </a:prstGeom>
+          <a:noFill/>
+        </p:spPr>
+        <p:txBody>
+          <a:bodyPr wrap="square" lIns="0" rIns="0" tIns="0" bIns="0">
+            <a:spAutoFit/>
+          </a:bodyPr>
+          <a:lstStyle/>
+          <a:p>
+            <a:pPr algn="l"/>
+            <a:r>
+              <a:rPr sz="950" b="1" i="0">
+                <a:solidFill>
+                  <a:srgbClr val="F47321"/>
+                </a:solidFill>
+                <a:latin typeface="Arial"/>
+              </a:rPr>
+              <a:t>QB</a:t>
+            </a:r>
+          </a:p>
+        </p:txBody>
+      </p:sp>
+      <p:sp>
+        <p:nvSpPr>
+          <p:cNvPr id="9" name="TextBox 8"/>
+          <p:cNvSpPr txBox="1"/>
+          <p:nvPr/>
+        </p:nvSpPr>
+        <p:spPr>
+          <a:xfrm>
+            <a:off x="4572000" y="2139696"/>
+            <a:ext cx="3246120" cy="548640"/>
+          </a:xfrm>
+          <a:prstGeom prst="rect">
+            <a:avLst/>
+          </a:prstGeom>
+          <a:noFill/>
+        </p:spPr>
+        <p:txBody>
+          <a:bodyPr wrap="square" lIns="0" rIns="0" tIns="0" bIns="0">
+            <a:spAutoFit/>
+          </a:bodyPr>
+          <a:lstStyle/>
+          <a:p>
+            <a:pPr algn="l"/>
+            <a:r>
+              <a:rPr sz="1050" b="0" i="0">
+                <a:solidFill>
+                  <a:srgbClr val="16273D"/>
+                </a:solidFill>
+                <a:latin typeface="Arial"/>
+              </a:rPr>
+              <a:t>NEW — Kienholz: third QB1 in three years, least-proven yet</a:t>
+            </a:r>
+          </a:p>
+        </p:txBody>
+      </p:sp>
+      <p:sp>
+        <p:nvSpPr>
+          <p:cNvPr id="10" name="TextBox 9"/>
+          <p:cNvSpPr txBox="1"/>
+          <p:nvPr/>
+        </p:nvSpPr>
+        <p:spPr>
+          <a:xfrm>
+            <a:off x="8092440" y="1901952"/>
+            <a:ext cx="3246120" cy="228600"/>
+          </a:xfrm>
+          <a:prstGeom prst="rect">
+            <a:avLst/>
+          </a:prstGeom>
+          <a:noFill/>
+        </p:spPr>
+        <p:txBody>
+          <a:bodyPr wrap="square" lIns="0" rIns="0" tIns="0" bIns="0">
+            <a:spAutoFit/>
+          </a:bodyPr>
+          <a:lstStyle/>
+          <a:p>
+            <a:pPr algn="l"/>
+            <a:r>
+              <a:rPr sz="950" b="1" i="0">
+                <a:solidFill>
+                  <a:srgbClr val="F47321"/>
+                </a:solidFill>
+                <a:latin typeface="Arial"/>
+              </a:rPr>
+              <a:t>ROSTER</a:t>
+            </a:r>
+          </a:p>
+        </p:txBody>
+      </p:sp>
+      <p:sp>
+        <p:nvSpPr>
+          <p:cNvPr id="11" name="TextBox 10"/>
+          <p:cNvSpPr txBox="1"/>
+          <p:nvPr/>
+        </p:nvSpPr>
+        <p:spPr>
+          <a:xfrm>
+            <a:off x="8092440" y="2139696"/>
+            <a:ext cx="3246120" cy="548640"/>
+          </a:xfrm>
+          <a:prstGeom prst="rect">
+            <a:avLst/>
+          </a:prstGeom>
+          <a:noFill/>
+        </p:spPr>
+        <p:txBody>
+          <a:bodyPr wrap="square" lIns="0" rIns="0" tIns="0" bIns="0">
+            <a:spAutoFit/>
+          </a:bodyPr>
+          <a:lstStyle/>
+          <a:p>
+            <a:pPr algn="l"/>
+            <a:r>
+              <a:rPr sz="1050" b="0" i="0">
+                <a:solidFill>
+                  <a:srgbClr val="16273D"/>
+                </a:solidFill>
+                <a:latin typeface="Arial"/>
+              </a:rPr>
+              <a:t>35% back · 33 portal adds — the annual Brohm re-skin</a:t>
+            </a:r>
+          </a:p>
+        </p:txBody>
+      </p:sp>
+      <p:sp>
+        <p:nvSpPr>
+          <p:cNvPr id="12" name="Oval 11"/>
+          <p:cNvSpPr/>
+          <p:nvPr/>
+        </p:nvSpPr>
+        <p:spPr>
+          <a:xfrm>
+            <a:off x="914400" y="3218688"/>
+            <a:ext cx="137160" cy="137160"/>
           </a:xfrm>
           <a:prstGeom prst="ellipse">
             <a:avLst/>
@@ -4984,29 +5238,29 @@
       </p:sp>
       <p:sp>
         <p:nvSpPr>
-          <p:cNvPr id="6" name="TextBox 5"/>
-          <p:cNvSpPr txBox="1"/>
-          <p:nvPr/>
-        </p:nvSpPr>
-        <p:spPr>
-          <a:xfrm>
-            <a:off x="1325880" y="2148840"/>
-            <a:ext cx="9601200" cy="777240"/>
-          </a:xfrm>
-          <a:prstGeom prst="rect">
-            <a:avLst/>
-          </a:prstGeom>
-          <a:noFill/>
-        </p:spPr>
-        <p:txBody>
-          <a:bodyPr wrap="square" lIns="0" rIns="0" tIns="0" bIns="0">
-            <a:spAutoFit/>
-          </a:bodyPr>
-          <a:lstStyle/>
-          <a:p>
-            <a:pPr algn="l"/>
-            <a:r>
-              <a:rPr sz="1700" b="0" i="0">
+          <p:cNvPr id="13" name="TextBox 12"/>
+          <p:cNvSpPr txBox="1"/>
+          <p:nvPr/>
+        </p:nvSpPr>
+        <p:spPr>
+          <a:xfrm>
+            <a:off x="1325880" y="3108960"/>
+            <a:ext cx="9601200" cy="731520"/>
+          </a:xfrm>
+          <a:prstGeom prst="rect">
+            <a:avLst/>
+          </a:prstGeom>
+          <a:noFill/>
+        </p:spPr>
+        <p:txBody>
+          <a:bodyPr wrap="square" lIns="0" rIns="0" tIns="0" bIns="0">
+            <a:spAutoFit/>
+          </a:bodyPr>
+          <a:lstStyle/>
+          <a:p>
+            <a:pPr algn="l"/>
+            <a:r>
+              <a:rPr sz="1550" b="0" i="0">
                 <a:solidFill>
                   <a:srgbClr val="16273D"/>
                 </a:solidFill>
@@ -5019,14 +5273,14 @@
       </p:sp>
       <p:sp>
         <p:nvSpPr>
-          <p:cNvPr id="7" name="Oval 6"/>
+          <p:cNvPr id="14" name="Oval 13"/>
           <p:cNvSpPr/>
           <p:nvPr/>
         </p:nvSpPr>
         <p:spPr>
           <a:xfrm>
-            <a:off x="914400" y="3236976"/>
-            <a:ext cx="146304" cy="146304"/>
+            <a:off x="914400" y="4059936"/>
+            <a:ext cx="137160" cy="137160"/>
           </a:xfrm>
           <a:prstGeom prst="ellipse">
             <a:avLst/>
@@ -5063,29 +5317,29 @@
       </p:sp>
       <p:sp>
         <p:nvSpPr>
-          <p:cNvPr id="8" name="TextBox 7"/>
-          <p:cNvSpPr txBox="1"/>
-          <p:nvPr/>
-        </p:nvSpPr>
-        <p:spPr>
-          <a:xfrm>
-            <a:off x="1325880" y="3108960"/>
-            <a:ext cx="9601200" cy="777240"/>
-          </a:xfrm>
-          <a:prstGeom prst="rect">
-            <a:avLst/>
-          </a:prstGeom>
-          <a:noFill/>
-        </p:spPr>
-        <p:txBody>
-          <a:bodyPr wrap="square" lIns="0" rIns="0" tIns="0" bIns="0">
-            <a:spAutoFit/>
-          </a:bodyPr>
-          <a:lstStyle/>
-          <a:p>
-            <a:pPr algn="l"/>
-            <a:r>
-              <a:rPr sz="1700" b="0" i="0">
+          <p:cNvPr id="15" name="TextBox 14"/>
+          <p:cNvSpPr txBox="1"/>
+          <p:nvPr/>
+        </p:nvSpPr>
+        <p:spPr>
+          <a:xfrm>
+            <a:off x="1325880" y="3950208"/>
+            <a:ext cx="9601200" cy="731520"/>
+          </a:xfrm>
+          <a:prstGeom prst="rect">
+            <a:avLst/>
+          </a:prstGeom>
+          <a:noFill/>
+        </p:spPr>
+        <p:txBody>
+          <a:bodyPr wrap="square" lIns="0" rIns="0" tIns="0" bIns="0">
+            <a:spAutoFit/>
+          </a:bodyPr>
+          <a:lstStyle/>
+          <a:p>
+            <a:pPr algn="l"/>
+            <a:r>
+              <a:rPr sz="1550" b="0" i="0">
                 <a:solidFill>
                   <a:srgbClr val="16273D"/>
                 </a:solidFill>
@@ -5098,14 +5352,14 @@
       </p:sp>
       <p:sp>
         <p:nvSpPr>
-          <p:cNvPr id="9" name="Oval 8"/>
+          <p:cNvPr id="16" name="Oval 15"/>
           <p:cNvSpPr/>
           <p:nvPr/>
         </p:nvSpPr>
         <p:spPr>
           <a:xfrm>
-            <a:off x="914400" y="4197096"/>
-            <a:ext cx="146304" cy="146304"/>
+            <a:off x="914400" y="4901184"/>
+            <a:ext cx="137160" cy="137160"/>
           </a:xfrm>
           <a:prstGeom prst="ellipse">
             <a:avLst/>
@@ -5142,29 +5396,29 @@
       </p:sp>
       <p:sp>
         <p:nvSpPr>
-          <p:cNvPr id="10" name="TextBox 9"/>
-          <p:cNvSpPr txBox="1"/>
-          <p:nvPr/>
-        </p:nvSpPr>
-        <p:spPr>
-          <a:xfrm>
-            <a:off x="1325880" y="4069080"/>
-            <a:ext cx="9601200" cy="777240"/>
-          </a:xfrm>
-          <a:prstGeom prst="rect">
-            <a:avLst/>
-          </a:prstGeom>
-          <a:noFill/>
-        </p:spPr>
-        <p:txBody>
-          <a:bodyPr wrap="square" lIns="0" rIns="0" tIns="0" bIns="0">
-            <a:spAutoFit/>
-          </a:bodyPr>
-          <a:lstStyle/>
-          <a:p>
-            <a:pPr algn="l"/>
-            <a:r>
-              <a:rPr sz="1700" b="0" i="0">
+          <p:cNvPr id="17" name="TextBox 16"/>
+          <p:cNvSpPr txBox="1"/>
+          <p:nvPr/>
+        </p:nvSpPr>
+        <p:spPr>
+          <a:xfrm>
+            <a:off x="1325880" y="4791456"/>
+            <a:ext cx="9601200" cy="731520"/>
+          </a:xfrm>
+          <a:prstGeom prst="rect">
+            <a:avLst/>
+          </a:prstGeom>
+          <a:noFill/>
+        </p:spPr>
+        <p:txBody>
+          <a:bodyPr wrap="square" lIns="0" rIns="0" tIns="0" bIns="0">
+            <a:spAutoFit/>
+          </a:bodyPr>
+          <a:lstStyle/>
+          <a:p>
+            <a:pPr algn="l"/>
+            <a:r>
+              <a:rPr sz="1550" b="0" i="0">
                 <a:solidFill>
                   <a:srgbClr val="16273D"/>
                 </a:solidFill>
@@ -5177,14 +5431,14 @@
       </p:sp>
       <p:sp>
         <p:nvSpPr>
-          <p:cNvPr id="11" name="Oval 10"/>
+          <p:cNvPr id="18" name="Oval 17"/>
           <p:cNvSpPr/>
           <p:nvPr/>
         </p:nvSpPr>
         <p:spPr>
           <a:xfrm>
-            <a:off x="914400" y="5157216"/>
-            <a:ext cx="146304" cy="146304"/>
+            <a:off x="914400" y="5742432"/>
+            <a:ext cx="137160" cy="137160"/>
           </a:xfrm>
           <a:prstGeom prst="ellipse">
             <a:avLst/>
@@ -5221,29 +5475,29 @@
       </p:sp>
       <p:sp>
         <p:nvSpPr>
-          <p:cNvPr id="12" name="TextBox 11"/>
-          <p:cNvSpPr txBox="1"/>
-          <p:nvPr/>
-        </p:nvSpPr>
-        <p:spPr>
-          <a:xfrm>
-            <a:off x="1325880" y="5029200"/>
-            <a:ext cx="9601200" cy="777240"/>
-          </a:xfrm>
-          <a:prstGeom prst="rect">
-            <a:avLst/>
-          </a:prstGeom>
-          <a:noFill/>
-        </p:spPr>
-        <p:txBody>
-          <a:bodyPr wrap="square" lIns="0" rIns="0" tIns="0" bIns="0">
-            <a:spAutoFit/>
-          </a:bodyPr>
-          <a:lstStyle/>
-          <a:p>
-            <a:pPr algn="l"/>
-            <a:r>
-              <a:rPr sz="1700" b="0" i="0">
+          <p:cNvPr id="19" name="TextBox 18"/>
+          <p:cNvSpPr txBox="1"/>
+          <p:nvPr/>
+        </p:nvSpPr>
+        <p:spPr>
+          <a:xfrm>
+            <a:off x="1325880" y="5632704"/>
+            <a:ext cx="9601200" cy="731520"/>
+          </a:xfrm>
+          <a:prstGeom prst="rect">
+            <a:avLst/>
+          </a:prstGeom>
+          <a:noFill/>
+        </p:spPr>
+        <p:txBody>
+          <a:bodyPr wrap="square" lIns="0" rIns="0" tIns="0" bIns="0">
+            <a:spAutoFit/>
+          </a:bodyPr>
+          <a:lstStyle/>
+          <a:p>
+            <a:pPr algn="l"/>
+            <a:r>
+              <a:rPr sz="1550" b="0" i="0">
                 <a:solidFill>
                   <a:srgbClr val="16273D"/>
                 </a:solidFill>
@@ -5256,7 +5510,7 @@
       </p:sp>
       <p:sp>
         <p:nvSpPr>
-          <p:cNvPr id="13" name="TextBox 12"/>
+          <p:cNvPr id="20" name="TextBox 19"/>
           <p:cNvSpPr txBox="1"/>
           <p:nvPr/>
         </p:nvSpPr>
@@ -5411,14 +5665,268 @@
       </p:sp>
       <p:sp>
         <p:nvSpPr>
-          <p:cNvPr id="5" name="Oval 4"/>
+          <p:cNvPr id="5" name="Rounded Rectangle 4"/>
           <p:cNvSpPr/>
           <p:nvPr/>
         </p:nvSpPr>
         <p:spPr>
           <a:xfrm>
-            <a:off x="914400" y="2276856"/>
-            <a:ext cx="146304" cy="146304"/>
+            <a:off x="822960" y="1783080"/>
+            <a:ext cx="10515600" cy="960120"/>
+          </a:xfrm>
+          <a:prstGeom prst="roundRect">
+            <a:avLst/>
+          </a:prstGeom>
+          <a:solidFill>
+            <a:srgbClr val="EAF0F8"/>
+          </a:solidFill>
+          <a:ln>
+            <a:noFill/>
+          </a:ln>
+          <a:effectLst/>
+        </p:spPr>
+        <p:style>
+          <a:lnRef idx="1">
+            <a:schemeClr val="accent1"/>
+          </a:lnRef>
+          <a:fillRef idx="3">
+            <a:schemeClr val="accent1"/>
+          </a:fillRef>
+          <a:effectRef idx="2">
+            <a:schemeClr val="accent1"/>
+          </a:effectRef>
+          <a:fontRef idx="minor">
+            <a:schemeClr val="lt1"/>
+          </a:fontRef>
+        </p:style>
+        <p:txBody>
+          <a:bodyPr rtlCol="0" anchor="ctr"/>
+          <a:lstStyle/>
+          <a:p>
+            <a:pPr algn="ctr"/>
+          </a:p>
+        </p:txBody>
+      </p:sp>
+      <p:sp>
+        <p:nvSpPr>
+          <p:cNvPr id="6" name="TextBox 5"/>
+          <p:cNvSpPr txBox="1"/>
+          <p:nvPr/>
+        </p:nvSpPr>
+        <p:spPr>
+          <a:xfrm>
+            <a:off x="1051560" y="1901952"/>
+            <a:ext cx="3246120" cy="228600"/>
+          </a:xfrm>
+          <a:prstGeom prst="rect">
+            <a:avLst/>
+          </a:prstGeom>
+          <a:noFill/>
+        </p:spPr>
+        <p:txBody>
+          <a:bodyPr wrap="square" lIns="0" rIns="0" tIns="0" bIns="0">
+            <a:spAutoFit/>
+          </a:bodyPr>
+          <a:lstStyle/>
+          <a:p>
+            <a:pPr algn="l"/>
+            <a:r>
+              <a:rPr sz="950" b="1" i="0">
+                <a:solidFill>
+                  <a:srgbClr val="F47321"/>
+                </a:solidFill>
+                <a:latin typeface="Arial"/>
+              </a:rPr>
+              <a:t>COACH</a:t>
+            </a:r>
+          </a:p>
+        </p:txBody>
+      </p:sp>
+      <p:sp>
+        <p:nvSpPr>
+          <p:cNvPr id="7" name="TextBox 6"/>
+          <p:cNvSpPr txBox="1"/>
+          <p:nvPr/>
+        </p:nvSpPr>
+        <p:spPr>
+          <a:xfrm>
+            <a:off x="1051560" y="2139696"/>
+            <a:ext cx="3246120" cy="548640"/>
+          </a:xfrm>
+          <a:prstGeom prst="rect">
+            <a:avLst/>
+          </a:prstGeom>
+          <a:noFill/>
+        </p:spPr>
+        <p:txBody>
+          <a:bodyPr wrap="square" lIns="0" rIns="0" tIns="0" bIns="0">
+            <a:spAutoFit/>
+          </a:bodyPr>
+          <a:lstStyle/>
+          <a:p>
+            <a:pPr algn="l"/>
+            <a:r>
+              <a:rPr sz="1050" b="0" i="0">
+                <a:solidFill>
+                  <a:srgbClr val="16273D"/>
+                </a:solidFill>
+                <a:latin typeface="Arial"/>
+              </a:rPr>
+              <a:t>NEW — Pete Golding, promoted; kept the defensive spine</a:t>
+            </a:r>
+          </a:p>
+        </p:txBody>
+      </p:sp>
+      <p:sp>
+        <p:nvSpPr>
+          <p:cNvPr id="8" name="TextBox 7"/>
+          <p:cNvSpPr txBox="1"/>
+          <p:nvPr/>
+        </p:nvSpPr>
+        <p:spPr>
+          <a:xfrm>
+            <a:off x="4572000" y="1901952"/>
+            <a:ext cx="3246120" cy="228600"/>
+          </a:xfrm>
+          <a:prstGeom prst="rect">
+            <a:avLst/>
+          </a:prstGeom>
+          <a:noFill/>
+        </p:spPr>
+        <p:txBody>
+          <a:bodyPr wrap="square" lIns="0" rIns="0" tIns="0" bIns="0">
+            <a:spAutoFit/>
+          </a:bodyPr>
+          <a:lstStyle/>
+          <a:p>
+            <a:pPr algn="l"/>
+            <a:r>
+              <a:rPr sz="950" b="1" i="0">
+                <a:solidFill>
+                  <a:srgbClr val="F47321"/>
+                </a:solidFill>
+                <a:latin typeface="Arial"/>
+              </a:rPr>
+              <a:t>QB</a:t>
+            </a:r>
+          </a:p>
+        </p:txBody>
+      </p:sp>
+      <p:sp>
+        <p:nvSpPr>
+          <p:cNvPr id="9" name="TextBox 8"/>
+          <p:cNvSpPr txBox="1"/>
+          <p:nvPr/>
+        </p:nvSpPr>
+        <p:spPr>
+          <a:xfrm>
+            <a:off x="4572000" y="2139696"/>
+            <a:ext cx="3246120" cy="548640"/>
+          </a:xfrm>
+          <a:prstGeom prst="rect">
+            <a:avLst/>
+          </a:prstGeom>
+          <a:noFill/>
+        </p:spPr>
+        <p:txBody>
+          <a:bodyPr wrap="square" lIns="0" rIns="0" tIns="0" bIns="0">
+            <a:spAutoFit/>
+          </a:bodyPr>
+          <a:lstStyle/>
+          <a:p>
+            <a:pPr algn="l"/>
+            <a:r>
+              <a:rPr sz="1050" b="0" i="0">
+                <a:solidFill>
+                  <a:srgbClr val="16273D"/>
+                </a:solidFill>
+                <a:latin typeface="Arial"/>
+              </a:rPr>
+              <a:t>RETURNS — Chambliss, SEC Newcomer of the Year; won his eligibility appeal</a:t>
+            </a:r>
+          </a:p>
+        </p:txBody>
+      </p:sp>
+      <p:sp>
+        <p:nvSpPr>
+          <p:cNvPr id="10" name="TextBox 9"/>
+          <p:cNvSpPr txBox="1"/>
+          <p:nvPr/>
+        </p:nvSpPr>
+        <p:spPr>
+          <a:xfrm>
+            <a:off x="8092440" y="1901952"/>
+            <a:ext cx="3246120" cy="228600"/>
+          </a:xfrm>
+          <a:prstGeom prst="rect">
+            <a:avLst/>
+          </a:prstGeom>
+          <a:noFill/>
+        </p:spPr>
+        <p:txBody>
+          <a:bodyPr wrap="square" lIns="0" rIns="0" tIns="0" bIns="0">
+            <a:spAutoFit/>
+          </a:bodyPr>
+          <a:lstStyle/>
+          <a:p>
+            <a:pPr algn="l"/>
+            <a:r>
+              <a:rPr sz="950" b="1" i="0">
+                <a:solidFill>
+                  <a:srgbClr val="F47321"/>
+                </a:solidFill>
+                <a:latin typeface="Arial"/>
+              </a:rPr>
+              <a:t>ROSTER</a:t>
+            </a:r>
+          </a:p>
+        </p:txBody>
+      </p:sp>
+      <p:sp>
+        <p:nvSpPr>
+          <p:cNvPr id="11" name="TextBox 10"/>
+          <p:cNvSpPr txBox="1"/>
+          <p:nvPr/>
+        </p:nvSpPr>
+        <p:spPr>
+          <a:xfrm>
+            <a:off x="8092440" y="2139696"/>
+            <a:ext cx="3246120" cy="548640"/>
+          </a:xfrm>
+          <a:prstGeom prst="rect">
+            <a:avLst/>
+          </a:prstGeom>
+          <a:noFill/>
+        </p:spPr>
+        <p:txBody>
+          <a:bodyPr wrap="square" lIns="0" rIns="0" tIns="0" bIns="0">
+            <a:spAutoFit/>
+          </a:bodyPr>
+          <a:lstStyle/>
+          <a:p>
+            <a:pPr algn="l"/>
+            <a:r>
+              <a:rPr sz="1050" b="0" i="0">
+                <a:solidFill>
+                  <a:srgbClr val="16273D"/>
+                </a:solidFill>
+                <a:latin typeface="Arial"/>
+              </a:rPr>
+              <a:t>50% back · 28 portal adds — the spine stayed</a:t>
+            </a:r>
+          </a:p>
+        </p:txBody>
+      </p:sp>
+      <p:sp>
+        <p:nvSpPr>
+          <p:cNvPr id="12" name="Oval 11"/>
+          <p:cNvSpPr/>
+          <p:nvPr/>
+        </p:nvSpPr>
+        <p:spPr>
+          <a:xfrm>
+            <a:off x="914400" y="3218688"/>
+            <a:ext cx="137160" cy="137160"/>
           </a:xfrm>
           <a:prstGeom prst="ellipse">
             <a:avLst/>
@@ -5455,29 +5963,29 @@
       </p:sp>
       <p:sp>
         <p:nvSpPr>
-          <p:cNvPr id="6" name="TextBox 5"/>
-          <p:cNvSpPr txBox="1"/>
-          <p:nvPr/>
-        </p:nvSpPr>
-        <p:spPr>
-          <a:xfrm>
-            <a:off x="1325880" y="2148840"/>
-            <a:ext cx="9601200" cy="777240"/>
-          </a:xfrm>
-          <a:prstGeom prst="rect">
-            <a:avLst/>
-          </a:prstGeom>
-          <a:noFill/>
-        </p:spPr>
-        <p:txBody>
-          <a:bodyPr wrap="square" lIns="0" rIns="0" tIns="0" bIns="0">
-            <a:spAutoFit/>
-          </a:bodyPr>
-          <a:lstStyle/>
-          <a:p>
-            <a:pPr algn="l"/>
-            <a:r>
-              <a:rPr sz="1700" b="0" i="0">
+          <p:cNvPr id="13" name="TextBox 12"/>
+          <p:cNvSpPr txBox="1"/>
+          <p:nvPr/>
+        </p:nvSpPr>
+        <p:spPr>
+          <a:xfrm>
+            <a:off x="1325880" y="3108960"/>
+            <a:ext cx="9601200" cy="731520"/>
+          </a:xfrm>
+          <a:prstGeom prst="rect">
+            <a:avLst/>
+          </a:prstGeom>
+          <a:noFill/>
+        </p:spPr>
+        <p:txBody>
+          <a:bodyPr wrap="square" lIns="0" rIns="0" tIns="0" bIns="0">
+            <a:spAutoFit/>
+          </a:bodyPr>
+          <a:lstStyle/>
+          <a:p>
+            <a:pPr algn="l"/>
+            <a:r>
+              <a:rPr sz="1550" b="0" i="0">
                 <a:solidFill>
                   <a:srgbClr val="16273D"/>
                 </a:solidFill>
@@ -5490,14 +5998,14 @@
       </p:sp>
       <p:sp>
         <p:nvSpPr>
-          <p:cNvPr id="7" name="Oval 6"/>
+          <p:cNvPr id="14" name="Oval 13"/>
           <p:cNvSpPr/>
           <p:nvPr/>
         </p:nvSpPr>
         <p:spPr>
           <a:xfrm>
-            <a:off x="914400" y="3236976"/>
-            <a:ext cx="146304" cy="146304"/>
+            <a:off x="914400" y="4059936"/>
+            <a:ext cx="137160" cy="137160"/>
           </a:xfrm>
           <a:prstGeom prst="ellipse">
             <a:avLst/>
@@ -5534,29 +6042,29 @@
       </p:sp>
       <p:sp>
         <p:nvSpPr>
-          <p:cNvPr id="8" name="TextBox 7"/>
-          <p:cNvSpPr txBox="1"/>
-          <p:nvPr/>
-        </p:nvSpPr>
-        <p:spPr>
-          <a:xfrm>
-            <a:off x="1325880" y="3108960"/>
-            <a:ext cx="9601200" cy="777240"/>
-          </a:xfrm>
-          <a:prstGeom prst="rect">
-            <a:avLst/>
-          </a:prstGeom>
-          <a:noFill/>
-        </p:spPr>
-        <p:txBody>
-          <a:bodyPr wrap="square" lIns="0" rIns="0" tIns="0" bIns="0">
-            <a:spAutoFit/>
-          </a:bodyPr>
-          <a:lstStyle/>
-          <a:p>
-            <a:pPr algn="l"/>
-            <a:r>
-              <a:rPr sz="1700" b="0" i="0">
+          <p:cNvPr id="15" name="TextBox 14"/>
+          <p:cNvSpPr txBox="1"/>
+          <p:nvPr/>
+        </p:nvSpPr>
+        <p:spPr>
+          <a:xfrm>
+            <a:off x="1325880" y="3950208"/>
+            <a:ext cx="9601200" cy="731520"/>
+          </a:xfrm>
+          <a:prstGeom prst="rect">
+            <a:avLst/>
+          </a:prstGeom>
+          <a:noFill/>
+        </p:spPr>
+        <p:txBody>
+          <a:bodyPr wrap="square" lIns="0" rIns="0" tIns="0" bIns="0">
+            <a:spAutoFit/>
+          </a:bodyPr>
+          <a:lstStyle/>
+          <a:p>
+            <a:pPr algn="l"/>
+            <a:r>
+              <a:rPr sz="1550" b="0" i="0">
                 <a:solidFill>
                   <a:srgbClr val="16273D"/>
                 </a:solidFill>
@@ -5569,14 +6077,14 @@
       </p:sp>
       <p:sp>
         <p:nvSpPr>
-          <p:cNvPr id="9" name="Oval 8"/>
+          <p:cNvPr id="16" name="Oval 15"/>
           <p:cNvSpPr/>
           <p:nvPr/>
         </p:nvSpPr>
         <p:spPr>
           <a:xfrm>
-            <a:off x="914400" y="4197096"/>
-            <a:ext cx="146304" cy="146304"/>
+            <a:off x="914400" y="4901184"/>
+            <a:ext cx="137160" cy="137160"/>
           </a:xfrm>
           <a:prstGeom prst="ellipse">
             <a:avLst/>
@@ -5613,29 +6121,29 @@
       </p:sp>
       <p:sp>
         <p:nvSpPr>
-          <p:cNvPr id="10" name="TextBox 9"/>
-          <p:cNvSpPr txBox="1"/>
-          <p:nvPr/>
-        </p:nvSpPr>
-        <p:spPr>
-          <a:xfrm>
-            <a:off x="1325880" y="4069080"/>
-            <a:ext cx="9601200" cy="777240"/>
-          </a:xfrm>
-          <a:prstGeom prst="rect">
-            <a:avLst/>
-          </a:prstGeom>
-          <a:noFill/>
-        </p:spPr>
-        <p:txBody>
-          <a:bodyPr wrap="square" lIns="0" rIns="0" tIns="0" bIns="0">
-            <a:spAutoFit/>
-          </a:bodyPr>
-          <a:lstStyle/>
-          <a:p>
-            <a:pPr algn="l"/>
-            <a:r>
-              <a:rPr sz="1700" b="0" i="0">
+          <p:cNvPr id="17" name="TextBox 16"/>
+          <p:cNvSpPr txBox="1"/>
+          <p:nvPr/>
+        </p:nvSpPr>
+        <p:spPr>
+          <a:xfrm>
+            <a:off x="1325880" y="4791456"/>
+            <a:ext cx="9601200" cy="731520"/>
+          </a:xfrm>
+          <a:prstGeom prst="rect">
+            <a:avLst/>
+          </a:prstGeom>
+          <a:noFill/>
+        </p:spPr>
+        <p:txBody>
+          <a:bodyPr wrap="square" lIns="0" rIns="0" tIns="0" bIns="0">
+            <a:spAutoFit/>
+          </a:bodyPr>
+          <a:lstStyle/>
+          <a:p>
+            <a:pPr algn="l"/>
+            <a:r>
+              <a:rPr sz="1550" b="0" i="0">
                 <a:solidFill>
                   <a:srgbClr val="16273D"/>
                 </a:solidFill>
@@ -5648,14 +6156,14 @@
       </p:sp>
       <p:sp>
         <p:nvSpPr>
-          <p:cNvPr id="11" name="Oval 10"/>
+          <p:cNvPr id="18" name="Oval 17"/>
           <p:cNvSpPr/>
           <p:nvPr/>
         </p:nvSpPr>
         <p:spPr>
           <a:xfrm>
-            <a:off x="914400" y="5157216"/>
-            <a:ext cx="146304" cy="146304"/>
+            <a:off x="914400" y="5742432"/>
+            <a:ext cx="137160" cy="137160"/>
           </a:xfrm>
           <a:prstGeom prst="ellipse">
             <a:avLst/>
@@ -5692,29 +6200,29 @@
       </p:sp>
       <p:sp>
         <p:nvSpPr>
-          <p:cNvPr id="12" name="TextBox 11"/>
-          <p:cNvSpPr txBox="1"/>
-          <p:nvPr/>
-        </p:nvSpPr>
-        <p:spPr>
-          <a:xfrm>
-            <a:off x="1325880" y="5029200"/>
-            <a:ext cx="9601200" cy="777240"/>
-          </a:xfrm>
-          <a:prstGeom prst="rect">
-            <a:avLst/>
-          </a:prstGeom>
-          <a:noFill/>
-        </p:spPr>
-        <p:txBody>
-          <a:bodyPr wrap="square" lIns="0" rIns="0" tIns="0" bIns="0">
-            <a:spAutoFit/>
-          </a:bodyPr>
-          <a:lstStyle/>
-          <a:p>
-            <a:pPr algn="l"/>
-            <a:r>
-              <a:rPr sz="1700" b="0" i="0">
+          <p:cNvPr id="19" name="TextBox 18"/>
+          <p:cNvSpPr txBox="1"/>
+          <p:nvPr/>
+        </p:nvSpPr>
+        <p:spPr>
+          <a:xfrm>
+            <a:off x="1325880" y="5632704"/>
+            <a:ext cx="9601200" cy="731520"/>
+          </a:xfrm>
+          <a:prstGeom prst="rect">
+            <a:avLst/>
+          </a:prstGeom>
+          <a:noFill/>
+        </p:spPr>
+        <p:txBody>
+          <a:bodyPr wrap="square" lIns="0" rIns="0" tIns="0" bIns="0">
+            <a:spAutoFit/>
+          </a:bodyPr>
+          <a:lstStyle/>
+          <a:p>
+            <a:pPr algn="l"/>
+            <a:r>
+              <a:rPr sz="1550" b="0" i="0">
                 <a:solidFill>
                   <a:srgbClr val="16273D"/>
                 </a:solidFill>
@@ -5727,7 +6235,7 @@
       </p:sp>
       <p:sp>
         <p:nvSpPr>
-          <p:cNvPr id="13" name="TextBox 12"/>
+          <p:cNvPr id="20" name="TextBox 19"/>
           <p:cNvSpPr txBox="1"/>
           <p:nvPr/>
         </p:nvSpPr>
@@ -5969,7 +6477,7 @@
                 </a:solidFill>
                 <a:latin typeface="Arial"/>
               </a:rPr>
-              <a:t>WHAT DECIDES IT</a:t>
+              <a:t>WHY IT MATTERS</a:t>
             </a:r>
           </a:p>
         </p:txBody>
@@ -6048,7 +6556,7 @@
                 </a:solidFill>
                 <a:latin typeface="Arial"/>
               </a:rPr>
-              <a:t>Fickell's run-first survival pivot vs a tite front built to erase exactly that</a:t>
+              <a:t>The revenge tour begins — 'Leave No Doubt' opens at Lambeau Field</a:t>
             </a:r>
           </a:p>
         </p:txBody>
@@ -6127,7 +6635,7 @@
                 </a:solidFill>
                 <a:latin typeface="Arial"/>
               </a:rPr>
-              <a:t>Colton Joseph makes the G5-to-B1G jump against elite tackling — translation risk, week one</a:t>
+              <a:t>ND is the card's continuity outlier: Carr in year two, 51% of production back, just 7 portal adds</a:t>
             </a:r>
           </a:p>
         </p:txBody>
@@ -6206,7 +6714,7 @@
                 </a:solidFill>
                 <a:latin typeface="Arial"/>
               </a:rPr>
-              <a:t>Wisconsin's genuinely good 3-3-5 vs Carr's year-two leap — the one matchup that keeps it close</a:t>
+              <a:t>Fickell's survival season starts as a 20-point dog, with a new QB again (Joseph, 31% back)</a:t>
             </a:r>
           </a:p>
         </p:txBody>
@@ -6285,7 +6793,7 @@
                 </a:solidFill>
                 <a:latin typeface="Arial"/>
               </a:rPr>
-              <a:t>Spreads this size live in the favorite-longshot zone our market post-mortem flagged</a:t>
+              <a:t>A No. 1-seed résumé game for the Irish; a cover is Wisconsin's moral win</a:t>
             </a:r>
           </a:p>
         </p:txBody>
@@ -7078,14 +7586,268 @@
       </p:sp>
       <p:sp>
         <p:nvSpPr>
-          <p:cNvPr id="5" name="Oval 4"/>
+          <p:cNvPr id="5" name="Rounded Rectangle 4"/>
           <p:cNvSpPr/>
           <p:nvPr/>
         </p:nvSpPr>
         <p:spPr>
           <a:xfrm>
-            <a:off x="914400" y="2276856"/>
-            <a:ext cx="146304" cy="146304"/>
+            <a:off x="822960" y="1783080"/>
+            <a:ext cx="10515600" cy="960120"/>
+          </a:xfrm>
+          <a:prstGeom prst="roundRect">
+            <a:avLst/>
+          </a:prstGeom>
+          <a:solidFill>
+            <a:srgbClr val="EAF0F8"/>
+          </a:solidFill>
+          <a:ln>
+            <a:noFill/>
+          </a:ln>
+          <a:effectLst/>
+        </p:spPr>
+        <p:style>
+          <a:lnRef idx="1">
+            <a:schemeClr val="accent1"/>
+          </a:lnRef>
+          <a:fillRef idx="3">
+            <a:schemeClr val="accent1"/>
+          </a:fillRef>
+          <a:effectRef idx="2">
+            <a:schemeClr val="accent1"/>
+          </a:effectRef>
+          <a:fontRef idx="minor">
+            <a:schemeClr val="lt1"/>
+          </a:fontRef>
+        </p:style>
+        <p:txBody>
+          <a:bodyPr rtlCol="0" anchor="ctr"/>
+          <a:lstStyle/>
+          <a:p>
+            <a:pPr algn="ctr"/>
+          </a:p>
+        </p:txBody>
+      </p:sp>
+      <p:sp>
+        <p:nvSpPr>
+          <p:cNvPr id="6" name="TextBox 5"/>
+          <p:cNvSpPr txBox="1"/>
+          <p:nvPr/>
+        </p:nvSpPr>
+        <p:spPr>
+          <a:xfrm>
+            <a:off x="1051560" y="1901952"/>
+            <a:ext cx="3246120" cy="228600"/>
+          </a:xfrm>
+          <a:prstGeom prst="rect">
+            <a:avLst/>
+          </a:prstGeom>
+          <a:noFill/>
+        </p:spPr>
+        <p:txBody>
+          <a:bodyPr wrap="square" lIns="0" rIns="0" tIns="0" bIns="0">
+            <a:spAutoFit/>
+          </a:bodyPr>
+          <a:lstStyle/>
+          <a:p>
+            <a:pPr algn="l"/>
+            <a:r>
+              <a:rPr sz="950" b="1" i="0">
+                <a:solidFill>
+                  <a:srgbClr val="F47321"/>
+                </a:solidFill>
+                <a:latin typeface="Arial"/>
+              </a:rPr>
+              <a:t>COACH</a:t>
+            </a:r>
+          </a:p>
+        </p:txBody>
+      </p:sp>
+      <p:sp>
+        <p:nvSpPr>
+          <p:cNvPr id="7" name="TextBox 6"/>
+          <p:cNvSpPr txBox="1"/>
+          <p:nvPr/>
+        </p:nvSpPr>
+        <p:spPr>
+          <a:xfrm>
+            <a:off x="1051560" y="2139696"/>
+            <a:ext cx="3246120" cy="548640"/>
+          </a:xfrm>
+          <a:prstGeom prst="rect">
+            <a:avLst/>
+          </a:prstGeom>
+          <a:noFill/>
+        </p:spPr>
+        <p:txBody>
+          <a:bodyPr wrap="square" lIns="0" rIns="0" tIns="0" bIns="0">
+            <a:spAutoFit/>
+          </a:bodyPr>
+          <a:lstStyle/>
+          <a:p>
+            <a:pPr algn="l"/>
+            <a:r>
+              <a:rPr sz="1050" b="0" i="0">
+                <a:solidFill>
+                  <a:srgbClr val="16273D"/>
+                </a:solidFill>
+                <a:latin typeface="Arial"/>
+              </a:rPr>
+              <a:t>Fickell, year 4 — survival season; the Air Raid detour is dead</a:t>
+            </a:r>
+          </a:p>
+        </p:txBody>
+      </p:sp>
+      <p:sp>
+        <p:nvSpPr>
+          <p:cNvPr id="8" name="TextBox 7"/>
+          <p:cNvSpPr txBox="1"/>
+          <p:nvPr/>
+        </p:nvSpPr>
+        <p:spPr>
+          <a:xfrm>
+            <a:off x="4572000" y="1901952"/>
+            <a:ext cx="3246120" cy="228600"/>
+          </a:xfrm>
+          <a:prstGeom prst="rect">
+            <a:avLst/>
+          </a:prstGeom>
+          <a:noFill/>
+        </p:spPr>
+        <p:txBody>
+          <a:bodyPr wrap="square" lIns="0" rIns="0" tIns="0" bIns="0">
+            <a:spAutoFit/>
+          </a:bodyPr>
+          <a:lstStyle/>
+          <a:p>
+            <a:pPr algn="l"/>
+            <a:r>
+              <a:rPr sz="950" b="1" i="0">
+                <a:solidFill>
+                  <a:srgbClr val="F47321"/>
+                </a:solidFill>
+                <a:latin typeface="Arial"/>
+              </a:rPr>
+              <a:t>QB</a:t>
+            </a:r>
+          </a:p>
+        </p:txBody>
+      </p:sp>
+      <p:sp>
+        <p:nvSpPr>
+          <p:cNvPr id="9" name="TextBox 8"/>
+          <p:cNvSpPr txBox="1"/>
+          <p:nvPr/>
+        </p:nvSpPr>
+        <p:spPr>
+          <a:xfrm>
+            <a:off x="4572000" y="2139696"/>
+            <a:ext cx="3246120" cy="548640"/>
+          </a:xfrm>
+          <a:prstGeom prst="rect">
+            <a:avLst/>
+          </a:prstGeom>
+          <a:noFill/>
+        </p:spPr>
+        <p:txBody>
+          <a:bodyPr wrap="square" lIns="0" rIns="0" tIns="0" bIns="0">
+            <a:spAutoFit/>
+          </a:bodyPr>
+          <a:lstStyle/>
+          <a:p>
+            <a:pPr algn="l"/>
+            <a:r>
+              <a:rPr sz="1050" b="0" i="0">
+                <a:solidFill>
+                  <a:srgbClr val="16273D"/>
+                </a:solidFill>
+                <a:latin typeface="Arial"/>
+              </a:rPr>
+              <a:t>NEW — Colton Joseph (Old Dominion), a real dual threat</a:t>
+            </a:r>
+          </a:p>
+        </p:txBody>
+      </p:sp>
+      <p:sp>
+        <p:nvSpPr>
+          <p:cNvPr id="10" name="TextBox 9"/>
+          <p:cNvSpPr txBox="1"/>
+          <p:nvPr/>
+        </p:nvSpPr>
+        <p:spPr>
+          <a:xfrm>
+            <a:off x="8092440" y="1901952"/>
+            <a:ext cx="3246120" cy="228600"/>
+          </a:xfrm>
+          <a:prstGeom prst="rect">
+            <a:avLst/>
+          </a:prstGeom>
+          <a:noFill/>
+        </p:spPr>
+        <p:txBody>
+          <a:bodyPr wrap="square" lIns="0" rIns="0" tIns="0" bIns="0">
+            <a:spAutoFit/>
+          </a:bodyPr>
+          <a:lstStyle/>
+          <a:p>
+            <a:pPr algn="l"/>
+            <a:r>
+              <a:rPr sz="950" b="1" i="0">
+                <a:solidFill>
+                  <a:srgbClr val="F47321"/>
+                </a:solidFill>
+                <a:latin typeface="Arial"/>
+              </a:rPr>
+              <a:t>ROSTER</a:t>
+            </a:r>
+          </a:p>
+        </p:txBody>
+      </p:sp>
+      <p:sp>
+        <p:nvSpPr>
+          <p:cNvPr id="11" name="TextBox 10"/>
+          <p:cNvSpPr txBox="1"/>
+          <p:nvPr/>
+        </p:nvSpPr>
+        <p:spPr>
+          <a:xfrm>
+            <a:off x="8092440" y="2139696"/>
+            <a:ext cx="3246120" cy="548640"/>
+          </a:xfrm>
+          <a:prstGeom prst="rect">
+            <a:avLst/>
+          </a:prstGeom>
+          <a:noFill/>
+        </p:spPr>
+        <p:txBody>
+          <a:bodyPr wrap="square" lIns="0" rIns="0" tIns="0" bIns="0">
+            <a:spAutoFit/>
+          </a:bodyPr>
+          <a:lstStyle/>
+          <a:p>
+            <a:pPr algn="l"/>
+            <a:r>
+              <a:rPr sz="1050" b="0" i="0">
+                <a:solidFill>
+                  <a:srgbClr val="16273D"/>
+                </a:solidFill>
+                <a:latin typeface="Arial"/>
+              </a:rPr>
+              <a:t>31% back · 33 portal adds — retooled around a veteran OL</a:t>
+            </a:r>
+          </a:p>
+        </p:txBody>
+      </p:sp>
+      <p:sp>
+        <p:nvSpPr>
+          <p:cNvPr id="12" name="Oval 11"/>
+          <p:cNvSpPr/>
+          <p:nvPr/>
+        </p:nvSpPr>
+        <p:spPr>
+          <a:xfrm>
+            <a:off x="914400" y="3218688"/>
+            <a:ext cx="137160" cy="137160"/>
           </a:xfrm>
           <a:prstGeom prst="ellipse">
             <a:avLst/>
@@ -7122,29 +7884,29 @@
       </p:sp>
       <p:sp>
         <p:nvSpPr>
-          <p:cNvPr id="6" name="TextBox 5"/>
-          <p:cNvSpPr txBox="1"/>
-          <p:nvPr/>
-        </p:nvSpPr>
-        <p:spPr>
-          <a:xfrm>
-            <a:off x="1325880" y="2148840"/>
-            <a:ext cx="9601200" cy="777240"/>
-          </a:xfrm>
-          <a:prstGeom prst="rect">
-            <a:avLst/>
-          </a:prstGeom>
-          <a:noFill/>
-        </p:spPr>
-        <p:txBody>
-          <a:bodyPr wrap="square" lIns="0" rIns="0" tIns="0" bIns="0">
-            <a:spAutoFit/>
-          </a:bodyPr>
-          <a:lstStyle/>
-          <a:p>
-            <a:pPr algn="l"/>
-            <a:r>
-              <a:rPr sz="1700" b="0" i="0">
+          <p:cNvPr id="13" name="TextBox 12"/>
+          <p:cNvSpPr txBox="1"/>
+          <p:nvPr/>
+        </p:nvSpPr>
+        <p:spPr>
+          <a:xfrm>
+            <a:off x="1325880" y="3108960"/>
+            <a:ext cx="9601200" cy="731520"/>
+          </a:xfrm>
+          <a:prstGeom prst="rect">
+            <a:avLst/>
+          </a:prstGeom>
+          <a:noFill/>
+        </p:spPr>
+        <p:txBody>
+          <a:bodyPr wrap="square" lIns="0" rIns="0" tIns="0" bIns="0">
+            <a:spAutoFit/>
+          </a:bodyPr>
+          <a:lstStyle/>
+          <a:p>
+            <a:pPr algn="l"/>
+            <a:r>
+              <a:rPr sz="1550" b="0" i="0">
                 <a:solidFill>
                   <a:srgbClr val="16273D"/>
                 </a:solidFill>
@@ -7157,14 +7919,14 @@
       </p:sp>
       <p:sp>
         <p:nvSpPr>
-          <p:cNvPr id="7" name="Oval 6"/>
+          <p:cNvPr id="14" name="Oval 13"/>
           <p:cNvSpPr/>
           <p:nvPr/>
         </p:nvSpPr>
         <p:spPr>
           <a:xfrm>
-            <a:off x="914400" y="3236976"/>
-            <a:ext cx="146304" cy="146304"/>
+            <a:off x="914400" y="4059936"/>
+            <a:ext cx="137160" cy="137160"/>
           </a:xfrm>
           <a:prstGeom prst="ellipse">
             <a:avLst/>
@@ -7201,49 +7963,49 @@
       </p:sp>
       <p:sp>
         <p:nvSpPr>
-          <p:cNvPr id="8" name="TextBox 7"/>
-          <p:cNvSpPr txBox="1"/>
-          <p:nvPr/>
-        </p:nvSpPr>
-        <p:spPr>
-          <a:xfrm>
-            <a:off x="1325880" y="3108960"/>
-            <a:ext cx="9601200" cy="777240"/>
-          </a:xfrm>
-          <a:prstGeom prst="rect">
-            <a:avLst/>
-          </a:prstGeom>
-          <a:noFill/>
-        </p:spPr>
-        <p:txBody>
-          <a:bodyPr wrap="square" lIns="0" rIns="0" tIns="0" bIns="0">
-            <a:spAutoFit/>
-          </a:bodyPr>
-          <a:lstStyle/>
-          <a:p>
-            <a:pPr algn="l"/>
-            <a:r>
-              <a:rPr sz="1700" b="0" i="0">
+          <p:cNvPr id="15" name="TextBox 14"/>
+          <p:cNvSpPr txBox="1"/>
+          <p:nvPr/>
+        </p:nvSpPr>
+        <p:spPr>
+          <a:xfrm>
+            <a:off x="1325880" y="3950208"/>
+            <a:ext cx="9601200" cy="731520"/>
+          </a:xfrm>
+          <a:prstGeom prst="rect">
+            <a:avLst/>
+          </a:prstGeom>
+          <a:noFill/>
+        </p:spPr>
+        <p:txBody>
+          <a:bodyPr wrap="square" lIns="0" rIns="0" tIns="0" bIns="0">
+            <a:spAutoFit/>
+          </a:bodyPr>
+          <a:lstStyle/>
+          <a:p>
+            <a:pPr algn="l"/>
+            <a:r>
+              <a:rPr sz="1550" b="0" i="0">
                 <a:solidFill>
                   <a:srgbClr val="16273D"/>
                 </a:solidFill>
                 <a:latin typeface="Arial"/>
               </a:rPr>
-              <a:t>Joseph's legs on third-and-medium — the one chain-mover that travels</a:t>
-            </a:r>
-          </a:p>
-        </p:txBody>
-      </p:sp>
-      <p:sp>
-        <p:nvSpPr>
-          <p:cNvPr id="9" name="Oval 8"/>
+              <a:t>Find counters vs a tite front built to erase the run-first pivot</a:t>
+            </a:r>
+          </a:p>
+        </p:txBody>
+      </p:sp>
+      <p:sp>
+        <p:nvSpPr>
+          <p:cNvPr id="16" name="Oval 15"/>
           <p:cNvSpPr/>
           <p:nvPr/>
         </p:nvSpPr>
         <p:spPr>
           <a:xfrm>
-            <a:off x="914400" y="4197096"/>
-            <a:ext cx="146304" cy="146304"/>
+            <a:off x="914400" y="4901184"/>
+            <a:ext cx="137160" cy="137160"/>
           </a:xfrm>
           <a:prstGeom prst="ellipse">
             <a:avLst/>
@@ -7280,49 +8042,49 @@
       </p:sp>
       <p:sp>
         <p:nvSpPr>
-          <p:cNvPr id="10" name="TextBox 9"/>
-          <p:cNvSpPr txBox="1"/>
-          <p:nvPr/>
-        </p:nvSpPr>
-        <p:spPr>
-          <a:xfrm>
-            <a:off x="1325880" y="4069080"/>
-            <a:ext cx="9601200" cy="777240"/>
-          </a:xfrm>
-          <a:prstGeom prst="rect">
-            <a:avLst/>
-          </a:prstGeom>
-          <a:noFill/>
-        </p:spPr>
-        <p:txBody>
-          <a:bodyPr wrap="square" lIns="0" rIns="0" tIns="0" bIns="0">
-            <a:spAutoFit/>
-          </a:bodyPr>
-          <a:lstStyle/>
-          <a:p>
-            <a:pPr algn="l"/>
-            <a:r>
-              <a:rPr sz="1700" b="0" i="0">
+          <p:cNvPr id="17" name="TextBox 16"/>
+          <p:cNvSpPr txBox="1"/>
+          <p:nvPr/>
+        </p:nvSpPr>
+        <p:spPr>
+          <a:xfrm>
+            <a:off x="1325880" y="4791456"/>
+            <a:ext cx="9601200" cy="731520"/>
+          </a:xfrm>
+          <a:prstGeom prst="rect">
+            <a:avLst/>
+          </a:prstGeom>
+          <a:noFill/>
+        </p:spPr>
+        <p:txBody>
+          <a:bodyPr wrap="square" lIns="0" rIns="0" tIns="0" bIns="0">
+            <a:spAutoFit/>
+          </a:bodyPr>
+          <a:lstStyle/>
+          <a:p>
+            <a:pPr algn="l"/>
+            <a:r>
+              <a:rPr sz="1550" b="0" i="0">
                 <a:solidFill>
                   <a:srgbClr val="16273D"/>
                 </a:solidFill>
                 <a:latin typeface="Arial"/>
               </a:rPr>
-              <a:t>Force Carr to beat the 3-3-5 from the pocket</a:t>
-            </a:r>
-          </a:p>
-        </p:txBody>
-      </p:sp>
-      <p:sp>
-        <p:nvSpPr>
-          <p:cNvPr id="11" name="Oval 10"/>
+              <a:t>Joseph's legs on third-and-medium — the one chain-mover that travels</a:t>
+            </a:r>
+          </a:p>
+        </p:txBody>
+      </p:sp>
+      <p:sp>
+        <p:nvSpPr>
+          <p:cNvPr id="18" name="Oval 17"/>
           <p:cNvSpPr/>
           <p:nvPr/>
         </p:nvSpPr>
         <p:spPr>
           <a:xfrm>
-            <a:off x="914400" y="5157216"/>
-            <a:ext cx="146304" cy="146304"/>
+            <a:off x="914400" y="5742432"/>
+            <a:ext cx="137160" cy="137160"/>
           </a:xfrm>
           <a:prstGeom prst="ellipse">
             <a:avLst/>
@@ -7359,42 +8121,42 @@
       </p:sp>
       <p:sp>
         <p:nvSpPr>
-          <p:cNvPr id="12" name="TextBox 11"/>
-          <p:cNvSpPr txBox="1"/>
-          <p:nvPr/>
-        </p:nvSpPr>
-        <p:spPr>
-          <a:xfrm>
-            <a:off x="1325880" y="5029200"/>
-            <a:ext cx="9601200" cy="777240"/>
-          </a:xfrm>
-          <a:prstGeom prst="rect">
-            <a:avLst/>
-          </a:prstGeom>
-          <a:noFill/>
-        </p:spPr>
-        <p:txBody>
-          <a:bodyPr wrap="square" lIns="0" rIns="0" tIns="0" bIns="0">
-            <a:spAutoFit/>
-          </a:bodyPr>
-          <a:lstStyle/>
-          <a:p>
-            <a:pPr algn="l"/>
-            <a:r>
-              <a:rPr sz="1700" b="0" i="0">
+          <p:cNvPr id="19" name="TextBox 18"/>
+          <p:cNvSpPr txBox="1"/>
+          <p:nvPr/>
+        </p:nvSpPr>
+        <p:spPr>
+          <a:xfrm>
+            <a:off x="1325880" y="5632704"/>
+            <a:ext cx="9601200" cy="731520"/>
+          </a:xfrm>
+          <a:prstGeom prst="rect">
+            <a:avLst/>
+          </a:prstGeom>
+          <a:noFill/>
+        </p:spPr>
+        <p:txBody>
+          <a:bodyPr wrap="square" lIns="0" rIns="0" tIns="0" bIns="0">
+            <a:spAutoFit/>
+          </a:bodyPr>
+          <a:lstStyle/>
+          <a:p>
+            <a:pPr algn="l"/>
+            <a:r>
+              <a:rPr sz="1550" b="0" i="0">
                 <a:solidFill>
                   <a:srgbClr val="16273D"/>
                 </a:solidFill>
                 <a:latin typeface="Arial"/>
               </a:rPr>
-              <a:t>Survive special teams — a return touchdown ends it</a:t>
-            </a:r>
-          </a:p>
-        </p:txBody>
-      </p:sp>
-      <p:sp>
-        <p:nvSpPr>
-          <p:cNvPr id="13" name="TextBox 12"/>
+              <a:t>Force Carr to beat the 3-3-5 from the pocket</a:t>
+            </a:r>
+          </a:p>
+        </p:txBody>
+      </p:sp>
+      <p:sp>
+        <p:nvSpPr>
+          <p:cNvPr id="20" name="TextBox 19"/>
           <p:cNvSpPr txBox="1"/>
           <p:nvPr/>
         </p:nvSpPr>
@@ -7549,14 +8311,268 @@
       </p:sp>
       <p:sp>
         <p:nvSpPr>
-          <p:cNvPr id="5" name="Oval 4"/>
+          <p:cNvPr id="5" name="Rounded Rectangle 4"/>
           <p:cNvSpPr/>
           <p:nvPr/>
         </p:nvSpPr>
         <p:spPr>
           <a:xfrm>
-            <a:off x="914400" y="2276856"/>
-            <a:ext cx="146304" cy="146304"/>
+            <a:off x="822960" y="1783080"/>
+            <a:ext cx="10515600" cy="960120"/>
+          </a:xfrm>
+          <a:prstGeom prst="roundRect">
+            <a:avLst/>
+          </a:prstGeom>
+          <a:solidFill>
+            <a:srgbClr val="EAF0F8"/>
+          </a:solidFill>
+          <a:ln>
+            <a:noFill/>
+          </a:ln>
+          <a:effectLst/>
+        </p:spPr>
+        <p:style>
+          <a:lnRef idx="1">
+            <a:schemeClr val="accent1"/>
+          </a:lnRef>
+          <a:fillRef idx="3">
+            <a:schemeClr val="accent1"/>
+          </a:fillRef>
+          <a:effectRef idx="2">
+            <a:schemeClr val="accent1"/>
+          </a:effectRef>
+          <a:fontRef idx="minor">
+            <a:schemeClr val="lt1"/>
+          </a:fontRef>
+        </p:style>
+        <p:txBody>
+          <a:bodyPr rtlCol="0" anchor="ctr"/>
+          <a:lstStyle/>
+          <a:p>
+            <a:pPr algn="ctr"/>
+          </a:p>
+        </p:txBody>
+      </p:sp>
+      <p:sp>
+        <p:nvSpPr>
+          <p:cNvPr id="6" name="TextBox 5"/>
+          <p:cNvSpPr txBox="1"/>
+          <p:nvPr/>
+        </p:nvSpPr>
+        <p:spPr>
+          <a:xfrm>
+            <a:off x="1051560" y="1901952"/>
+            <a:ext cx="3246120" cy="228600"/>
+          </a:xfrm>
+          <a:prstGeom prst="rect">
+            <a:avLst/>
+          </a:prstGeom>
+          <a:noFill/>
+        </p:spPr>
+        <p:txBody>
+          <a:bodyPr wrap="square" lIns="0" rIns="0" tIns="0" bIns="0">
+            <a:spAutoFit/>
+          </a:bodyPr>
+          <a:lstStyle/>
+          <a:p>
+            <a:pPr algn="l"/>
+            <a:r>
+              <a:rPr sz="950" b="1" i="0">
+                <a:solidFill>
+                  <a:srgbClr val="F47321"/>
+                </a:solidFill>
+                <a:latin typeface="Arial"/>
+              </a:rPr>
+              <a:t>COACH</a:t>
+            </a:r>
+          </a:p>
+        </p:txBody>
+      </p:sp>
+      <p:sp>
+        <p:nvSpPr>
+          <p:cNvPr id="7" name="TextBox 6"/>
+          <p:cNvSpPr txBox="1"/>
+          <p:nvPr/>
+        </p:nvSpPr>
+        <p:spPr>
+          <a:xfrm>
+            <a:off x="1051560" y="2139696"/>
+            <a:ext cx="3246120" cy="548640"/>
+          </a:xfrm>
+          <a:prstGeom prst="rect">
+            <a:avLst/>
+          </a:prstGeom>
+          <a:noFill/>
+        </p:spPr>
+        <p:txBody>
+          <a:bodyPr wrap="square" lIns="0" rIns="0" tIns="0" bIns="0">
+            <a:spAutoFit/>
+          </a:bodyPr>
+          <a:lstStyle/>
+          <a:p>
+            <a:pPr algn="l"/>
+            <a:r>
+              <a:rPr sz="1050" b="0" i="0">
+                <a:solidFill>
+                  <a:srgbClr val="16273D"/>
+                </a:solidFill>
+                <a:latin typeface="Arial"/>
+              </a:rPr>
+              <a:t>Freeman — full staff and identity continuity</a:t>
+            </a:r>
+          </a:p>
+        </p:txBody>
+      </p:sp>
+      <p:sp>
+        <p:nvSpPr>
+          <p:cNvPr id="8" name="TextBox 7"/>
+          <p:cNvSpPr txBox="1"/>
+          <p:nvPr/>
+        </p:nvSpPr>
+        <p:spPr>
+          <a:xfrm>
+            <a:off x="4572000" y="1901952"/>
+            <a:ext cx="3246120" cy="228600"/>
+          </a:xfrm>
+          <a:prstGeom prst="rect">
+            <a:avLst/>
+          </a:prstGeom>
+          <a:noFill/>
+        </p:spPr>
+        <p:txBody>
+          <a:bodyPr wrap="square" lIns="0" rIns="0" tIns="0" bIns="0">
+            <a:spAutoFit/>
+          </a:bodyPr>
+          <a:lstStyle/>
+          <a:p>
+            <a:pPr algn="l"/>
+            <a:r>
+              <a:rPr sz="950" b="1" i="0">
+                <a:solidFill>
+                  <a:srgbClr val="F47321"/>
+                </a:solidFill>
+                <a:latin typeface="Arial"/>
+              </a:rPr>
+              <a:t>QB</a:t>
+            </a:r>
+          </a:p>
+        </p:txBody>
+      </p:sp>
+      <p:sp>
+        <p:nvSpPr>
+          <p:cNvPr id="9" name="TextBox 8"/>
+          <p:cNvSpPr txBox="1"/>
+          <p:nvPr/>
+        </p:nvSpPr>
+        <p:spPr>
+          <a:xfrm>
+            <a:off x="4572000" y="2139696"/>
+            <a:ext cx="3246120" cy="548640"/>
+          </a:xfrm>
+          <a:prstGeom prst="rect">
+            <a:avLst/>
+          </a:prstGeom>
+          <a:noFill/>
+        </p:spPr>
+        <p:txBody>
+          <a:bodyPr wrap="square" lIns="0" rIns="0" tIns="0" bIns="0">
+            <a:spAutoFit/>
+          </a:bodyPr>
+          <a:lstStyle/>
+          <a:p>
+            <a:pPr algn="l"/>
+            <a:r>
+              <a:rPr sz="1050" b="0" i="0">
+                <a:solidFill>
+                  <a:srgbClr val="16273D"/>
+                </a:solidFill>
+                <a:latin typeface="Arial"/>
+              </a:rPr>
+              <a:t>RETURNS — CJ Carr, year two: the top-10's likeliest QB leap</a:t>
+            </a:r>
+          </a:p>
+        </p:txBody>
+      </p:sp>
+      <p:sp>
+        <p:nvSpPr>
+          <p:cNvPr id="10" name="TextBox 9"/>
+          <p:cNvSpPr txBox="1"/>
+          <p:nvPr/>
+        </p:nvSpPr>
+        <p:spPr>
+          <a:xfrm>
+            <a:off x="8092440" y="1901952"/>
+            <a:ext cx="3246120" cy="228600"/>
+          </a:xfrm>
+          <a:prstGeom prst="rect">
+            <a:avLst/>
+          </a:prstGeom>
+          <a:noFill/>
+        </p:spPr>
+        <p:txBody>
+          <a:bodyPr wrap="square" lIns="0" rIns="0" tIns="0" bIns="0">
+            <a:spAutoFit/>
+          </a:bodyPr>
+          <a:lstStyle/>
+          <a:p>
+            <a:pPr algn="l"/>
+            <a:r>
+              <a:rPr sz="950" b="1" i="0">
+                <a:solidFill>
+                  <a:srgbClr val="F47321"/>
+                </a:solidFill>
+                <a:latin typeface="Arial"/>
+              </a:rPr>
+              <a:t>ROSTER</a:t>
+            </a:r>
+          </a:p>
+        </p:txBody>
+      </p:sp>
+      <p:sp>
+        <p:nvSpPr>
+          <p:cNvPr id="11" name="TextBox 10"/>
+          <p:cNvSpPr txBox="1"/>
+          <p:nvPr/>
+        </p:nvSpPr>
+        <p:spPr>
+          <a:xfrm>
+            <a:off x="8092440" y="2139696"/>
+            <a:ext cx="3246120" cy="548640"/>
+          </a:xfrm>
+          <a:prstGeom prst="rect">
+            <a:avLst/>
+          </a:prstGeom>
+          <a:noFill/>
+        </p:spPr>
+        <p:txBody>
+          <a:bodyPr wrap="square" lIns="0" rIns="0" tIns="0" bIns="0">
+            <a:spAutoFit/>
+          </a:bodyPr>
+          <a:lstStyle/>
+          <a:p>
+            <a:pPr algn="l"/>
+            <a:r>
+              <a:rPr sz="1050" b="0" i="0">
+                <a:solidFill>
+                  <a:srgbClr val="16273D"/>
+                </a:solidFill>
+                <a:latin typeface="Arial"/>
+              </a:rPr>
+              <a:t>51% back · just 7 portal adds — the continuity program</a:t>
+            </a:r>
+          </a:p>
+        </p:txBody>
+      </p:sp>
+      <p:sp>
+        <p:nvSpPr>
+          <p:cNvPr id="12" name="Oval 11"/>
+          <p:cNvSpPr/>
+          <p:nvPr/>
+        </p:nvSpPr>
+        <p:spPr>
+          <a:xfrm>
+            <a:off x="914400" y="3218688"/>
+            <a:ext cx="137160" cy="137160"/>
           </a:xfrm>
           <a:prstGeom prst="ellipse">
             <a:avLst/>
@@ -7593,29 +8609,29 @@
       </p:sp>
       <p:sp>
         <p:nvSpPr>
-          <p:cNvPr id="6" name="TextBox 5"/>
-          <p:cNvSpPr txBox="1"/>
-          <p:nvPr/>
-        </p:nvSpPr>
-        <p:spPr>
-          <a:xfrm>
-            <a:off x="1325880" y="2148840"/>
-            <a:ext cx="9601200" cy="777240"/>
-          </a:xfrm>
-          <a:prstGeom prst="rect">
-            <a:avLst/>
-          </a:prstGeom>
-          <a:noFill/>
-        </p:spPr>
-        <p:txBody>
-          <a:bodyPr wrap="square" lIns="0" rIns="0" tIns="0" bIns="0">
-            <a:spAutoFit/>
-          </a:bodyPr>
-          <a:lstStyle/>
-          <a:p>
-            <a:pPr algn="l"/>
-            <a:r>
-              <a:rPr sz="1700" b="0" i="0">
+          <p:cNvPr id="13" name="TextBox 12"/>
+          <p:cNvSpPr txBox="1"/>
+          <p:nvPr/>
+        </p:nvSpPr>
+        <p:spPr>
+          <a:xfrm>
+            <a:off x="1325880" y="3108960"/>
+            <a:ext cx="9601200" cy="731520"/>
+          </a:xfrm>
+          <a:prstGeom prst="rect">
+            <a:avLst/>
+          </a:prstGeom>
+          <a:noFill/>
+        </p:spPr>
+        <p:txBody>
+          <a:bodyPr wrap="square" lIns="0" rIns="0" tIns="0" bIns="0">
+            <a:spAutoFit/>
+          </a:bodyPr>
+          <a:lstStyle/>
+          <a:p>
+            <a:pPr algn="l"/>
+            <a:r>
+              <a:rPr sz="1550" b="0" i="0">
                 <a:solidFill>
                   <a:srgbClr val="16273D"/>
                 </a:solidFill>
@@ -7628,14 +8644,14 @@
       </p:sp>
       <p:sp>
         <p:nvSpPr>
-          <p:cNvPr id="7" name="Oval 6"/>
+          <p:cNvPr id="14" name="Oval 13"/>
           <p:cNvSpPr/>
           <p:nvPr/>
         </p:nvSpPr>
         <p:spPr>
           <a:xfrm>
-            <a:off x="914400" y="3236976"/>
-            <a:ext cx="146304" cy="146304"/>
+            <a:off x="914400" y="4059936"/>
+            <a:ext cx="137160" cy="137160"/>
           </a:xfrm>
           <a:prstGeom prst="ellipse">
             <a:avLst/>
@@ -7672,29 +8688,29 @@
       </p:sp>
       <p:sp>
         <p:nvSpPr>
-          <p:cNvPr id="8" name="TextBox 7"/>
-          <p:cNvSpPr txBox="1"/>
-          <p:nvPr/>
-        </p:nvSpPr>
-        <p:spPr>
-          <a:xfrm>
-            <a:off x="1325880" y="3108960"/>
-            <a:ext cx="9601200" cy="777240"/>
-          </a:xfrm>
-          <a:prstGeom prst="rect">
-            <a:avLst/>
-          </a:prstGeom>
-          <a:noFill/>
-        </p:spPr>
-        <p:txBody>
-          <a:bodyPr wrap="square" lIns="0" rIns="0" tIns="0" bIns="0">
-            <a:spAutoFit/>
-          </a:bodyPr>
-          <a:lstStyle/>
-          <a:p>
-            <a:pPr algn="l"/>
-            <a:r>
-              <a:rPr sz="1700" b="0" i="0">
+          <p:cNvPr id="15" name="TextBox 14"/>
+          <p:cNvSpPr txBox="1"/>
+          <p:nvPr/>
+        </p:nvSpPr>
+        <p:spPr>
+          <a:xfrm>
+            <a:off x="1325880" y="3950208"/>
+            <a:ext cx="9601200" cy="731520"/>
+          </a:xfrm>
+          <a:prstGeom prst="rect">
+            <a:avLst/>
+          </a:prstGeom>
+          <a:noFill/>
+        </p:spPr>
+        <p:txBody>
+          <a:bodyPr wrap="square" lIns="0" rIns="0" tIns="0" bIns="0">
+            <a:spAutoFit/>
+          </a:bodyPr>
+          <a:lstStyle/>
+          <a:p>
+            <a:pPr algn="l"/>
+            <a:r>
+              <a:rPr sz="1550" b="0" i="0">
                 <a:solidFill>
                   <a:srgbClr val="16273D"/>
                 </a:solidFill>
@@ -7707,14 +8723,14 @@
       </p:sp>
       <p:sp>
         <p:nvSpPr>
-          <p:cNvPr id="9" name="Oval 8"/>
+          <p:cNvPr id="16" name="Oval 15"/>
           <p:cNvSpPr/>
           <p:nvPr/>
         </p:nvSpPr>
         <p:spPr>
           <a:xfrm>
-            <a:off x="914400" y="4197096"/>
-            <a:ext cx="146304" cy="146304"/>
+            <a:off x="914400" y="4901184"/>
+            <a:ext cx="137160" cy="137160"/>
           </a:xfrm>
           <a:prstGeom prst="ellipse">
             <a:avLst/>
@@ -7751,29 +8767,29 @@
       </p:sp>
       <p:sp>
         <p:nvSpPr>
-          <p:cNvPr id="10" name="TextBox 9"/>
-          <p:cNvSpPr txBox="1"/>
-          <p:nvPr/>
-        </p:nvSpPr>
-        <p:spPr>
-          <a:xfrm>
-            <a:off x="1325880" y="4069080"/>
-            <a:ext cx="9601200" cy="777240"/>
-          </a:xfrm>
-          <a:prstGeom prst="rect">
-            <a:avLst/>
-          </a:prstGeom>
-          <a:noFill/>
-        </p:spPr>
-        <p:txBody>
-          <a:bodyPr wrap="square" lIns="0" rIns="0" tIns="0" bIns="0">
-            <a:spAutoFit/>
-          </a:bodyPr>
-          <a:lstStyle/>
-          <a:p>
-            <a:pPr algn="l"/>
-            <a:r>
-              <a:rPr sz="1700" b="0" i="0">
+          <p:cNvPr id="17" name="TextBox 16"/>
+          <p:cNvSpPr txBox="1"/>
+          <p:nvPr/>
+        </p:nvSpPr>
+        <p:spPr>
+          <a:xfrm>
+            <a:off x="1325880" y="4791456"/>
+            <a:ext cx="9601200" cy="731520"/>
+          </a:xfrm>
+          <a:prstGeom prst="rect">
+            <a:avLst/>
+          </a:prstGeom>
+          <a:noFill/>
+        </p:spPr>
+        <p:txBody>
+          <a:bodyPr wrap="square" lIns="0" rIns="0" tIns="0" bIns="0">
+            <a:spAutoFit/>
+          </a:bodyPr>
+          <a:lstStyle/>
+          <a:p>
+            <a:pPr algn="l"/>
+            <a:r>
+              <a:rPr sz="1550" b="0" i="0">
                 <a:solidFill>
                   <a:srgbClr val="16273D"/>
                 </a:solidFill>
@@ -7786,14 +8802,14 @@
       </p:sp>
       <p:sp>
         <p:nvSpPr>
-          <p:cNvPr id="11" name="Oval 10"/>
+          <p:cNvPr id="18" name="Oval 17"/>
           <p:cNvSpPr/>
           <p:nvPr/>
         </p:nvSpPr>
         <p:spPr>
           <a:xfrm>
-            <a:off x="914400" y="5157216"/>
-            <a:ext cx="146304" cy="146304"/>
+            <a:off x="914400" y="5742432"/>
+            <a:ext cx="137160" cy="137160"/>
           </a:xfrm>
           <a:prstGeom prst="ellipse">
             <a:avLst/>
@@ -7830,29 +8846,29 @@
       </p:sp>
       <p:sp>
         <p:nvSpPr>
-          <p:cNvPr id="12" name="TextBox 11"/>
-          <p:cNvSpPr txBox="1"/>
-          <p:nvPr/>
-        </p:nvSpPr>
-        <p:spPr>
-          <a:xfrm>
-            <a:off x="1325880" y="5029200"/>
-            <a:ext cx="9601200" cy="777240"/>
-          </a:xfrm>
-          <a:prstGeom prst="rect">
-            <a:avLst/>
-          </a:prstGeom>
-          <a:noFill/>
-        </p:spPr>
-        <p:txBody>
-          <a:bodyPr wrap="square" lIns="0" rIns="0" tIns="0" bIns="0">
-            <a:spAutoFit/>
-          </a:bodyPr>
-          <a:lstStyle/>
-          <a:p>
-            <a:pPr algn="l"/>
-            <a:r>
-              <a:rPr sz="1700" b="0" i="0">
+          <p:cNvPr id="19" name="TextBox 18"/>
+          <p:cNvSpPr txBox="1"/>
+          <p:nvPr/>
+        </p:nvSpPr>
+        <p:spPr>
+          <a:xfrm>
+            <a:off x="1325880" y="5632704"/>
+            <a:ext cx="9601200" cy="731520"/>
+          </a:xfrm>
+          <a:prstGeom prst="rect">
+            <a:avLst/>
+          </a:prstGeom>
+          <a:noFill/>
+        </p:spPr>
+        <p:txBody>
+          <a:bodyPr wrap="square" lIns="0" rIns="0" tIns="0" bIns="0">
+            <a:spAutoFit/>
+          </a:bodyPr>
+          <a:lstStyle/>
+          <a:p>
+            <a:pPr algn="l"/>
+            <a:r>
+              <a:rPr sz="1550" b="0" i="0">
                 <a:solidFill>
                   <a:srgbClr val="16273D"/>
                 </a:solidFill>
@@ -7865,7 +8881,7 @@
       </p:sp>
       <p:sp>
         <p:nvSpPr>
-          <p:cNvPr id="13" name="TextBox 12"/>
+          <p:cNvPr id="20" name="TextBox 19"/>
           <p:cNvSpPr txBox="1"/>
           <p:nvPr/>
         </p:nvSpPr>
@@ -8107,7 +9123,7 @@
                 </a:solidFill>
                 <a:latin typeface="Arial"/>
               </a:rPr>
-              <a:t>WHAT DECIDES IT</a:t>
+              <a:t>WHY IT MATTERS</a:t>
             </a:r>
           </a:p>
         </p:txBody>
@@ -8186,7 +9202,7 @@
                 </a:solidFill>
                 <a:latin typeface="Arial"/>
               </a:rPr>
-              <a:t>RED ALERT: the machine has the home dog winning outright — FSU 52%, market 42%</a:t>
+              <a:t>Monday night, alone on the calendar — the week's last word</a:t>
             </a:r>
           </a:p>
         </p:txBody>
@@ -8265,7 +9281,7 @@
                 </a:solidFill>
                 <a:latin typeface="Arial"/>
               </a:rPr>
-              <a:t>Lashlee's co-coordinator troika (both coordinators left) vs Norvell taking back his own offense</a:t>
+              <a:t>FSU's 36-month whiplash (CFP → 2–10 → reset) meets SMU's post-CFP expectations</a:t>
             </a:r>
           </a:p>
         </p:txBody>
@@ -8344,7 +9360,7 @@
                 </a:solidFill>
                 <a:latin typeface="Arial"/>
               </a:rPr>
-              <a:t>FSU's top-10 trench portal haul vs SMU line play still a tier below — the run game decides Monday</a:t>
+              <a:t>SMU kept the roster (57% back) but lost both coordinators; FSU kept Norvell but reloads via portal again</a:t>
             </a:r>
           </a:p>
         </p:txBody>
@@ -8423,7 +9439,7 @@
                 </a:solidFill>
                 <a:latin typeface="Arial"/>
               </a:rPr>
-              <a:t>Both QB rooms are new: the Jennings era closed in Dallas; Tallahassee runs portal rentals again</a:t>
+              <a:t>RED ALERT: the machine takes the home dog outright — FSU 52%, market 42%</a:t>
             </a:r>
           </a:p>
         </p:txBody>
@@ -9216,14 +10232,268 @@
       </p:sp>
       <p:sp>
         <p:nvSpPr>
-          <p:cNvPr id="5" name="Oval 4"/>
+          <p:cNvPr id="5" name="Rounded Rectangle 4"/>
           <p:cNvSpPr/>
           <p:nvPr/>
         </p:nvSpPr>
         <p:spPr>
           <a:xfrm>
-            <a:off x="914400" y="2276856"/>
-            <a:ext cx="146304" cy="146304"/>
+            <a:off x="822960" y="1783080"/>
+            <a:ext cx="10515600" cy="960120"/>
+          </a:xfrm>
+          <a:prstGeom prst="roundRect">
+            <a:avLst/>
+          </a:prstGeom>
+          <a:solidFill>
+            <a:srgbClr val="EAF0F8"/>
+          </a:solidFill>
+          <a:ln>
+            <a:noFill/>
+          </a:ln>
+          <a:effectLst/>
+        </p:spPr>
+        <p:style>
+          <a:lnRef idx="1">
+            <a:schemeClr val="accent1"/>
+          </a:lnRef>
+          <a:fillRef idx="3">
+            <a:schemeClr val="accent1"/>
+          </a:fillRef>
+          <a:effectRef idx="2">
+            <a:schemeClr val="accent1"/>
+          </a:effectRef>
+          <a:fontRef idx="minor">
+            <a:schemeClr val="lt1"/>
+          </a:fontRef>
+        </p:style>
+        <p:txBody>
+          <a:bodyPr rtlCol="0" anchor="ctr"/>
+          <a:lstStyle/>
+          <a:p>
+            <a:pPr algn="ctr"/>
+          </a:p>
+        </p:txBody>
+      </p:sp>
+      <p:sp>
+        <p:nvSpPr>
+          <p:cNvPr id="6" name="TextBox 5"/>
+          <p:cNvSpPr txBox="1"/>
+          <p:nvPr/>
+        </p:nvSpPr>
+        <p:spPr>
+          <a:xfrm>
+            <a:off x="1051560" y="1901952"/>
+            <a:ext cx="3246120" cy="228600"/>
+          </a:xfrm>
+          <a:prstGeom prst="rect">
+            <a:avLst/>
+          </a:prstGeom>
+          <a:noFill/>
+        </p:spPr>
+        <p:txBody>
+          <a:bodyPr wrap="square" lIns="0" rIns="0" tIns="0" bIns="0">
+            <a:spAutoFit/>
+          </a:bodyPr>
+          <a:lstStyle/>
+          <a:p>
+            <a:pPr algn="l"/>
+            <a:r>
+              <a:rPr sz="950" b="1" i="0">
+                <a:solidFill>
+                  <a:srgbClr val="F47321"/>
+                </a:solidFill>
+                <a:latin typeface="Arial"/>
+              </a:rPr>
+              <a:t>COACH</a:t>
+            </a:r>
+          </a:p>
+        </p:txBody>
+      </p:sp>
+      <p:sp>
+        <p:nvSpPr>
+          <p:cNvPr id="7" name="TextBox 6"/>
+          <p:cNvSpPr txBox="1"/>
+          <p:nvPr/>
+        </p:nvSpPr>
+        <p:spPr>
+          <a:xfrm>
+            <a:off x="1051560" y="2139696"/>
+            <a:ext cx="3246120" cy="548640"/>
+          </a:xfrm>
+          <a:prstGeom prst="rect">
+            <a:avLst/>
+          </a:prstGeom>
+          <a:noFill/>
+        </p:spPr>
+        <p:txBody>
+          <a:bodyPr wrap="square" lIns="0" rIns="0" tIns="0" bIns="0">
+            <a:spAutoFit/>
+          </a:bodyPr>
+          <a:lstStyle/>
+          <a:p>
+            <a:pPr algn="l"/>
+            <a:r>
+              <a:rPr sz="1050" b="0" i="0">
+                <a:solidFill>
+                  <a:srgbClr val="16273D"/>
+                </a:solidFill>
+                <a:latin typeface="Arial"/>
+              </a:rPr>
+              <a:t>Lashlee, year 5 — both coordinators left; co-coordinator troikas</a:t>
+            </a:r>
+          </a:p>
+        </p:txBody>
+      </p:sp>
+      <p:sp>
+        <p:nvSpPr>
+          <p:cNvPr id="8" name="TextBox 7"/>
+          <p:cNvSpPr txBox="1"/>
+          <p:nvPr/>
+        </p:nvSpPr>
+        <p:spPr>
+          <a:xfrm>
+            <a:off x="4572000" y="1901952"/>
+            <a:ext cx="3246120" cy="228600"/>
+          </a:xfrm>
+          <a:prstGeom prst="rect">
+            <a:avLst/>
+          </a:prstGeom>
+          <a:noFill/>
+        </p:spPr>
+        <p:txBody>
+          <a:bodyPr wrap="square" lIns="0" rIns="0" tIns="0" bIns="0">
+            <a:spAutoFit/>
+          </a:bodyPr>
+          <a:lstStyle/>
+          <a:p>
+            <a:pPr algn="l"/>
+            <a:r>
+              <a:rPr sz="950" b="1" i="0">
+                <a:solidFill>
+                  <a:srgbClr val="F47321"/>
+                </a:solidFill>
+                <a:latin typeface="Arial"/>
+              </a:rPr>
+              <a:t>QB</a:t>
+            </a:r>
+          </a:p>
+        </p:txBody>
+      </p:sp>
+      <p:sp>
+        <p:nvSpPr>
+          <p:cNvPr id="9" name="TextBox 8"/>
+          <p:cNvSpPr txBox="1"/>
+          <p:nvPr/>
+        </p:nvSpPr>
+        <p:spPr>
+          <a:xfrm>
+            <a:off x="4572000" y="2139696"/>
+            <a:ext cx="3246120" cy="548640"/>
+          </a:xfrm>
+          <a:prstGeom prst="rect">
+            <a:avLst/>
+          </a:prstGeom>
+          <a:noFill/>
+        </p:spPr>
+        <p:txBody>
+          <a:bodyPr wrap="square" lIns="0" rIns="0" tIns="0" bIns="0">
+            <a:spAutoFit/>
+          </a:bodyPr>
+          <a:lstStyle/>
+          <a:p>
+            <a:pPr algn="l"/>
+            <a:r>
+              <a:rPr sz="1050" b="0" i="0">
+                <a:solidFill>
+                  <a:srgbClr val="16273D"/>
+                </a:solidFill>
+                <a:latin typeface="Arial"/>
+              </a:rPr>
+              <a:t>NEW — post-Jennings; the system made 3 straight top-25 offenses with 3 QBs</a:t>
+            </a:r>
+          </a:p>
+        </p:txBody>
+      </p:sp>
+      <p:sp>
+        <p:nvSpPr>
+          <p:cNvPr id="10" name="TextBox 9"/>
+          <p:cNvSpPr txBox="1"/>
+          <p:nvPr/>
+        </p:nvSpPr>
+        <p:spPr>
+          <a:xfrm>
+            <a:off x="8092440" y="1901952"/>
+            <a:ext cx="3246120" cy="228600"/>
+          </a:xfrm>
+          <a:prstGeom prst="rect">
+            <a:avLst/>
+          </a:prstGeom>
+          <a:noFill/>
+        </p:spPr>
+        <p:txBody>
+          <a:bodyPr wrap="square" lIns="0" rIns="0" tIns="0" bIns="0">
+            <a:spAutoFit/>
+          </a:bodyPr>
+          <a:lstStyle/>
+          <a:p>
+            <a:pPr algn="l"/>
+            <a:r>
+              <a:rPr sz="950" b="1" i="0">
+                <a:solidFill>
+                  <a:srgbClr val="F47321"/>
+                </a:solidFill>
+                <a:latin typeface="Arial"/>
+              </a:rPr>
+              <a:t>ROSTER</a:t>
+            </a:r>
+          </a:p>
+        </p:txBody>
+      </p:sp>
+      <p:sp>
+        <p:nvSpPr>
+          <p:cNvPr id="11" name="TextBox 10"/>
+          <p:cNvSpPr txBox="1"/>
+          <p:nvPr/>
+        </p:nvSpPr>
+        <p:spPr>
+          <a:xfrm>
+            <a:off x="8092440" y="2139696"/>
+            <a:ext cx="3246120" cy="548640"/>
+          </a:xfrm>
+          <a:prstGeom prst="rect">
+            <a:avLst/>
+          </a:prstGeom>
+          <a:noFill/>
+        </p:spPr>
+        <p:txBody>
+          <a:bodyPr wrap="square" lIns="0" rIns="0" tIns="0" bIns="0">
+            <a:spAutoFit/>
+          </a:bodyPr>
+          <a:lstStyle/>
+          <a:p>
+            <a:pPr algn="l"/>
+            <a:r>
+              <a:rPr sz="1050" b="0" i="0">
+                <a:solidFill>
+                  <a:srgbClr val="16273D"/>
+                </a:solidFill>
+                <a:latin typeface="Arial"/>
+              </a:rPr>
+              <a:t>57% back · 15 portal adds — kept the roster, lost the callers</a:t>
+            </a:r>
+          </a:p>
+        </p:txBody>
+      </p:sp>
+      <p:sp>
+        <p:nvSpPr>
+          <p:cNvPr id="12" name="Oval 11"/>
+          <p:cNvSpPr/>
+          <p:nvPr/>
+        </p:nvSpPr>
+        <p:spPr>
+          <a:xfrm>
+            <a:off x="914400" y="3218688"/>
+            <a:ext cx="137160" cy="137160"/>
           </a:xfrm>
           <a:prstGeom prst="ellipse">
             <a:avLst/>
@@ -9260,29 +10530,29 @@
       </p:sp>
       <p:sp>
         <p:nvSpPr>
-          <p:cNvPr id="6" name="TextBox 5"/>
-          <p:cNvSpPr txBox="1"/>
-          <p:nvPr/>
-        </p:nvSpPr>
-        <p:spPr>
-          <a:xfrm>
-            <a:off x="1325880" y="2148840"/>
-            <a:ext cx="9601200" cy="777240"/>
-          </a:xfrm>
-          <a:prstGeom prst="rect">
-            <a:avLst/>
-          </a:prstGeom>
-          <a:noFill/>
-        </p:spPr>
-        <p:txBody>
-          <a:bodyPr wrap="square" lIns="0" rIns="0" tIns="0" bIns="0">
-            <a:spAutoFit/>
-          </a:bodyPr>
-          <a:lstStyle/>
-          <a:p>
-            <a:pPr algn="l"/>
-            <a:r>
-              <a:rPr sz="1700" b="0" i="0">
+          <p:cNvPr id="13" name="TextBox 12"/>
+          <p:cNvSpPr txBox="1"/>
+          <p:nvPr/>
+        </p:nvSpPr>
+        <p:spPr>
+          <a:xfrm>
+            <a:off x="1325880" y="3108960"/>
+            <a:ext cx="9601200" cy="731520"/>
+          </a:xfrm>
+          <a:prstGeom prst="rect">
+            <a:avLst/>
+          </a:prstGeom>
+          <a:noFill/>
+        </p:spPr>
+        <p:txBody>
+          <a:bodyPr wrap="square" lIns="0" rIns="0" tIns="0" bIns="0">
+            <a:spAutoFit/>
+          </a:bodyPr>
+          <a:lstStyle/>
+          <a:p>
+            <a:pPr algn="l"/>
+            <a:r>
+              <a:rPr sz="1550" b="0" i="0">
                 <a:solidFill>
                   <a:srgbClr val="16273D"/>
                 </a:solidFill>
@@ -9295,14 +10565,14 @@
       </p:sp>
       <p:sp>
         <p:nvSpPr>
-          <p:cNvPr id="7" name="Oval 6"/>
+          <p:cNvPr id="14" name="Oval 13"/>
           <p:cNvSpPr/>
           <p:nvPr/>
         </p:nvSpPr>
         <p:spPr>
           <a:xfrm>
-            <a:off x="914400" y="3236976"/>
-            <a:ext cx="146304" cy="146304"/>
+            <a:off x="914400" y="4059936"/>
+            <a:ext cx="137160" cy="137160"/>
           </a:xfrm>
           <a:prstGeom prst="ellipse">
             <a:avLst/>
@@ -9339,29 +10609,29 @@
       </p:sp>
       <p:sp>
         <p:nvSpPr>
-          <p:cNvPr id="8" name="TextBox 7"/>
-          <p:cNvSpPr txBox="1"/>
-          <p:nvPr/>
-        </p:nvSpPr>
-        <p:spPr>
-          <a:xfrm>
-            <a:off x="1325880" y="3108960"/>
-            <a:ext cx="9601200" cy="777240"/>
-          </a:xfrm>
-          <a:prstGeom prst="rect">
-            <a:avLst/>
-          </a:prstGeom>
-          <a:noFill/>
-        </p:spPr>
-        <p:txBody>
-          <a:bodyPr wrap="square" lIns="0" rIns="0" tIns="0" bIns="0">
-            <a:spAutoFit/>
-          </a:bodyPr>
-          <a:lstStyle/>
-          <a:p>
-            <a:pPr algn="l"/>
-            <a:r>
-              <a:rPr sz="1700" b="0" i="0">
+          <p:cNvPr id="15" name="TextBox 14"/>
+          <p:cNvSpPr txBox="1"/>
+          <p:nvPr/>
+        </p:nvSpPr>
+        <p:spPr>
+          <a:xfrm>
+            <a:off x="1325880" y="3950208"/>
+            <a:ext cx="9601200" cy="731520"/>
+          </a:xfrm>
+          <a:prstGeom prst="rect">
+            <a:avLst/>
+          </a:prstGeom>
+          <a:noFill/>
+        </p:spPr>
+        <p:txBody>
+          <a:bodyPr wrap="square" lIns="0" rIns="0" tIns="0" bIns="0">
+            <a:spAutoFit/>
+          </a:bodyPr>
+          <a:lstStyle/>
+          <a:p>
+            <a:pPr algn="l"/>
+            <a:r>
+              <a:rPr sz="1550" b="0" i="0">
                 <a:solidFill>
                   <a:srgbClr val="16273D"/>
                 </a:solidFill>
@@ -9374,14 +10644,14 @@
       </p:sp>
       <p:sp>
         <p:nvSpPr>
-          <p:cNvPr id="9" name="Oval 8"/>
+          <p:cNvPr id="16" name="Oval 15"/>
           <p:cNvSpPr/>
           <p:nvPr/>
         </p:nvSpPr>
         <p:spPr>
           <a:xfrm>
-            <a:off x="914400" y="4197096"/>
-            <a:ext cx="146304" cy="146304"/>
+            <a:off x="914400" y="4901184"/>
+            <a:ext cx="137160" cy="137160"/>
           </a:xfrm>
           <a:prstGeom prst="ellipse">
             <a:avLst/>
@@ -9418,29 +10688,29 @@
       </p:sp>
       <p:sp>
         <p:nvSpPr>
-          <p:cNvPr id="10" name="TextBox 9"/>
-          <p:cNvSpPr txBox="1"/>
-          <p:nvPr/>
-        </p:nvSpPr>
-        <p:spPr>
-          <a:xfrm>
-            <a:off x="1325880" y="4069080"/>
-            <a:ext cx="9601200" cy="777240"/>
-          </a:xfrm>
-          <a:prstGeom prst="rect">
-            <a:avLst/>
-          </a:prstGeom>
-          <a:noFill/>
-        </p:spPr>
-        <p:txBody>
-          <a:bodyPr wrap="square" lIns="0" rIns="0" tIns="0" bIns="0">
-            <a:spAutoFit/>
-          </a:bodyPr>
-          <a:lstStyle/>
-          <a:p>
-            <a:pPr algn="l"/>
-            <a:r>
-              <a:rPr sz="1700" b="0" i="0">
+          <p:cNvPr id="17" name="TextBox 16"/>
+          <p:cNvSpPr txBox="1"/>
+          <p:nvPr/>
+        </p:nvSpPr>
+        <p:spPr>
+          <a:xfrm>
+            <a:off x="1325880" y="4791456"/>
+            <a:ext cx="9601200" cy="731520"/>
+          </a:xfrm>
+          <a:prstGeom prst="rect">
+            <a:avLst/>
+          </a:prstGeom>
+          <a:noFill/>
+        </p:spPr>
+        <p:txBody>
+          <a:bodyPr wrap="square" lIns="0" rIns="0" tIns="0" bIns="0">
+            <a:spAutoFit/>
+          </a:bodyPr>
+          <a:lstStyle/>
+          <a:p>
+            <a:pPr algn="l"/>
+            <a:r>
+              <a:rPr sz="1550" b="0" i="0">
                 <a:solidFill>
                   <a:srgbClr val="16273D"/>
                 </a:solidFill>
@@ -9453,14 +10723,14 @@
       </p:sp>
       <p:sp>
         <p:nvSpPr>
-          <p:cNvPr id="11" name="Oval 10"/>
+          <p:cNvPr id="18" name="Oval 17"/>
           <p:cNvSpPr/>
           <p:nvPr/>
         </p:nvSpPr>
         <p:spPr>
           <a:xfrm>
-            <a:off x="914400" y="5157216"/>
-            <a:ext cx="146304" cy="146304"/>
+            <a:off x="914400" y="5742432"/>
+            <a:ext cx="137160" cy="137160"/>
           </a:xfrm>
           <a:prstGeom prst="ellipse">
             <a:avLst/>
@@ -9497,29 +10767,29 @@
       </p:sp>
       <p:sp>
         <p:nvSpPr>
-          <p:cNvPr id="12" name="TextBox 11"/>
-          <p:cNvSpPr txBox="1"/>
-          <p:nvPr/>
-        </p:nvSpPr>
-        <p:spPr>
-          <a:xfrm>
-            <a:off x="1325880" y="5029200"/>
-            <a:ext cx="9601200" cy="777240"/>
-          </a:xfrm>
-          <a:prstGeom prst="rect">
-            <a:avLst/>
-          </a:prstGeom>
-          <a:noFill/>
-        </p:spPr>
-        <p:txBody>
-          <a:bodyPr wrap="square" lIns="0" rIns="0" tIns="0" bIns="0">
-            <a:spAutoFit/>
-          </a:bodyPr>
-          <a:lstStyle/>
-          <a:p>
-            <a:pPr algn="l"/>
-            <a:r>
-              <a:rPr sz="1700" b="0" i="0">
+          <p:cNvPr id="19" name="TextBox 18"/>
+          <p:cNvSpPr txBox="1"/>
+          <p:nvPr/>
+        </p:nvSpPr>
+        <p:spPr>
+          <a:xfrm>
+            <a:off x="1325880" y="5632704"/>
+            <a:ext cx="9601200" cy="731520"/>
+          </a:xfrm>
+          <a:prstGeom prst="rect">
+            <a:avLst/>
+          </a:prstGeom>
+          <a:noFill/>
+        </p:spPr>
+        <p:txBody>
+          <a:bodyPr wrap="square" lIns="0" rIns="0" tIns="0" bIns="0">
+            <a:spAutoFit/>
+          </a:bodyPr>
+          <a:lstStyle/>
+          <a:p>
+            <a:pPr algn="l"/>
+            <a:r>
+              <a:rPr sz="1550" b="0" i="0">
                 <a:solidFill>
                   <a:srgbClr val="16273D"/>
                 </a:solidFill>
@@ -9532,7 +10802,7 @@
       </p:sp>
       <p:sp>
         <p:nvSpPr>
-          <p:cNvPr id="13" name="TextBox 12"/>
+          <p:cNvPr id="20" name="TextBox 19"/>
           <p:cNvSpPr txBox="1"/>
           <p:nvPr/>
         </p:nvSpPr>
@@ -9687,14 +10957,268 @@
       </p:sp>
       <p:sp>
         <p:nvSpPr>
-          <p:cNvPr id="5" name="Oval 4"/>
+          <p:cNvPr id="5" name="Rounded Rectangle 4"/>
           <p:cNvSpPr/>
           <p:nvPr/>
         </p:nvSpPr>
         <p:spPr>
           <a:xfrm>
-            <a:off x="914400" y="2276856"/>
-            <a:ext cx="146304" cy="146304"/>
+            <a:off x="822960" y="1783080"/>
+            <a:ext cx="10515600" cy="960120"/>
+          </a:xfrm>
+          <a:prstGeom prst="roundRect">
+            <a:avLst/>
+          </a:prstGeom>
+          <a:solidFill>
+            <a:srgbClr val="EAF0F8"/>
+          </a:solidFill>
+          <a:ln>
+            <a:noFill/>
+          </a:ln>
+          <a:effectLst/>
+        </p:spPr>
+        <p:style>
+          <a:lnRef idx="1">
+            <a:schemeClr val="accent1"/>
+          </a:lnRef>
+          <a:fillRef idx="3">
+            <a:schemeClr val="accent1"/>
+          </a:fillRef>
+          <a:effectRef idx="2">
+            <a:schemeClr val="accent1"/>
+          </a:effectRef>
+          <a:fontRef idx="minor">
+            <a:schemeClr val="lt1"/>
+          </a:fontRef>
+        </p:style>
+        <p:txBody>
+          <a:bodyPr rtlCol="0" anchor="ctr"/>
+          <a:lstStyle/>
+          <a:p>
+            <a:pPr algn="ctr"/>
+          </a:p>
+        </p:txBody>
+      </p:sp>
+      <p:sp>
+        <p:nvSpPr>
+          <p:cNvPr id="6" name="TextBox 5"/>
+          <p:cNvSpPr txBox="1"/>
+          <p:nvPr/>
+        </p:nvSpPr>
+        <p:spPr>
+          <a:xfrm>
+            <a:off x="1051560" y="1901952"/>
+            <a:ext cx="3246120" cy="228600"/>
+          </a:xfrm>
+          <a:prstGeom prst="rect">
+            <a:avLst/>
+          </a:prstGeom>
+          <a:noFill/>
+        </p:spPr>
+        <p:txBody>
+          <a:bodyPr wrap="square" lIns="0" rIns="0" tIns="0" bIns="0">
+            <a:spAutoFit/>
+          </a:bodyPr>
+          <a:lstStyle/>
+          <a:p>
+            <a:pPr algn="l"/>
+            <a:r>
+              <a:rPr sz="950" b="1" i="0">
+                <a:solidFill>
+                  <a:srgbClr val="F47321"/>
+                </a:solidFill>
+                <a:latin typeface="Arial"/>
+              </a:rPr>
+              <a:t>COACH</a:t>
+            </a:r>
+          </a:p>
+        </p:txBody>
+      </p:sp>
+      <p:sp>
+        <p:nvSpPr>
+          <p:cNvPr id="7" name="TextBox 6"/>
+          <p:cNvSpPr txBox="1"/>
+          <p:nvPr/>
+        </p:nvSpPr>
+        <p:spPr>
+          <a:xfrm>
+            <a:off x="1051560" y="2139696"/>
+            <a:ext cx="3246120" cy="548640"/>
+          </a:xfrm>
+          <a:prstGeom prst="rect">
+            <a:avLst/>
+          </a:prstGeom>
+          <a:noFill/>
+        </p:spPr>
+        <p:txBody>
+          <a:bodyPr wrap="square" lIns="0" rIns="0" tIns="0" bIns="0">
+            <a:spAutoFit/>
+          </a:bodyPr>
+          <a:lstStyle/>
+          <a:p>
+            <a:pPr algn="l"/>
+            <a:r>
+              <a:rPr sz="1050" b="0" i="0">
+                <a:solidFill>
+                  <a:srgbClr val="16273D"/>
+                </a:solidFill>
+                <a:latin typeface="Arial"/>
+              </a:rPr>
+              <a:t>Norvell, year 7 — Harris promoted to OC (Malzahn retired)</a:t>
+            </a:r>
+          </a:p>
+        </p:txBody>
+      </p:sp>
+      <p:sp>
+        <p:nvSpPr>
+          <p:cNvPr id="8" name="TextBox 7"/>
+          <p:cNvSpPr txBox="1"/>
+          <p:nvPr/>
+        </p:nvSpPr>
+        <p:spPr>
+          <a:xfrm>
+            <a:off x="4572000" y="1901952"/>
+            <a:ext cx="3246120" cy="228600"/>
+          </a:xfrm>
+          <a:prstGeom prst="rect">
+            <a:avLst/>
+          </a:prstGeom>
+          <a:noFill/>
+        </p:spPr>
+        <p:txBody>
+          <a:bodyPr wrap="square" lIns="0" rIns="0" tIns="0" bIns="0">
+            <a:spAutoFit/>
+          </a:bodyPr>
+          <a:lstStyle/>
+          <a:p>
+            <a:pPr algn="l"/>
+            <a:r>
+              <a:rPr sz="950" b="1" i="0">
+                <a:solidFill>
+                  <a:srgbClr val="F47321"/>
+                </a:solidFill>
+                <a:latin typeface="Arial"/>
+              </a:rPr>
+              <a:t>QB</a:t>
+            </a:r>
+          </a:p>
+        </p:txBody>
+      </p:sp>
+      <p:sp>
+        <p:nvSpPr>
+          <p:cNvPr id="9" name="TextBox 8"/>
+          <p:cNvSpPr txBox="1"/>
+          <p:nvPr/>
+        </p:nvSpPr>
+        <p:spPr>
+          <a:xfrm>
+            <a:off x="4572000" y="2139696"/>
+            <a:ext cx="3246120" cy="548640"/>
+          </a:xfrm>
+          <a:prstGeom prst="rect">
+            <a:avLst/>
+          </a:prstGeom>
+          <a:noFill/>
+        </p:spPr>
+        <p:txBody>
+          <a:bodyPr wrap="square" lIns="0" rIns="0" tIns="0" bIns="0">
+            <a:spAutoFit/>
+          </a:bodyPr>
+          <a:lstStyle/>
+          <a:p>
+            <a:pPr algn="l"/>
+            <a:r>
+              <a:rPr sz="1050" b="0" i="0">
+                <a:solidFill>
+                  <a:srgbClr val="16273D"/>
+                </a:solidFill>
+                <a:latin typeface="Arial"/>
+              </a:rPr>
+              <a:t>NEW — veteran portal room again</a:t>
+            </a:r>
+          </a:p>
+        </p:txBody>
+      </p:sp>
+      <p:sp>
+        <p:nvSpPr>
+          <p:cNvPr id="10" name="TextBox 9"/>
+          <p:cNvSpPr txBox="1"/>
+          <p:nvPr/>
+        </p:nvSpPr>
+        <p:spPr>
+          <a:xfrm>
+            <a:off x="8092440" y="1901952"/>
+            <a:ext cx="3246120" cy="228600"/>
+          </a:xfrm>
+          <a:prstGeom prst="rect">
+            <a:avLst/>
+          </a:prstGeom>
+          <a:noFill/>
+        </p:spPr>
+        <p:txBody>
+          <a:bodyPr wrap="square" lIns="0" rIns="0" tIns="0" bIns="0">
+            <a:spAutoFit/>
+          </a:bodyPr>
+          <a:lstStyle/>
+          <a:p>
+            <a:pPr algn="l"/>
+            <a:r>
+              <a:rPr sz="950" b="1" i="0">
+                <a:solidFill>
+                  <a:srgbClr val="F47321"/>
+                </a:solidFill>
+                <a:latin typeface="Arial"/>
+              </a:rPr>
+              <a:t>ROSTER</a:t>
+            </a:r>
+          </a:p>
+        </p:txBody>
+      </p:sp>
+      <p:sp>
+        <p:nvSpPr>
+          <p:cNvPr id="11" name="TextBox 10"/>
+          <p:cNvSpPr txBox="1"/>
+          <p:nvPr/>
+        </p:nvSpPr>
+        <p:spPr>
+          <a:xfrm>
+            <a:off x="8092440" y="2139696"/>
+            <a:ext cx="3246120" cy="548640"/>
+          </a:xfrm>
+          <a:prstGeom prst="rect">
+            <a:avLst/>
+          </a:prstGeom>
+          <a:noFill/>
+        </p:spPr>
+        <p:txBody>
+          <a:bodyPr wrap="square" lIns="0" rIns="0" tIns="0" bIns="0">
+            <a:spAutoFit/>
+          </a:bodyPr>
+          <a:lstStyle/>
+          <a:p>
+            <a:pPr algn="l"/>
+            <a:r>
+              <a:rPr sz="1050" b="0" i="0">
+                <a:solidFill>
+                  <a:srgbClr val="16273D"/>
+                </a:solidFill>
+                <a:latin typeface="Arial"/>
+              </a:rPr>
+              <a:t>40% back · 22 portal adds — another portal reload</a:t>
+            </a:r>
+          </a:p>
+        </p:txBody>
+      </p:sp>
+      <p:sp>
+        <p:nvSpPr>
+          <p:cNvPr id="12" name="Oval 11"/>
+          <p:cNvSpPr/>
+          <p:nvPr/>
+        </p:nvSpPr>
+        <p:spPr>
+          <a:xfrm>
+            <a:off x="914400" y="3218688"/>
+            <a:ext cx="137160" cy="137160"/>
           </a:xfrm>
           <a:prstGeom prst="ellipse">
             <a:avLst/>
@@ -9731,29 +11255,29 @@
       </p:sp>
       <p:sp>
         <p:nvSpPr>
-          <p:cNvPr id="6" name="TextBox 5"/>
-          <p:cNvSpPr txBox="1"/>
-          <p:nvPr/>
-        </p:nvSpPr>
-        <p:spPr>
-          <a:xfrm>
-            <a:off x="1325880" y="2148840"/>
-            <a:ext cx="9601200" cy="777240"/>
-          </a:xfrm>
-          <a:prstGeom prst="rect">
-            <a:avLst/>
-          </a:prstGeom>
-          <a:noFill/>
-        </p:spPr>
-        <p:txBody>
-          <a:bodyPr wrap="square" lIns="0" rIns="0" tIns="0" bIns="0">
-            <a:spAutoFit/>
-          </a:bodyPr>
-          <a:lstStyle/>
-          <a:p>
-            <a:pPr algn="l"/>
-            <a:r>
-              <a:rPr sz="1700" b="0" i="0">
+          <p:cNvPr id="13" name="TextBox 12"/>
+          <p:cNvSpPr txBox="1"/>
+          <p:nvPr/>
+        </p:nvSpPr>
+        <p:spPr>
+          <a:xfrm>
+            <a:off x="1325880" y="3108960"/>
+            <a:ext cx="9601200" cy="731520"/>
+          </a:xfrm>
+          <a:prstGeom prst="rect">
+            <a:avLst/>
+          </a:prstGeom>
+          <a:noFill/>
+        </p:spPr>
+        <p:txBody>
+          <a:bodyPr wrap="square" lIns="0" rIns="0" tIns="0" bIns="0">
+            <a:spAutoFit/>
+          </a:bodyPr>
+          <a:lstStyle/>
+          <a:p>
+            <a:pPr algn="l"/>
+            <a:r>
+              <a:rPr sz="1550" b="0" i="0">
                 <a:solidFill>
                   <a:srgbClr val="16273D"/>
                 </a:solidFill>
@@ -9766,14 +11290,14 @@
       </p:sp>
       <p:sp>
         <p:nvSpPr>
-          <p:cNvPr id="7" name="Oval 6"/>
+          <p:cNvPr id="14" name="Oval 13"/>
           <p:cNvSpPr/>
           <p:nvPr/>
         </p:nvSpPr>
         <p:spPr>
           <a:xfrm>
-            <a:off x="914400" y="3236976"/>
-            <a:ext cx="146304" cy="146304"/>
+            <a:off x="914400" y="4059936"/>
+            <a:ext cx="137160" cy="137160"/>
           </a:xfrm>
           <a:prstGeom prst="ellipse">
             <a:avLst/>
@@ -9810,29 +11334,29 @@
       </p:sp>
       <p:sp>
         <p:nvSpPr>
-          <p:cNvPr id="8" name="TextBox 7"/>
-          <p:cNvSpPr txBox="1"/>
-          <p:nvPr/>
-        </p:nvSpPr>
-        <p:spPr>
-          <a:xfrm>
-            <a:off x="1325880" y="3108960"/>
-            <a:ext cx="9601200" cy="777240"/>
-          </a:xfrm>
-          <a:prstGeom prst="rect">
-            <a:avLst/>
-          </a:prstGeom>
-          <a:noFill/>
-        </p:spPr>
-        <p:txBody>
-          <a:bodyPr wrap="square" lIns="0" rIns="0" tIns="0" bIns="0">
-            <a:spAutoFit/>
-          </a:bodyPr>
-          <a:lstStyle/>
-          <a:p>
-            <a:pPr algn="l"/>
-            <a:r>
-              <a:rPr sz="1700" b="0" i="0">
+          <p:cNvPr id="15" name="TextBox 14"/>
+          <p:cNvSpPr txBox="1"/>
+          <p:nvPr/>
+        </p:nvSpPr>
+        <p:spPr>
+          <a:xfrm>
+            <a:off x="1325880" y="3950208"/>
+            <a:ext cx="9601200" cy="731520"/>
+          </a:xfrm>
+          <a:prstGeom prst="rect">
+            <a:avLst/>
+          </a:prstGeom>
+          <a:noFill/>
+        </p:spPr>
+        <p:txBody>
+          <a:bodyPr wrap="square" lIns="0" rIns="0" tIns="0" bIns="0">
+            <a:spAutoFit/>
+          </a:bodyPr>
+          <a:lstStyle/>
+          <a:p>
+            <a:pPr algn="l"/>
+            <a:r>
+              <a:rPr sz="1550" b="0" i="0">
                 <a:solidFill>
                   <a:srgbClr val="16273D"/>
                 </a:solidFill>
@@ -9845,14 +11369,14 @@
       </p:sp>
       <p:sp>
         <p:nvSpPr>
-          <p:cNvPr id="9" name="Oval 8"/>
+          <p:cNvPr id="16" name="Oval 15"/>
           <p:cNvSpPr/>
           <p:nvPr/>
         </p:nvSpPr>
         <p:spPr>
           <a:xfrm>
-            <a:off x="914400" y="4197096"/>
-            <a:ext cx="146304" cy="146304"/>
+            <a:off x="914400" y="4901184"/>
+            <a:ext cx="137160" cy="137160"/>
           </a:xfrm>
           <a:prstGeom prst="ellipse">
             <a:avLst/>
@@ -9889,29 +11413,29 @@
       </p:sp>
       <p:sp>
         <p:nvSpPr>
-          <p:cNvPr id="10" name="TextBox 9"/>
-          <p:cNvSpPr txBox="1"/>
-          <p:nvPr/>
-        </p:nvSpPr>
-        <p:spPr>
-          <a:xfrm>
-            <a:off x="1325880" y="4069080"/>
-            <a:ext cx="9601200" cy="777240"/>
-          </a:xfrm>
-          <a:prstGeom prst="rect">
-            <a:avLst/>
-          </a:prstGeom>
-          <a:noFill/>
-        </p:spPr>
-        <p:txBody>
-          <a:bodyPr wrap="square" lIns="0" rIns="0" tIns="0" bIns="0">
-            <a:spAutoFit/>
-          </a:bodyPr>
-          <a:lstStyle/>
-          <a:p>
-            <a:pPr algn="l"/>
-            <a:r>
-              <a:rPr sz="1700" b="0" i="0">
+          <p:cNvPr id="17" name="TextBox 16"/>
+          <p:cNvSpPr txBox="1"/>
+          <p:nvPr/>
+        </p:nvSpPr>
+        <p:spPr>
+          <a:xfrm>
+            <a:off x="1325880" y="4791456"/>
+            <a:ext cx="9601200" cy="731520"/>
+          </a:xfrm>
+          <a:prstGeom prst="rect">
+            <a:avLst/>
+          </a:prstGeom>
+          <a:noFill/>
+        </p:spPr>
+        <p:txBody>
+          <a:bodyPr wrap="square" lIns="0" rIns="0" tIns="0" bIns="0">
+            <a:spAutoFit/>
+          </a:bodyPr>
+          <a:lstStyle/>
+          <a:p>
+            <a:pPr algn="l"/>
+            <a:r>
+              <a:rPr sz="1550" b="0" i="0">
                 <a:solidFill>
                   <a:srgbClr val="16273D"/>
                 </a:solidFill>
@@ -9924,14 +11448,14 @@
       </p:sp>
       <p:sp>
         <p:nvSpPr>
-          <p:cNvPr id="11" name="Oval 10"/>
+          <p:cNvPr id="18" name="Oval 17"/>
           <p:cNvSpPr/>
           <p:nvPr/>
         </p:nvSpPr>
         <p:spPr>
           <a:xfrm>
-            <a:off x="914400" y="5157216"/>
-            <a:ext cx="146304" cy="146304"/>
+            <a:off x="914400" y="5742432"/>
+            <a:ext cx="137160" cy="137160"/>
           </a:xfrm>
           <a:prstGeom prst="ellipse">
             <a:avLst/>
@@ -9968,29 +11492,29 @@
       </p:sp>
       <p:sp>
         <p:nvSpPr>
-          <p:cNvPr id="12" name="TextBox 11"/>
-          <p:cNvSpPr txBox="1"/>
-          <p:nvPr/>
-        </p:nvSpPr>
-        <p:spPr>
-          <a:xfrm>
-            <a:off x="1325880" y="5029200"/>
-            <a:ext cx="9601200" cy="777240"/>
-          </a:xfrm>
-          <a:prstGeom prst="rect">
-            <a:avLst/>
-          </a:prstGeom>
-          <a:noFill/>
-        </p:spPr>
-        <p:txBody>
-          <a:bodyPr wrap="square" lIns="0" rIns="0" tIns="0" bIns="0">
-            <a:spAutoFit/>
-          </a:bodyPr>
-          <a:lstStyle/>
-          <a:p>
-            <a:pPr algn="l"/>
-            <a:r>
-              <a:rPr sz="1700" b="0" i="0">
+          <p:cNvPr id="19" name="TextBox 18"/>
+          <p:cNvSpPr txBox="1"/>
+          <p:nvPr/>
+        </p:nvSpPr>
+        <p:spPr>
+          <a:xfrm>
+            <a:off x="1325880" y="5632704"/>
+            <a:ext cx="9601200" cy="731520"/>
+          </a:xfrm>
+          <a:prstGeom prst="rect">
+            <a:avLst/>
+          </a:prstGeom>
+          <a:noFill/>
+        </p:spPr>
+        <p:txBody>
+          <a:bodyPr wrap="square" lIns="0" rIns="0" tIns="0" bIns="0">
+            <a:spAutoFit/>
+          </a:bodyPr>
+          <a:lstStyle/>
+          <a:p>
+            <a:pPr algn="l"/>
+            <a:r>
+              <a:rPr sz="1550" b="0" i="0">
                 <a:solidFill>
                   <a:srgbClr val="16273D"/>
                 </a:solidFill>
@@ -10003,7 +11527,7 @@
       </p:sp>
       <p:sp>
         <p:nvSpPr>
-          <p:cNvPr id="13" name="TextBox 12"/>
+          <p:cNvPr id="20" name="TextBox 19"/>
           <p:cNvSpPr txBox="1"/>
           <p:nvPr/>
         </p:nvSpPr>
@@ -13311,7 +14835,7 @@
                 </a:solidFill>
                 <a:latin typeface="Arial"/>
               </a:rPr>
-              <a:t>WHAT DECIDES IT</a:t>
+              <a:t>WHY IT MATTERS</a:t>
             </a:r>
           </a:p>
         </p:txBody>
@@ -13390,7 +14914,7 @@
                 </a:solidFill>
                 <a:latin typeface="Arial"/>
               </a:rPr>
-              <a:t>Lagway's arm vs Durkin's carried-over defense — the one unit here with real continuity</a:t>
+              <a:t>Two rebooted programs on a neutral floor: Golesh's Auburn debut vs the biggest QB get in Baylor history</a:t>
             </a:r>
           </a:p>
         </p:txBody>
@@ -13469,7 +14993,7 @@
                 </a:solidFill>
                 <a:latin typeface="Arial"/>
               </a:rPr>
-              <a:t>Two installs collide: Golesh's tempo offense vs Baylor's new-look defense under Klanderman</a:t>
+              <a:t>The card's starkest contrast — Auburn returns 14% of production (39 portal adds), Baylor returns 60%</a:t>
             </a:r>
           </a:p>
         </p:txBody>
@@ -13548,7 +15072,7 @@
                 </a:solidFill>
                 <a:latin typeface="Arial"/>
               </a:rPr>
-              <a:t>Auburn's top-10 DL talent vs keeping Lagway upright — his health history is the whole ballgame</a:t>
+              <a:t>Lagway's health is the single biggest variable in the Big 12 season</a:t>
             </a:r>
           </a:p>
         </p:txBody>
@@ -14420,14 +15944,268 @@
       </p:sp>
       <p:sp>
         <p:nvSpPr>
-          <p:cNvPr id="5" name="Oval 4"/>
+          <p:cNvPr id="5" name="Rounded Rectangle 4"/>
           <p:cNvSpPr/>
           <p:nvPr/>
         </p:nvSpPr>
         <p:spPr>
           <a:xfrm>
-            <a:off x="914400" y="2276856"/>
-            <a:ext cx="146304" cy="146304"/>
+            <a:off x="822960" y="1783080"/>
+            <a:ext cx="10515600" cy="960120"/>
+          </a:xfrm>
+          <a:prstGeom prst="roundRect">
+            <a:avLst/>
+          </a:prstGeom>
+          <a:solidFill>
+            <a:srgbClr val="EAF0F8"/>
+          </a:solidFill>
+          <a:ln>
+            <a:noFill/>
+          </a:ln>
+          <a:effectLst/>
+        </p:spPr>
+        <p:style>
+          <a:lnRef idx="1">
+            <a:schemeClr val="accent1"/>
+          </a:lnRef>
+          <a:fillRef idx="3">
+            <a:schemeClr val="accent1"/>
+          </a:fillRef>
+          <a:effectRef idx="2">
+            <a:schemeClr val="accent1"/>
+          </a:effectRef>
+          <a:fontRef idx="minor">
+            <a:schemeClr val="lt1"/>
+          </a:fontRef>
+        </p:style>
+        <p:txBody>
+          <a:bodyPr rtlCol="0" anchor="ctr"/>
+          <a:lstStyle/>
+          <a:p>
+            <a:pPr algn="ctr"/>
+          </a:p>
+        </p:txBody>
+      </p:sp>
+      <p:sp>
+        <p:nvSpPr>
+          <p:cNvPr id="6" name="TextBox 5"/>
+          <p:cNvSpPr txBox="1"/>
+          <p:nvPr/>
+        </p:nvSpPr>
+        <p:spPr>
+          <a:xfrm>
+            <a:off x="1051560" y="1901952"/>
+            <a:ext cx="3246120" cy="228600"/>
+          </a:xfrm>
+          <a:prstGeom prst="rect">
+            <a:avLst/>
+          </a:prstGeom>
+          <a:noFill/>
+        </p:spPr>
+        <p:txBody>
+          <a:bodyPr wrap="square" lIns="0" rIns="0" tIns="0" bIns="0">
+            <a:spAutoFit/>
+          </a:bodyPr>
+          <a:lstStyle/>
+          <a:p>
+            <a:pPr algn="l"/>
+            <a:r>
+              <a:rPr sz="950" b="1" i="0">
+                <a:solidFill>
+                  <a:srgbClr val="F47321"/>
+                </a:solidFill>
+                <a:latin typeface="Arial"/>
+              </a:rPr>
+              <a:t>COACH</a:t>
+            </a:r>
+          </a:p>
+        </p:txBody>
+      </p:sp>
+      <p:sp>
+        <p:nvSpPr>
+          <p:cNvPr id="7" name="TextBox 6"/>
+          <p:cNvSpPr txBox="1"/>
+          <p:nvPr/>
+        </p:nvSpPr>
+        <p:spPr>
+          <a:xfrm>
+            <a:off x="1051560" y="2139696"/>
+            <a:ext cx="3246120" cy="548640"/>
+          </a:xfrm>
+          <a:prstGeom prst="rect">
+            <a:avLst/>
+          </a:prstGeom>
+          <a:noFill/>
+        </p:spPr>
+        <p:txBody>
+          <a:bodyPr wrap="square" lIns="0" rIns="0" tIns="0" bIns="0">
+            <a:spAutoFit/>
+          </a:bodyPr>
+          <a:lstStyle/>
+          <a:p>
+            <a:pPr algn="l"/>
+            <a:r>
+              <a:rPr sz="1050" b="0" i="0">
+                <a:solidFill>
+                  <a:srgbClr val="16273D"/>
+                </a:solidFill>
+                <a:latin typeface="Arial"/>
+              </a:rPr>
+              <a:t>Aranda, year 6 — seat survived; new DC Klanderman (K-State)</a:t>
+            </a:r>
+          </a:p>
+        </p:txBody>
+      </p:sp>
+      <p:sp>
+        <p:nvSpPr>
+          <p:cNvPr id="8" name="TextBox 7"/>
+          <p:cNvSpPr txBox="1"/>
+          <p:nvPr/>
+        </p:nvSpPr>
+        <p:spPr>
+          <a:xfrm>
+            <a:off x="4572000" y="1901952"/>
+            <a:ext cx="3246120" cy="228600"/>
+          </a:xfrm>
+          <a:prstGeom prst="rect">
+            <a:avLst/>
+          </a:prstGeom>
+          <a:noFill/>
+        </p:spPr>
+        <p:txBody>
+          <a:bodyPr wrap="square" lIns="0" rIns="0" tIns="0" bIns="0">
+            <a:spAutoFit/>
+          </a:bodyPr>
+          <a:lstStyle/>
+          <a:p>
+            <a:pPr algn="l"/>
+            <a:r>
+              <a:rPr sz="950" b="1" i="0">
+                <a:solidFill>
+                  <a:srgbClr val="F47321"/>
+                </a:solidFill>
+                <a:latin typeface="Arial"/>
+              </a:rPr>
+              <a:t>QB</a:t>
+            </a:r>
+          </a:p>
+        </p:txBody>
+      </p:sp>
+      <p:sp>
+        <p:nvSpPr>
+          <p:cNvPr id="9" name="TextBox 8"/>
+          <p:cNvSpPr txBox="1"/>
+          <p:nvPr/>
+        </p:nvSpPr>
+        <p:spPr>
+          <a:xfrm>
+            <a:off x="4572000" y="2139696"/>
+            <a:ext cx="3246120" cy="548640"/>
+          </a:xfrm>
+          <a:prstGeom prst="rect">
+            <a:avLst/>
+          </a:prstGeom>
+          <a:noFill/>
+        </p:spPr>
+        <p:txBody>
+          <a:bodyPr wrap="square" lIns="0" rIns="0" tIns="0" bIns="0">
+            <a:spAutoFit/>
+          </a:bodyPr>
+          <a:lstStyle/>
+          <a:p>
+            <a:pPr algn="l"/>
+            <a:r>
+              <a:rPr sz="1050" b="0" i="0">
+                <a:solidFill>
+                  <a:srgbClr val="16273D"/>
+                </a:solidFill>
+                <a:latin typeface="Arial"/>
+              </a:rPr>
+              <a:t>NEW — DJ Lagway (Florida), biggest transfer get in program history</a:t>
+            </a:r>
+          </a:p>
+        </p:txBody>
+      </p:sp>
+      <p:sp>
+        <p:nvSpPr>
+          <p:cNvPr id="10" name="TextBox 9"/>
+          <p:cNvSpPr txBox="1"/>
+          <p:nvPr/>
+        </p:nvSpPr>
+        <p:spPr>
+          <a:xfrm>
+            <a:off x="8092440" y="1901952"/>
+            <a:ext cx="3246120" cy="228600"/>
+          </a:xfrm>
+          <a:prstGeom prst="rect">
+            <a:avLst/>
+          </a:prstGeom>
+          <a:noFill/>
+        </p:spPr>
+        <p:txBody>
+          <a:bodyPr wrap="square" lIns="0" rIns="0" tIns="0" bIns="0">
+            <a:spAutoFit/>
+          </a:bodyPr>
+          <a:lstStyle/>
+          <a:p>
+            <a:pPr algn="l"/>
+            <a:r>
+              <a:rPr sz="950" b="1" i="0">
+                <a:solidFill>
+                  <a:srgbClr val="F47321"/>
+                </a:solidFill>
+                <a:latin typeface="Arial"/>
+              </a:rPr>
+              <a:t>ROSTER</a:t>
+            </a:r>
+          </a:p>
+        </p:txBody>
+      </p:sp>
+      <p:sp>
+        <p:nvSpPr>
+          <p:cNvPr id="11" name="TextBox 10"/>
+          <p:cNvSpPr txBox="1"/>
+          <p:nvPr/>
+        </p:nvSpPr>
+        <p:spPr>
+          <a:xfrm>
+            <a:off x="8092440" y="2139696"/>
+            <a:ext cx="3246120" cy="548640"/>
+          </a:xfrm>
+          <a:prstGeom prst="rect">
+            <a:avLst/>
+          </a:prstGeom>
+          <a:noFill/>
+        </p:spPr>
+        <p:txBody>
+          <a:bodyPr wrap="square" lIns="0" rIns="0" tIns="0" bIns="0">
+            <a:spAutoFit/>
+          </a:bodyPr>
+          <a:lstStyle/>
+          <a:p>
+            <a:pPr algn="l"/>
+            <a:r>
+              <a:rPr sz="1050" b="0" i="0">
+                <a:solidFill>
+                  <a:srgbClr val="16273D"/>
+                </a:solidFill>
+                <a:latin typeface="Arial"/>
+              </a:rPr>
+              <a:t>60% of offensive production back — most on this card · 31 portal adds</a:t>
+            </a:r>
+          </a:p>
+        </p:txBody>
+      </p:sp>
+      <p:sp>
+        <p:nvSpPr>
+          <p:cNvPr id="12" name="Oval 11"/>
+          <p:cNvSpPr/>
+          <p:nvPr/>
+        </p:nvSpPr>
+        <p:spPr>
+          <a:xfrm>
+            <a:off x="914400" y="3218688"/>
+            <a:ext cx="137160" cy="137160"/>
           </a:xfrm>
           <a:prstGeom prst="ellipse">
             <a:avLst/>
@@ -14464,29 +16242,29 @@
       </p:sp>
       <p:sp>
         <p:nvSpPr>
-          <p:cNvPr id="6" name="TextBox 5"/>
-          <p:cNvSpPr txBox="1"/>
-          <p:nvPr/>
-        </p:nvSpPr>
-        <p:spPr>
-          <a:xfrm>
-            <a:off x="1325880" y="2148840"/>
-            <a:ext cx="9601200" cy="777240"/>
-          </a:xfrm>
-          <a:prstGeom prst="rect">
-            <a:avLst/>
-          </a:prstGeom>
-          <a:noFill/>
-        </p:spPr>
-        <p:txBody>
-          <a:bodyPr wrap="square" lIns="0" rIns="0" tIns="0" bIns="0">
-            <a:spAutoFit/>
-          </a:bodyPr>
-          <a:lstStyle/>
-          <a:p>
-            <a:pPr algn="l"/>
-            <a:r>
-              <a:rPr sz="1700" b="0" i="0">
+          <p:cNvPr id="13" name="TextBox 12"/>
+          <p:cNvSpPr txBox="1"/>
+          <p:nvPr/>
+        </p:nvSpPr>
+        <p:spPr>
+          <a:xfrm>
+            <a:off x="1325880" y="3108960"/>
+            <a:ext cx="9601200" cy="731520"/>
+          </a:xfrm>
+          <a:prstGeom prst="rect">
+            <a:avLst/>
+          </a:prstGeom>
+          <a:noFill/>
+        </p:spPr>
+        <p:txBody>
+          <a:bodyPr wrap="square" lIns="0" rIns="0" tIns="0" bIns="0">
+            <a:spAutoFit/>
+          </a:bodyPr>
+          <a:lstStyle/>
+          <a:p>
+            <a:pPr algn="l"/>
+            <a:r>
+              <a:rPr sz="1550" b="0" i="0">
                 <a:solidFill>
                   <a:srgbClr val="16273D"/>
                 </a:solidFill>
@@ -14499,14 +16277,14 @@
       </p:sp>
       <p:sp>
         <p:nvSpPr>
-          <p:cNvPr id="7" name="Oval 6"/>
+          <p:cNvPr id="14" name="Oval 13"/>
           <p:cNvSpPr/>
           <p:nvPr/>
         </p:nvSpPr>
         <p:spPr>
           <a:xfrm>
-            <a:off x="914400" y="3236976"/>
-            <a:ext cx="146304" cy="146304"/>
+            <a:off x="914400" y="4059936"/>
+            <a:ext cx="137160" cy="137160"/>
           </a:xfrm>
           <a:prstGeom prst="ellipse">
             <a:avLst/>
@@ -14543,29 +16321,29 @@
       </p:sp>
       <p:sp>
         <p:nvSpPr>
-          <p:cNvPr id="8" name="TextBox 7"/>
-          <p:cNvSpPr txBox="1"/>
-          <p:nvPr/>
-        </p:nvSpPr>
-        <p:spPr>
-          <a:xfrm>
-            <a:off x="1325880" y="3108960"/>
-            <a:ext cx="9601200" cy="777240"/>
-          </a:xfrm>
-          <a:prstGeom prst="rect">
-            <a:avLst/>
-          </a:prstGeom>
-          <a:noFill/>
-        </p:spPr>
-        <p:txBody>
-          <a:bodyPr wrap="square" lIns="0" rIns="0" tIns="0" bIns="0">
-            <a:spAutoFit/>
-          </a:bodyPr>
-          <a:lstStyle/>
-          <a:p>
-            <a:pPr algn="l"/>
-            <a:r>
-              <a:rPr sz="1700" b="0" i="0">
+          <p:cNvPr id="15" name="TextBox 14"/>
+          <p:cNvSpPr txBox="1"/>
+          <p:nvPr/>
+        </p:nvSpPr>
+        <p:spPr>
+          <a:xfrm>
+            <a:off x="1325880" y="3950208"/>
+            <a:ext cx="9601200" cy="731520"/>
+          </a:xfrm>
+          <a:prstGeom prst="rect">
+            <a:avLst/>
+          </a:prstGeom>
+          <a:noFill/>
+        </p:spPr>
+        <p:txBody>
+          <a:bodyPr wrap="square" lIns="0" rIns="0" tIns="0" bIns="0">
+            <a:spAutoFit/>
+          </a:bodyPr>
+          <a:lstStyle/>
+          <a:p>
+            <a:pPr algn="l"/>
+            <a:r>
+              <a:rPr sz="1550" b="0" i="0">
                 <a:solidFill>
                   <a:srgbClr val="16273D"/>
                 </a:solidFill>
@@ -14578,14 +16356,14 @@
       </p:sp>
       <p:sp>
         <p:nvSpPr>
-          <p:cNvPr id="9" name="Oval 8"/>
+          <p:cNvPr id="16" name="Oval 15"/>
           <p:cNvSpPr/>
           <p:nvPr/>
         </p:nvSpPr>
         <p:spPr>
           <a:xfrm>
-            <a:off x="914400" y="4197096"/>
-            <a:ext cx="146304" cy="146304"/>
+            <a:off x="914400" y="4901184"/>
+            <a:ext cx="137160" cy="137160"/>
           </a:xfrm>
           <a:prstGeom prst="ellipse">
             <a:avLst/>
@@ -14622,29 +16400,29 @@
       </p:sp>
       <p:sp>
         <p:nvSpPr>
-          <p:cNvPr id="10" name="TextBox 9"/>
-          <p:cNvSpPr txBox="1"/>
-          <p:nvPr/>
-        </p:nvSpPr>
-        <p:spPr>
-          <a:xfrm>
-            <a:off x="1325880" y="4069080"/>
-            <a:ext cx="9601200" cy="777240"/>
-          </a:xfrm>
-          <a:prstGeom prst="rect">
-            <a:avLst/>
-          </a:prstGeom>
-          <a:noFill/>
-        </p:spPr>
-        <p:txBody>
-          <a:bodyPr wrap="square" lIns="0" rIns="0" tIns="0" bIns="0">
-            <a:spAutoFit/>
-          </a:bodyPr>
-          <a:lstStyle/>
-          <a:p>
-            <a:pPr algn="l"/>
-            <a:r>
-              <a:rPr sz="1700" b="0" i="0">
+          <p:cNvPr id="17" name="TextBox 16"/>
+          <p:cNvSpPr txBox="1"/>
+          <p:nvPr/>
+        </p:nvSpPr>
+        <p:spPr>
+          <a:xfrm>
+            <a:off x="1325880" y="4791456"/>
+            <a:ext cx="9601200" cy="731520"/>
+          </a:xfrm>
+          <a:prstGeom prst="rect">
+            <a:avLst/>
+          </a:prstGeom>
+          <a:noFill/>
+        </p:spPr>
+        <p:txBody>
+          <a:bodyPr wrap="square" lIns="0" rIns="0" tIns="0" bIns="0">
+            <a:spAutoFit/>
+          </a:bodyPr>
+          <a:lstStyle/>
+          <a:p>
+            <a:pPr algn="l"/>
+            <a:r>
+              <a:rPr sz="1550" b="0" i="0">
                 <a:solidFill>
                   <a:srgbClr val="16273D"/>
                 </a:solidFill>
@@ -14657,14 +16435,14 @@
       </p:sp>
       <p:sp>
         <p:nvSpPr>
-          <p:cNvPr id="11" name="Oval 10"/>
+          <p:cNvPr id="18" name="Oval 17"/>
           <p:cNvSpPr/>
           <p:nvPr/>
         </p:nvSpPr>
         <p:spPr>
           <a:xfrm>
-            <a:off x="914400" y="5157216"/>
-            <a:ext cx="146304" cy="146304"/>
+            <a:off x="914400" y="5742432"/>
+            <a:ext cx="137160" cy="137160"/>
           </a:xfrm>
           <a:prstGeom prst="ellipse">
             <a:avLst/>
@@ -14701,29 +16479,29 @@
       </p:sp>
       <p:sp>
         <p:nvSpPr>
-          <p:cNvPr id="12" name="TextBox 11"/>
-          <p:cNvSpPr txBox="1"/>
-          <p:nvPr/>
-        </p:nvSpPr>
-        <p:spPr>
-          <a:xfrm>
-            <a:off x="1325880" y="5029200"/>
-            <a:ext cx="9601200" cy="777240"/>
-          </a:xfrm>
-          <a:prstGeom prst="rect">
-            <a:avLst/>
-          </a:prstGeom>
-          <a:noFill/>
-        </p:spPr>
-        <p:txBody>
-          <a:bodyPr wrap="square" lIns="0" rIns="0" tIns="0" bIns="0">
-            <a:spAutoFit/>
-          </a:bodyPr>
-          <a:lstStyle/>
-          <a:p>
-            <a:pPr algn="l"/>
-            <a:r>
-              <a:rPr sz="1700" b="0" i="0">
+          <p:cNvPr id="19" name="TextBox 18"/>
+          <p:cNvSpPr txBox="1"/>
+          <p:nvPr/>
+        </p:nvSpPr>
+        <p:spPr>
+          <a:xfrm>
+            <a:off x="1325880" y="5632704"/>
+            <a:ext cx="9601200" cy="731520"/>
+          </a:xfrm>
+          <a:prstGeom prst="rect">
+            <a:avLst/>
+          </a:prstGeom>
+          <a:noFill/>
+        </p:spPr>
+        <p:txBody>
+          <a:bodyPr wrap="square" lIns="0" rIns="0" tIns="0" bIns="0">
+            <a:spAutoFit/>
+          </a:bodyPr>
+          <a:lstStyle/>
+          <a:p>
+            <a:pPr algn="l"/>
+            <a:r>
+              <a:rPr sz="1550" b="0" i="0">
                 <a:solidFill>
                   <a:srgbClr val="16273D"/>
                 </a:solidFill>
@@ -14736,7 +16514,7 @@
       </p:sp>
       <p:sp>
         <p:nvSpPr>
-          <p:cNvPr id="13" name="TextBox 12"/>
+          <p:cNvPr id="20" name="TextBox 19"/>
           <p:cNvSpPr txBox="1"/>
           <p:nvPr/>
         </p:nvSpPr>
@@ -14891,14 +16669,268 @@
       </p:sp>
       <p:sp>
         <p:nvSpPr>
-          <p:cNvPr id="5" name="Oval 4"/>
+          <p:cNvPr id="5" name="Rounded Rectangle 4"/>
           <p:cNvSpPr/>
           <p:nvPr/>
         </p:nvSpPr>
         <p:spPr>
           <a:xfrm>
-            <a:off x="914400" y="2276856"/>
-            <a:ext cx="146304" cy="146304"/>
+            <a:off x="822960" y="1783080"/>
+            <a:ext cx="10515600" cy="960120"/>
+          </a:xfrm>
+          <a:prstGeom prst="roundRect">
+            <a:avLst/>
+          </a:prstGeom>
+          <a:solidFill>
+            <a:srgbClr val="EAF0F8"/>
+          </a:solidFill>
+          <a:ln>
+            <a:noFill/>
+          </a:ln>
+          <a:effectLst/>
+        </p:spPr>
+        <p:style>
+          <a:lnRef idx="1">
+            <a:schemeClr val="accent1"/>
+          </a:lnRef>
+          <a:fillRef idx="3">
+            <a:schemeClr val="accent1"/>
+          </a:fillRef>
+          <a:effectRef idx="2">
+            <a:schemeClr val="accent1"/>
+          </a:effectRef>
+          <a:fontRef idx="minor">
+            <a:schemeClr val="lt1"/>
+          </a:fontRef>
+        </p:style>
+        <p:txBody>
+          <a:bodyPr rtlCol="0" anchor="ctr"/>
+          <a:lstStyle/>
+          <a:p>
+            <a:pPr algn="ctr"/>
+          </a:p>
+        </p:txBody>
+      </p:sp>
+      <p:sp>
+        <p:nvSpPr>
+          <p:cNvPr id="6" name="TextBox 5"/>
+          <p:cNvSpPr txBox="1"/>
+          <p:nvPr/>
+        </p:nvSpPr>
+        <p:spPr>
+          <a:xfrm>
+            <a:off x="1051560" y="1901952"/>
+            <a:ext cx="3246120" cy="228600"/>
+          </a:xfrm>
+          <a:prstGeom prst="rect">
+            <a:avLst/>
+          </a:prstGeom>
+          <a:noFill/>
+        </p:spPr>
+        <p:txBody>
+          <a:bodyPr wrap="square" lIns="0" rIns="0" tIns="0" bIns="0">
+            <a:spAutoFit/>
+          </a:bodyPr>
+          <a:lstStyle/>
+          <a:p>
+            <a:pPr algn="l"/>
+            <a:r>
+              <a:rPr sz="950" b="1" i="0">
+                <a:solidFill>
+                  <a:srgbClr val="F47321"/>
+                </a:solidFill>
+                <a:latin typeface="Arial"/>
+              </a:rPr>
+              <a:t>COACH</a:t>
+            </a:r>
+          </a:p>
+        </p:txBody>
+      </p:sp>
+      <p:sp>
+        <p:nvSpPr>
+          <p:cNvPr id="7" name="TextBox 6"/>
+          <p:cNvSpPr txBox="1"/>
+          <p:nvPr/>
+        </p:nvSpPr>
+        <p:spPr>
+          <a:xfrm>
+            <a:off x="1051560" y="2139696"/>
+            <a:ext cx="3246120" cy="548640"/>
+          </a:xfrm>
+          <a:prstGeom prst="rect">
+            <a:avLst/>
+          </a:prstGeom>
+          <a:noFill/>
+        </p:spPr>
+        <p:txBody>
+          <a:bodyPr wrap="square" lIns="0" rIns="0" tIns="0" bIns="0">
+            <a:spAutoFit/>
+          </a:bodyPr>
+          <a:lstStyle/>
+          <a:p>
+            <a:pPr algn="l"/>
+            <a:r>
+              <a:rPr sz="1050" b="0" i="0">
+                <a:solidFill>
+                  <a:srgbClr val="16273D"/>
+                </a:solidFill>
+                <a:latin typeface="Arial"/>
+              </a:rPr>
+              <a:t>NEW — Alex Golesh (USF) · Durkin RETAINED as DC</a:t>
+            </a:r>
+          </a:p>
+        </p:txBody>
+      </p:sp>
+      <p:sp>
+        <p:nvSpPr>
+          <p:cNvPr id="8" name="TextBox 7"/>
+          <p:cNvSpPr txBox="1"/>
+          <p:nvPr/>
+        </p:nvSpPr>
+        <p:spPr>
+          <a:xfrm>
+            <a:off x="4572000" y="1901952"/>
+            <a:ext cx="3246120" cy="228600"/>
+          </a:xfrm>
+          <a:prstGeom prst="rect">
+            <a:avLst/>
+          </a:prstGeom>
+          <a:noFill/>
+        </p:spPr>
+        <p:txBody>
+          <a:bodyPr wrap="square" lIns="0" rIns="0" tIns="0" bIns="0">
+            <a:spAutoFit/>
+          </a:bodyPr>
+          <a:lstStyle/>
+          <a:p>
+            <a:pPr algn="l"/>
+            <a:r>
+              <a:rPr sz="950" b="1" i="0">
+                <a:solidFill>
+                  <a:srgbClr val="F47321"/>
+                </a:solidFill>
+                <a:latin typeface="Arial"/>
+              </a:rPr>
+              <a:t>QB</a:t>
+            </a:r>
+          </a:p>
+        </p:txBody>
+      </p:sp>
+      <p:sp>
+        <p:nvSpPr>
+          <p:cNvPr id="9" name="TextBox 8"/>
+          <p:cNvSpPr txBox="1"/>
+          <p:nvPr/>
+        </p:nvSpPr>
+        <p:spPr>
+          <a:xfrm>
+            <a:off x="4572000" y="2139696"/>
+            <a:ext cx="3246120" cy="548640"/>
+          </a:xfrm>
+          <a:prstGeom prst="rect">
+            <a:avLst/>
+          </a:prstGeom>
+          <a:noFill/>
+        </p:spPr>
+        <p:txBody>
+          <a:bodyPr wrap="square" lIns="0" rIns="0" tIns="0" bIns="0">
+            <a:spAutoFit/>
+          </a:bodyPr>
+          <a:lstStyle/>
+          <a:p>
+            <a:pPr algn="l"/>
+            <a:r>
+              <a:rPr sz="1050" b="0" i="0">
+                <a:solidFill>
+                  <a:srgbClr val="16273D"/>
+                </a:solidFill>
+                <a:latin typeface="Arial"/>
+              </a:rPr>
+              <a:t>NEW and unsettled — open room after the Knight exit</a:t>
+            </a:r>
+          </a:p>
+        </p:txBody>
+      </p:sp>
+      <p:sp>
+        <p:nvSpPr>
+          <p:cNvPr id="10" name="TextBox 9"/>
+          <p:cNvSpPr txBox="1"/>
+          <p:nvPr/>
+        </p:nvSpPr>
+        <p:spPr>
+          <a:xfrm>
+            <a:off x="8092440" y="1901952"/>
+            <a:ext cx="3246120" cy="228600"/>
+          </a:xfrm>
+          <a:prstGeom prst="rect">
+            <a:avLst/>
+          </a:prstGeom>
+          <a:noFill/>
+        </p:spPr>
+        <p:txBody>
+          <a:bodyPr wrap="square" lIns="0" rIns="0" tIns="0" bIns="0">
+            <a:spAutoFit/>
+          </a:bodyPr>
+          <a:lstStyle/>
+          <a:p>
+            <a:pPr algn="l"/>
+            <a:r>
+              <a:rPr sz="950" b="1" i="0">
+                <a:solidFill>
+                  <a:srgbClr val="F47321"/>
+                </a:solidFill>
+                <a:latin typeface="Arial"/>
+              </a:rPr>
+              <a:t>ROSTER</a:t>
+            </a:r>
+          </a:p>
+        </p:txBody>
+      </p:sp>
+      <p:sp>
+        <p:nvSpPr>
+          <p:cNvPr id="11" name="TextBox 10"/>
+          <p:cNvSpPr txBox="1"/>
+          <p:nvPr/>
+        </p:nvSpPr>
+        <p:spPr>
+          <a:xfrm>
+            <a:off x="8092440" y="2139696"/>
+            <a:ext cx="3246120" cy="548640"/>
+          </a:xfrm>
+          <a:prstGeom prst="rect">
+            <a:avLst/>
+          </a:prstGeom>
+          <a:noFill/>
+        </p:spPr>
+        <p:txBody>
+          <a:bodyPr wrap="square" lIns="0" rIns="0" tIns="0" bIns="0">
+            <a:spAutoFit/>
+          </a:bodyPr>
+          <a:lstStyle/>
+          <a:p>
+            <a:pPr algn="l"/>
+            <a:r>
+              <a:rPr sz="1050" b="0" i="0">
+                <a:solidFill>
+                  <a:srgbClr val="16273D"/>
+                </a:solidFill>
+                <a:latin typeface="Arial"/>
+              </a:rPr>
+              <a:t>14% back — most retooled roster on the card · 39 portal adds</a:t>
+            </a:r>
+          </a:p>
+        </p:txBody>
+      </p:sp>
+      <p:sp>
+        <p:nvSpPr>
+          <p:cNvPr id="12" name="Oval 11"/>
+          <p:cNvSpPr/>
+          <p:nvPr/>
+        </p:nvSpPr>
+        <p:spPr>
+          <a:xfrm>
+            <a:off x="914400" y="3218688"/>
+            <a:ext cx="137160" cy="137160"/>
           </a:xfrm>
           <a:prstGeom prst="ellipse">
             <a:avLst/>
@@ -14935,29 +16967,29 @@
       </p:sp>
       <p:sp>
         <p:nvSpPr>
-          <p:cNvPr id="6" name="TextBox 5"/>
-          <p:cNvSpPr txBox="1"/>
-          <p:nvPr/>
-        </p:nvSpPr>
-        <p:spPr>
-          <a:xfrm>
-            <a:off x="1325880" y="2148840"/>
-            <a:ext cx="9601200" cy="777240"/>
-          </a:xfrm>
-          <a:prstGeom prst="rect">
-            <a:avLst/>
-          </a:prstGeom>
-          <a:noFill/>
-        </p:spPr>
-        <p:txBody>
-          <a:bodyPr wrap="square" lIns="0" rIns="0" tIns="0" bIns="0">
-            <a:spAutoFit/>
-          </a:bodyPr>
-          <a:lstStyle/>
-          <a:p>
-            <a:pPr algn="l"/>
-            <a:r>
-              <a:rPr sz="1700" b="0" i="0">
+          <p:cNvPr id="13" name="TextBox 12"/>
+          <p:cNvSpPr txBox="1"/>
+          <p:nvPr/>
+        </p:nvSpPr>
+        <p:spPr>
+          <a:xfrm>
+            <a:off x="1325880" y="3108960"/>
+            <a:ext cx="9601200" cy="731520"/>
+          </a:xfrm>
+          <a:prstGeom prst="rect">
+            <a:avLst/>
+          </a:prstGeom>
+          <a:noFill/>
+        </p:spPr>
+        <p:txBody>
+          <a:bodyPr wrap="square" lIns="0" rIns="0" tIns="0" bIns="0">
+            <a:spAutoFit/>
+          </a:bodyPr>
+          <a:lstStyle/>
+          <a:p>
+            <a:pPr algn="l"/>
+            <a:r>
+              <a:rPr sz="1550" b="0" i="0">
                 <a:solidFill>
                   <a:srgbClr val="16273D"/>
                 </a:solidFill>
@@ -14970,14 +17002,14 @@
       </p:sp>
       <p:sp>
         <p:nvSpPr>
-          <p:cNvPr id="7" name="Oval 6"/>
+          <p:cNvPr id="14" name="Oval 13"/>
           <p:cNvSpPr/>
           <p:nvPr/>
         </p:nvSpPr>
         <p:spPr>
           <a:xfrm>
-            <a:off x="914400" y="3236976"/>
-            <a:ext cx="146304" cy="146304"/>
+            <a:off x="914400" y="4059936"/>
+            <a:ext cx="137160" cy="137160"/>
           </a:xfrm>
           <a:prstGeom prst="ellipse">
             <a:avLst/>
@@ -15014,29 +17046,29 @@
       </p:sp>
       <p:sp>
         <p:nvSpPr>
-          <p:cNvPr id="8" name="TextBox 7"/>
-          <p:cNvSpPr txBox="1"/>
-          <p:nvPr/>
-        </p:nvSpPr>
-        <p:spPr>
-          <a:xfrm>
-            <a:off x="1325880" y="3108960"/>
-            <a:ext cx="9601200" cy="777240"/>
-          </a:xfrm>
-          <a:prstGeom prst="rect">
-            <a:avLst/>
-          </a:prstGeom>
-          <a:noFill/>
-        </p:spPr>
-        <p:txBody>
-          <a:bodyPr wrap="square" lIns="0" rIns="0" tIns="0" bIns="0">
-            <a:spAutoFit/>
-          </a:bodyPr>
-          <a:lstStyle/>
-          <a:p>
-            <a:pPr algn="l"/>
-            <a:r>
-              <a:rPr sz="1700" b="0" i="0">
+          <p:cNvPr id="15" name="TextBox 14"/>
+          <p:cNvSpPr txBox="1"/>
+          <p:nvPr/>
+        </p:nvSpPr>
+        <p:spPr>
+          <a:xfrm>
+            <a:off x="1325880" y="3950208"/>
+            <a:ext cx="9601200" cy="731520"/>
+          </a:xfrm>
+          <a:prstGeom prst="rect">
+            <a:avLst/>
+          </a:prstGeom>
+          <a:noFill/>
+        </p:spPr>
+        <p:txBody>
+          <a:bodyPr wrap="square" lIns="0" rIns="0" tIns="0" bIns="0">
+            <a:spAutoFit/>
+          </a:bodyPr>
+          <a:lstStyle/>
+          <a:p>
+            <a:pPr algn="l"/>
+            <a:r>
+              <a:rPr sz="1550" b="0" i="0">
                 <a:solidFill>
                   <a:srgbClr val="16273D"/>
                 </a:solidFill>
@@ -15049,14 +17081,14 @@
       </p:sp>
       <p:sp>
         <p:nvSpPr>
-          <p:cNvPr id="9" name="Oval 8"/>
+          <p:cNvPr id="16" name="Oval 15"/>
           <p:cNvSpPr/>
           <p:nvPr/>
         </p:nvSpPr>
         <p:spPr>
           <a:xfrm>
-            <a:off x="914400" y="4197096"/>
-            <a:ext cx="146304" cy="146304"/>
+            <a:off x="914400" y="4901184"/>
+            <a:ext cx="137160" cy="137160"/>
           </a:xfrm>
           <a:prstGeom prst="ellipse">
             <a:avLst/>
@@ -15093,29 +17125,29 @@
       </p:sp>
       <p:sp>
         <p:nvSpPr>
-          <p:cNvPr id="10" name="TextBox 9"/>
-          <p:cNvSpPr txBox="1"/>
-          <p:nvPr/>
-        </p:nvSpPr>
-        <p:spPr>
-          <a:xfrm>
-            <a:off x="1325880" y="4069080"/>
-            <a:ext cx="9601200" cy="777240"/>
-          </a:xfrm>
-          <a:prstGeom prst="rect">
-            <a:avLst/>
-          </a:prstGeom>
-          <a:noFill/>
-        </p:spPr>
-        <p:txBody>
-          <a:bodyPr wrap="square" lIns="0" rIns="0" tIns="0" bIns="0">
-            <a:spAutoFit/>
-          </a:bodyPr>
-          <a:lstStyle/>
-          <a:p>
-            <a:pPr algn="l"/>
-            <a:r>
-              <a:rPr sz="1700" b="0" i="0">
+          <p:cNvPr id="17" name="TextBox 16"/>
+          <p:cNvSpPr txBox="1"/>
+          <p:nvPr/>
+        </p:nvSpPr>
+        <p:spPr>
+          <a:xfrm>
+            <a:off x="1325880" y="4791456"/>
+            <a:ext cx="9601200" cy="731520"/>
+          </a:xfrm>
+          <a:prstGeom prst="rect">
+            <a:avLst/>
+          </a:prstGeom>
+          <a:noFill/>
+        </p:spPr>
+        <p:txBody>
+          <a:bodyPr wrap="square" lIns="0" rIns="0" tIns="0" bIns="0">
+            <a:spAutoFit/>
+          </a:bodyPr>
+          <a:lstStyle/>
+          <a:p>
+            <a:pPr algn="l"/>
+            <a:r>
+              <a:rPr sz="1550" b="0" i="0">
                 <a:solidFill>
                   <a:srgbClr val="16273D"/>
                 </a:solidFill>
@@ -15128,14 +17160,14 @@
       </p:sp>
       <p:sp>
         <p:nvSpPr>
-          <p:cNvPr id="11" name="Oval 10"/>
+          <p:cNvPr id="18" name="Oval 17"/>
           <p:cNvSpPr/>
           <p:nvPr/>
         </p:nvSpPr>
         <p:spPr>
           <a:xfrm>
-            <a:off x="914400" y="5157216"/>
-            <a:ext cx="146304" cy="146304"/>
+            <a:off x="914400" y="5742432"/>
+            <a:ext cx="137160" cy="137160"/>
           </a:xfrm>
           <a:prstGeom prst="ellipse">
             <a:avLst/>
@@ -15172,29 +17204,29 @@
       </p:sp>
       <p:sp>
         <p:nvSpPr>
-          <p:cNvPr id="12" name="TextBox 11"/>
-          <p:cNvSpPr txBox="1"/>
-          <p:nvPr/>
-        </p:nvSpPr>
-        <p:spPr>
-          <a:xfrm>
-            <a:off x="1325880" y="5029200"/>
-            <a:ext cx="9601200" cy="777240"/>
-          </a:xfrm>
-          <a:prstGeom prst="rect">
-            <a:avLst/>
-          </a:prstGeom>
-          <a:noFill/>
-        </p:spPr>
-        <p:txBody>
-          <a:bodyPr wrap="square" lIns="0" rIns="0" tIns="0" bIns="0">
-            <a:spAutoFit/>
-          </a:bodyPr>
-          <a:lstStyle/>
-          <a:p>
-            <a:pPr algn="l"/>
-            <a:r>
-              <a:rPr sz="1700" b="0" i="0">
+          <p:cNvPr id="19" name="TextBox 18"/>
+          <p:cNvSpPr txBox="1"/>
+          <p:nvPr/>
+        </p:nvSpPr>
+        <p:spPr>
+          <a:xfrm>
+            <a:off x="1325880" y="5632704"/>
+            <a:ext cx="9601200" cy="731520"/>
+          </a:xfrm>
+          <a:prstGeom prst="rect">
+            <a:avLst/>
+          </a:prstGeom>
+          <a:noFill/>
+        </p:spPr>
+        <p:txBody>
+          <a:bodyPr wrap="square" lIns="0" rIns="0" tIns="0" bIns="0">
+            <a:spAutoFit/>
+          </a:bodyPr>
+          <a:lstStyle/>
+          <a:p>
+            <a:pPr algn="l"/>
+            <a:r>
+              <a:rPr sz="1550" b="0" i="0">
                 <a:solidFill>
                   <a:srgbClr val="16273D"/>
                 </a:solidFill>
@@ -15207,7 +17239,7 @@
       </p:sp>
       <p:sp>
         <p:nvSpPr>
-          <p:cNvPr id="13" name="TextBox 12"/>
+          <p:cNvPr id="20" name="TextBox 19"/>
           <p:cNvSpPr txBox="1"/>
           <p:nvPr/>
         </p:nvSpPr>
@@ -15449,7 +17481,7 @@
                 </a:solidFill>
                 <a:latin typeface="Arial"/>
               </a:rPr>
-              <a:t>WHAT DECIDES IT</a:t>
+              <a:t>WHY IT MATTERS</a:t>
             </a:r>
           </a:p>
         </p:txBody>
@@ -15528,7 +17560,7 @@
                 </a:solidFill>
                 <a:latin typeface="Arial"/>
               </a:rPr>
-              <a:t>Leavitt in Kiffin's tempo-RPO system vs Tom Allen's 4-2-5 — the one Clemson unit that kept its standard</a:t>
+              <a:t>Kiffin's first game at LSU — a CFP-or-bust construction unveiled at night in Death Valley</a:t>
             </a:r>
           </a:p>
         </p:txBody>
@@ -15607,7 +17639,7 @@
                 </a:solidFill>
                 <a:latin typeface="Arial"/>
               </a:rPr>
-              <a:t>Vizzina and the Chad Morris throwback offense vs Baker's pressure — SP+ projects this D No. 2 nationally</a:t>
+              <a:t>Dabo answering the worst season in 15 years with a first-year QB and a throwback OC</a:t>
             </a:r>
           </a:p>
         </p:txBody>
@@ -15686,7 +17718,7 @@
                 </a:solidFill>
                 <a:latin typeface="Arial"/>
               </a:rPr>
-              <a:t>LSU's portal-built offensive line on a short install runway, at night, in Death Valley</a:t>
+              <a:t>LSU returns 21% of production with 44 portal adds — the most aggressive retool on the card; Clemson added 11</a:t>
             </a:r>
           </a:p>
         </p:txBody>
@@ -15765,7 +17797,7 @@
                 </a:solidFill>
                 <a:latin typeface="Arial"/>
               </a:rPr>
-              <a:t>Both offenses are new identities — the first sideline that looks ordinary wins</a:t>
+              <a:t>Week 1 loser burns a playoff mulligan immediately — both fanbases know it</a:t>
             </a:r>
           </a:p>
         </p:txBody>
@@ -16558,14 +18590,268 @@
       </p:sp>
       <p:sp>
         <p:nvSpPr>
-          <p:cNvPr id="5" name="Oval 4"/>
+          <p:cNvPr id="5" name="Rounded Rectangle 4"/>
           <p:cNvSpPr/>
           <p:nvPr/>
         </p:nvSpPr>
         <p:spPr>
           <a:xfrm>
-            <a:off x="914400" y="2276856"/>
-            <a:ext cx="146304" cy="146304"/>
+            <a:off x="822960" y="1783080"/>
+            <a:ext cx="10515600" cy="960120"/>
+          </a:xfrm>
+          <a:prstGeom prst="roundRect">
+            <a:avLst/>
+          </a:prstGeom>
+          <a:solidFill>
+            <a:srgbClr val="EAF0F8"/>
+          </a:solidFill>
+          <a:ln>
+            <a:noFill/>
+          </a:ln>
+          <a:effectLst/>
+        </p:spPr>
+        <p:style>
+          <a:lnRef idx="1">
+            <a:schemeClr val="accent1"/>
+          </a:lnRef>
+          <a:fillRef idx="3">
+            <a:schemeClr val="accent1"/>
+          </a:fillRef>
+          <a:effectRef idx="2">
+            <a:schemeClr val="accent1"/>
+          </a:effectRef>
+          <a:fontRef idx="minor">
+            <a:schemeClr val="lt1"/>
+          </a:fontRef>
+        </p:style>
+        <p:txBody>
+          <a:bodyPr rtlCol="0" anchor="ctr"/>
+          <a:lstStyle/>
+          <a:p>
+            <a:pPr algn="ctr"/>
+          </a:p>
+        </p:txBody>
+      </p:sp>
+      <p:sp>
+        <p:nvSpPr>
+          <p:cNvPr id="6" name="TextBox 5"/>
+          <p:cNvSpPr txBox="1"/>
+          <p:nvPr/>
+        </p:nvSpPr>
+        <p:spPr>
+          <a:xfrm>
+            <a:off x="1051560" y="1901952"/>
+            <a:ext cx="3246120" cy="228600"/>
+          </a:xfrm>
+          <a:prstGeom prst="rect">
+            <a:avLst/>
+          </a:prstGeom>
+          <a:noFill/>
+        </p:spPr>
+        <p:txBody>
+          <a:bodyPr wrap="square" lIns="0" rIns="0" tIns="0" bIns="0">
+            <a:spAutoFit/>
+          </a:bodyPr>
+          <a:lstStyle/>
+          <a:p>
+            <a:pPr algn="l"/>
+            <a:r>
+              <a:rPr sz="950" b="1" i="0">
+                <a:solidFill>
+                  <a:srgbClr val="F47321"/>
+                </a:solidFill>
+                <a:latin typeface="Arial"/>
+              </a:rPr>
+              <a:t>COACH</a:t>
+            </a:r>
+          </a:p>
+        </p:txBody>
+      </p:sp>
+      <p:sp>
+        <p:nvSpPr>
+          <p:cNvPr id="7" name="TextBox 6"/>
+          <p:cNvSpPr txBox="1"/>
+          <p:nvPr/>
+        </p:nvSpPr>
+        <p:spPr>
+          <a:xfrm>
+            <a:off x="1051560" y="2139696"/>
+            <a:ext cx="3246120" cy="548640"/>
+          </a:xfrm>
+          <a:prstGeom prst="rect">
+            <a:avLst/>
+          </a:prstGeom>
+          <a:noFill/>
+        </p:spPr>
+        <p:txBody>
+          <a:bodyPr wrap="square" lIns="0" rIns="0" tIns="0" bIns="0">
+            <a:spAutoFit/>
+          </a:bodyPr>
+          <a:lstStyle/>
+          <a:p>
+            <a:pPr algn="l"/>
+            <a:r>
+              <a:rPr sz="1050" b="0" i="0">
+                <a:solidFill>
+                  <a:srgbClr val="16273D"/>
+                </a:solidFill>
+                <a:latin typeface="Arial"/>
+              </a:rPr>
+              <a:t>Dabo, year 18 — Chad Morris returns as OC</a:t>
+            </a:r>
+          </a:p>
+        </p:txBody>
+      </p:sp>
+      <p:sp>
+        <p:nvSpPr>
+          <p:cNvPr id="8" name="TextBox 7"/>
+          <p:cNvSpPr txBox="1"/>
+          <p:nvPr/>
+        </p:nvSpPr>
+        <p:spPr>
+          <a:xfrm>
+            <a:off x="4572000" y="1901952"/>
+            <a:ext cx="3246120" cy="228600"/>
+          </a:xfrm>
+          <a:prstGeom prst="rect">
+            <a:avLst/>
+          </a:prstGeom>
+          <a:noFill/>
+        </p:spPr>
+        <p:txBody>
+          <a:bodyPr wrap="square" lIns="0" rIns="0" tIns="0" bIns="0">
+            <a:spAutoFit/>
+          </a:bodyPr>
+          <a:lstStyle/>
+          <a:p>
+            <a:pPr algn="l"/>
+            <a:r>
+              <a:rPr sz="950" b="1" i="0">
+                <a:solidFill>
+                  <a:srgbClr val="F47321"/>
+                </a:solidFill>
+                <a:latin typeface="Arial"/>
+              </a:rPr>
+              <a:t>QB</a:t>
+            </a:r>
+          </a:p>
+        </p:txBody>
+      </p:sp>
+      <p:sp>
+        <p:nvSpPr>
+          <p:cNvPr id="9" name="TextBox 8"/>
+          <p:cNvSpPr txBox="1"/>
+          <p:nvPr/>
+        </p:nvSpPr>
+        <p:spPr>
+          <a:xfrm>
+            <a:off x="4572000" y="2139696"/>
+            <a:ext cx="3246120" cy="548640"/>
+          </a:xfrm>
+          <a:prstGeom prst="rect">
+            <a:avLst/>
+          </a:prstGeom>
+          <a:noFill/>
+        </p:spPr>
+        <p:txBody>
+          <a:bodyPr wrap="square" lIns="0" rIns="0" tIns="0" bIns="0">
+            <a:spAutoFit/>
+          </a:bodyPr>
+          <a:lstStyle/>
+          <a:p>
+            <a:pPr algn="l"/>
+            <a:r>
+              <a:rPr sz="1050" b="0" i="0">
+                <a:solidFill>
+                  <a:srgbClr val="16273D"/>
+                </a:solidFill>
+                <a:latin typeface="Arial"/>
+              </a:rPr>
+              <a:t>NEW — Vizzina, first-year starter post-Klubnik</a:t>
+            </a:r>
+          </a:p>
+        </p:txBody>
+      </p:sp>
+      <p:sp>
+        <p:nvSpPr>
+          <p:cNvPr id="10" name="TextBox 9"/>
+          <p:cNvSpPr txBox="1"/>
+          <p:nvPr/>
+        </p:nvSpPr>
+        <p:spPr>
+          <a:xfrm>
+            <a:off x="8092440" y="1901952"/>
+            <a:ext cx="3246120" cy="228600"/>
+          </a:xfrm>
+          <a:prstGeom prst="rect">
+            <a:avLst/>
+          </a:prstGeom>
+          <a:noFill/>
+        </p:spPr>
+        <p:txBody>
+          <a:bodyPr wrap="square" lIns="0" rIns="0" tIns="0" bIns="0">
+            <a:spAutoFit/>
+          </a:bodyPr>
+          <a:lstStyle/>
+          <a:p>
+            <a:pPr algn="l"/>
+            <a:r>
+              <a:rPr sz="950" b="1" i="0">
+                <a:solidFill>
+                  <a:srgbClr val="F47321"/>
+                </a:solidFill>
+                <a:latin typeface="Arial"/>
+              </a:rPr>
+              <a:t>ROSTER</a:t>
+            </a:r>
+          </a:p>
+        </p:txBody>
+      </p:sp>
+      <p:sp>
+        <p:nvSpPr>
+          <p:cNvPr id="11" name="TextBox 10"/>
+          <p:cNvSpPr txBox="1"/>
+          <p:nvPr/>
+        </p:nvSpPr>
+        <p:spPr>
+          <a:xfrm>
+            <a:off x="8092440" y="2139696"/>
+            <a:ext cx="3246120" cy="548640"/>
+          </a:xfrm>
+          <a:prstGeom prst="rect">
+            <a:avLst/>
+          </a:prstGeom>
+          <a:noFill/>
+        </p:spPr>
+        <p:txBody>
+          <a:bodyPr wrap="square" lIns="0" rIns="0" tIns="0" bIns="0">
+            <a:spAutoFit/>
+          </a:bodyPr>
+          <a:lstStyle/>
+          <a:p>
+            <a:pPr algn="l"/>
+            <a:r>
+              <a:rPr sz="1050" b="0" i="0">
+                <a:solidFill>
+                  <a:srgbClr val="16273D"/>
+                </a:solidFill>
+                <a:latin typeface="Arial"/>
+              </a:rPr>
+              <a:t>41% back · just 11 portal adds — still portal-light by choice</a:t>
+            </a:r>
+          </a:p>
+        </p:txBody>
+      </p:sp>
+      <p:sp>
+        <p:nvSpPr>
+          <p:cNvPr id="12" name="Oval 11"/>
+          <p:cNvSpPr/>
+          <p:nvPr/>
+        </p:nvSpPr>
+        <p:spPr>
+          <a:xfrm>
+            <a:off x="914400" y="3218688"/>
+            <a:ext cx="137160" cy="137160"/>
           </a:xfrm>
           <a:prstGeom prst="ellipse">
             <a:avLst/>
@@ -16602,29 +18888,29 @@
       </p:sp>
       <p:sp>
         <p:nvSpPr>
-          <p:cNvPr id="6" name="TextBox 5"/>
-          <p:cNvSpPr txBox="1"/>
-          <p:nvPr/>
-        </p:nvSpPr>
-        <p:spPr>
-          <a:xfrm>
-            <a:off x="1325880" y="2148840"/>
-            <a:ext cx="9601200" cy="777240"/>
-          </a:xfrm>
-          <a:prstGeom prst="rect">
-            <a:avLst/>
-          </a:prstGeom>
-          <a:noFill/>
-        </p:spPr>
-        <p:txBody>
-          <a:bodyPr wrap="square" lIns="0" rIns="0" tIns="0" bIns="0">
-            <a:spAutoFit/>
-          </a:bodyPr>
-          <a:lstStyle/>
-          <a:p>
-            <a:pPr algn="l"/>
-            <a:r>
-              <a:rPr sz="1700" b="0" i="0">
+          <p:cNvPr id="13" name="TextBox 12"/>
+          <p:cNvSpPr txBox="1"/>
+          <p:nvPr/>
+        </p:nvSpPr>
+        <p:spPr>
+          <a:xfrm>
+            <a:off x="1325880" y="3108960"/>
+            <a:ext cx="9601200" cy="731520"/>
+          </a:xfrm>
+          <a:prstGeom prst="rect">
+            <a:avLst/>
+          </a:prstGeom>
+          <a:noFill/>
+        </p:spPr>
+        <p:txBody>
+          <a:bodyPr wrap="square" lIns="0" rIns="0" tIns="0" bIns="0">
+            <a:spAutoFit/>
+          </a:bodyPr>
+          <a:lstStyle/>
+          <a:p>
+            <a:pPr algn="l"/>
+            <a:r>
+              <a:rPr sz="1550" b="0" i="0">
                 <a:solidFill>
                   <a:srgbClr val="16273D"/>
                 </a:solidFill>
@@ -16637,14 +18923,14 @@
       </p:sp>
       <p:sp>
         <p:nvSpPr>
-          <p:cNvPr id="7" name="Oval 6"/>
+          <p:cNvPr id="14" name="Oval 13"/>
           <p:cNvSpPr/>
           <p:nvPr/>
         </p:nvSpPr>
         <p:spPr>
           <a:xfrm>
-            <a:off x="914400" y="3236976"/>
-            <a:ext cx="146304" cy="146304"/>
+            <a:off x="914400" y="4059936"/>
+            <a:ext cx="137160" cy="137160"/>
           </a:xfrm>
           <a:prstGeom prst="ellipse">
             <a:avLst/>
@@ -16681,29 +18967,29 @@
       </p:sp>
       <p:sp>
         <p:nvSpPr>
-          <p:cNvPr id="8" name="TextBox 7"/>
-          <p:cNvSpPr txBox="1"/>
-          <p:nvPr/>
-        </p:nvSpPr>
-        <p:spPr>
-          <a:xfrm>
-            <a:off x="1325880" y="3108960"/>
-            <a:ext cx="9601200" cy="777240"/>
-          </a:xfrm>
-          <a:prstGeom prst="rect">
-            <a:avLst/>
-          </a:prstGeom>
-          <a:noFill/>
-        </p:spPr>
-        <p:txBody>
-          <a:bodyPr wrap="square" lIns="0" rIns="0" tIns="0" bIns="0">
-            <a:spAutoFit/>
-          </a:bodyPr>
-          <a:lstStyle/>
-          <a:p>
-            <a:pPr algn="l"/>
-            <a:r>
-              <a:rPr sz="1700" b="0" i="0">
+          <p:cNvPr id="15" name="TextBox 14"/>
+          <p:cNvSpPr txBox="1"/>
+          <p:nvPr/>
+        </p:nvSpPr>
+        <p:spPr>
+          <a:xfrm>
+            <a:off x="1325880" y="3950208"/>
+            <a:ext cx="9601200" cy="731520"/>
+          </a:xfrm>
+          <a:prstGeom prst="rect">
+            <a:avLst/>
+          </a:prstGeom>
+          <a:noFill/>
+        </p:spPr>
+        <p:txBody>
+          <a:bodyPr wrap="square" lIns="0" rIns="0" tIns="0" bIns="0">
+            <a:spAutoFit/>
+          </a:bodyPr>
+          <a:lstStyle/>
+          <a:p>
+            <a:pPr algn="l"/>
+            <a:r>
+              <a:rPr sz="1550" b="0" i="0">
                 <a:solidFill>
                   <a:srgbClr val="16273D"/>
                 </a:solidFill>
@@ -16716,14 +19002,14 @@
       </p:sp>
       <p:sp>
         <p:nvSpPr>
-          <p:cNvPr id="9" name="Oval 8"/>
+          <p:cNvPr id="16" name="Oval 15"/>
           <p:cNvSpPr/>
           <p:nvPr/>
         </p:nvSpPr>
         <p:spPr>
           <a:xfrm>
-            <a:off x="914400" y="4197096"/>
-            <a:ext cx="146304" cy="146304"/>
+            <a:off x="914400" y="4901184"/>
+            <a:ext cx="137160" cy="137160"/>
           </a:xfrm>
           <a:prstGeom prst="ellipse">
             <a:avLst/>
@@ -16760,29 +19046,29 @@
       </p:sp>
       <p:sp>
         <p:nvSpPr>
-          <p:cNvPr id="10" name="TextBox 9"/>
-          <p:cNvSpPr txBox="1"/>
-          <p:nvPr/>
-        </p:nvSpPr>
-        <p:spPr>
-          <a:xfrm>
-            <a:off x="1325880" y="4069080"/>
-            <a:ext cx="9601200" cy="777240"/>
-          </a:xfrm>
-          <a:prstGeom prst="rect">
-            <a:avLst/>
-          </a:prstGeom>
-          <a:noFill/>
-        </p:spPr>
-        <p:txBody>
-          <a:bodyPr wrap="square" lIns="0" rIns="0" tIns="0" bIns="0">
-            <a:spAutoFit/>
-          </a:bodyPr>
-          <a:lstStyle/>
-          <a:p>
-            <a:pPr algn="l"/>
-            <a:r>
-              <a:rPr sz="1700" b="0" i="0">
+          <p:cNvPr id="17" name="TextBox 16"/>
+          <p:cNvSpPr txBox="1"/>
+          <p:nvPr/>
+        </p:nvSpPr>
+        <p:spPr>
+          <a:xfrm>
+            <a:off x="1325880" y="4791456"/>
+            <a:ext cx="9601200" cy="731520"/>
+          </a:xfrm>
+          <a:prstGeom prst="rect">
+            <a:avLst/>
+          </a:prstGeom>
+          <a:noFill/>
+        </p:spPr>
+        <p:txBody>
+          <a:bodyPr wrap="square" lIns="0" rIns="0" tIns="0" bIns="0">
+            <a:spAutoFit/>
+          </a:bodyPr>
+          <a:lstStyle/>
+          <a:p>
+            <a:pPr algn="l"/>
+            <a:r>
+              <a:rPr sz="1550" b="0" i="0">
                 <a:solidFill>
                   <a:srgbClr val="16273D"/>
                 </a:solidFill>
@@ -16795,14 +19081,14 @@
       </p:sp>
       <p:sp>
         <p:nvSpPr>
-          <p:cNvPr id="11" name="Oval 10"/>
+          <p:cNvPr id="18" name="Oval 17"/>
           <p:cNvSpPr/>
           <p:nvPr/>
         </p:nvSpPr>
         <p:spPr>
           <a:xfrm>
-            <a:off x="914400" y="5157216"/>
-            <a:ext cx="146304" cy="146304"/>
+            <a:off x="914400" y="5742432"/>
+            <a:ext cx="137160" cy="137160"/>
           </a:xfrm>
           <a:prstGeom prst="ellipse">
             <a:avLst/>
@@ -16839,29 +19125,29 @@
       </p:sp>
       <p:sp>
         <p:nvSpPr>
-          <p:cNvPr id="12" name="TextBox 11"/>
-          <p:cNvSpPr txBox="1"/>
-          <p:nvPr/>
-        </p:nvSpPr>
-        <p:spPr>
-          <a:xfrm>
-            <a:off x="1325880" y="5029200"/>
-            <a:ext cx="9601200" cy="777240"/>
-          </a:xfrm>
-          <a:prstGeom prst="rect">
-            <a:avLst/>
-          </a:prstGeom>
-          <a:noFill/>
-        </p:spPr>
-        <p:txBody>
-          <a:bodyPr wrap="square" lIns="0" rIns="0" tIns="0" bIns="0">
-            <a:spAutoFit/>
-          </a:bodyPr>
-          <a:lstStyle/>
-          <a:p>
-            <a:pPr algn="l"/>
-            <a:r>
-              <a:rPr sz="1700" b="0" i="0">
+          <p:cNvPr id="19" name="TextBox 18"/>
+          <p:cNvSpPr txBox="1"/>
+          <p:nvPr/>
+        </p:nvSpPr>
+        <p:spPr>
+          <a:xfrm>
+            <a:off x="1325880" y="5632704"/>
+            <a:ext cx="9601200" cy="731520"/>
+          </a:xfrm>
+          <a:prstGeom prst="rect">
+            <a:avLst/>
+          </a:prstGeom>
+          <a:noFill/>
+        </p:spPr>
+        <p:txBody>
+          <a:bodyPr wrap="square" lIns="0" rIns="0" tIns="0" bIns="0">
+            <a:spAutoFit/>
+          </a:bodyPr>
+          <a:lstStyle/>
+          <a:p>
+            <a:pPr algn="l"/>
+            <a:r>
+              <a:rPr sz="1550" b="0" i="0">
                 <a:solidFill>
                   <a:srgbClr val="16273D"/>
                 </a:solidFill>
@@ -16874,7 +19160,7 @@
       </p:sp>
       <p:sp>
         <p:nvSpPr>
-          <p:cNvPr id="13" name="TextBox 12"/>
+          <p:cNvPr id="20" name="TextBox 19"/>
           <p:cNvSpPr txBox="1"/>
           <p:nvPr/>
         </p:nvSpPr>
@@ -17029,14 +19315,268 @@
       </p:sp>
       <p:sp>
         <p:nvSpPr>
-          <p:cNvPr id="5" name="Oval 4"/>
+          <p:cNvPr id="5" name="Rounded Rectangle 4"/>
           <p:cNvSpPr/>
           <p:nvPr/>
         </p:nvSpPr>
         <p:spPr>
           <a:xfrm>
-            <a:off x="914400" y="2276856"/>
-            <a:ext cx="146304" cy="146304"/>
+            <a:off x="822960" y="1783080"/>
+            <a:ext cx="10515600" cy="960120"/>
+          </a:xfrm>
+          <a:prstGeom prst="roundRect">
+            <a:avLst/>
+          </a:prstGeom>
+          <a:solidFill>
+            <a:srgbClr val="EAF0F8"/>
+          </a:solidFill>
+          <a:ln>
+            <a:noFill/>
+          </a:ln>
+          <a:effectLst/>
+        </p:spPr>
+        <p:style>
+          <a:lnRef idx="1">
+            <a:schemeClr val="accent1"/>
+          </a:lnRef>
+          <a:fillRef idx="3">
+            <a:schemeClr val="accent1"/>
+          </a:fillRef>
+          <a:effectRef idx="2">
+            <a:schemeClr val="accent1"/>
+          </a:effectRef>
+          <a:fontRef idx="minor">
+            <a:schemeClr val="lt1"/>
+          </a:fontRef>
+        </p:style>
+        <p:txBody>
+          <a:bodyPr rtlCol="0" anchor="ctr"/>
+          <a:lstStyle/>
+          <a:p>
+            <a:pPr algn="ctr"/>
+          </a:p>
+        </p:txBody>
+      </p:sp>
+      <p:sp>
+        <p:nvSpPr>
+          <p:cNvPr id="6" name="TextBox 5"/>
+          <p:cNvSpPr txBox="1"/>
+          <p:nvPr/>
+        </p:nvSpPr>
+        <p:spPr>
+          <a:xfrm>
+            <a:off x="1051560" y="1901952"/>
+            <a:ext cx="3246120" cy="228600"/>
+          </a:xfrm>
+          <a:prstGeom prst="rect">
+            <a:avLst/>
+          </a:prstGeom>
+          <a:noFill/>
+        </p:spPr>
+        <p:txBody>
+          <a:bodyPr wrap="square" lIns="0" rIns="0" tIns="0" bIns="0">
+            <a:spAutoFit/>
+          </a:bodyPr>
+          <a:lstStyle/>
+          <a:p>
+            <a:pPr algn="l"/>
+            <a:r>
+              <a:rPr sz="950" b="1" i="0">
+                <a:solidFill>
+                  <a:srgbClr val="F47321"/>
+                </a:solidFill>
+                <a:latin typeface="Arial"/>
+              </a:rPr>
+              <a:t>COACH</a:t>
+            </a:r>
+          </a:p>
+        </p:txBody>
+      </p:sp>
+      <p:sp>
+        <p:nvSpPr>
+          <p:cNvPr id="7" name="TextBox 6"/>
+          <p:cNvSpPr txBox="1"/>
+          <p:nvPr/>
+        </p:nvSpPr>
+        <p:spPr>
+          <a:xfrm>
+            <a:off x="1051560" y="2139696"/>
+            <a:ext cx="3246120" cy="548640"/>
+          </a:xfrm>
+          <a:prstGeom prst="rect">
+            <a:avLst/>
+          </a:prstGeom>
+          <a:noFill/>
+        </p:spPr>
+        <p:txBody>
+          <a:bodyPr wrap="square" lIns="0" rIns="0" tIns="0" bIns="0">
+            <a:spAutoFit/>
+          </a:bodyPr>
+          <a:lstStyle/>
+          <a:p>
+            <a:pPr algn="l"/>
+            <a:r>
+              <a:rPr sz="1050" b="0" i="0">
+                <a:solidFill>
+                  <a:srgbClr val="16273D"/>
+                </a:solidFill>
+                <a:latin typeface="Arial"/>
+              </a:rPr>
+              <a:t>NEW — Lane Kiffin, off Ole Miss's 13-win CFP season</a:t>
+            </a:r>
+          </a:p>
+        </p:txBody>
+      </p:sp>
+      <p:sp>
+        <p:nvSpPr>
+          <p:cNvPr id="8" name="TextBox 7"/>
+          <p:cNvSpPr txBox="1"/>
+          <p:nvPr/>
+        </p:nvSpPr>
+        <p:spPr>
+          <a:xfrm>
+            <a:off x="4572000" y="1901952"/>
+            <a:ext cx="3246120" cy="228600"/>
+          </a:xfrm>
+          <a:prstGeom prst="rect">
+            <a:avLst/>
+          </a:prstGeom>
+          <a:noFill/>
+        </p:spPr>
+        <p:txBody>
+          <a:bodyPr wrap="square" lIns="0" rIns="0" tIns="0" bIns="0">
+            <a:spAutoFit/>
+          </a:bodyPr>
+          <a:lstStyle/>
+          <a:p>
+            <a:pPr algn="l"/>
+            <a:r>
+              <a:rPr sz="950" b="1" i="0">
+                <a:solidFill>
+                  <a:srgbClr val="F47321"/>
+                </a:solidFill>
+                <a:latin typeface="Arial"/>
+              </a:rPr>
+              <a:t>QB</a:t>
+            </a:r>
+          </a:p>
+        </p:txBody>
+      </p:sp>
+      <p:sp>
+        <p:nvSpPr>
+          <p:cNvPr id="9" name="TextBox 8"/>
+          <p:cNvSpPr txBox="1"/>
+          <p:nvPr/>
+        </p:nvSpPr>
+        <p:spPr>
+          <a:xfrm>
+            <a:off x="4572000" y="2139696"/>
+            <a:ext cx="3246120" cy="548640"/>
+          </a:xfrm>
+          <a:prstGeom prst="rect">
+            <a:avLst/>
+          </a:prstGeom>
+          <a:noFill/>
+        </p:spPr>
+        <p:txBody>
+          <a:bodyPr wrap="square" lIns="0" rIns="0" tIns="0" bIns="0">
+            <a:spAutoFit/>
+          </a:bodyPr>
+          <a:lstStyle/>
+          <a:p>
+            <a:pPr algn="l"/>
+            <a:r>
+              <a:rPr sz="1050" b="0" i="0">
+                <a:solidFill>
+                  <a:srgbClr val="16273D"/>
+                </a:solidFill>
+                <a:latin typeface="Arial"/>
+              </a:rPr>
+              <a:t>NEW — Sam Leavitt (Arizona State), the spring's biggest QB move</a:t>
+            </a:r>
+          </a:p>
+        </p:txBody>
+      </p:sp>
+      <p:sp>
+        <p:nvSpPr>
+          <p:cNvPr id="10" name="TextBox 9"/>
+          <p:cNvSpPr txBox="1"/>
+          <p:nvPr/>
+        </p:nvSpPr>
+        <p:spPr>
+          <a:xfrm>
+            <a:off x="8092440" y="1901952"/>
+            <a:ext cx="3246120" cy="228600"/>
+          </a:xfrm>
+          <a:prstGeom prst="rect">
+            <a:avLst/>
+          </a:prstGeom>
+          <a:noFill/>
+        </p:spPr>
+        <p:txBody>
+          <a:bodyPr wrap="square" lIns="0" rIns="0" tIns="0" bIns="0">
+            <a:spAutoFit/>
+          </a:bodyPr>
+          <a:lstStyle/>
+          <a:p>
+            <a:pPr algn="l"/>
+            <a:r>
+              <a:rPr sz="950" b="1" i="0">
+                <a:solidFill>
+                  <a:srgbClr val="F47321"/>
+                </a:solidFill>
+                <a:latin typeface="Arial"/>
+              </a:rPr>
+              <a:t>ROSTER</a:t>
+            </a:r>
+          </a:p>
+        </p:txBody>
+      </p:sp>
+      <p:sp>
+        <p:nvSpPr>
+          <p:cNvPr id="11" name="TextBox 10"/>
+          <p:cNvSpPr txBox="1"/>
+          <p:nvPr/>
+        </p:nvSpPr>
+        <p:spPr>
+          <a:xfrm>
+            <a:off x="8092440" y="2139696"/>
+            <a:ext cx="3246120" cy="548640"/>
+          </a:xfrm>
+          <a:prstGeom prst="rect">
+            <a:avLst/>
+          </a:prstGeom>
+          <a:noFill/>
+        </p:spPr>
+        <p:txBody>
+          <a:bodyPr wrap="square" lIns="0" rIns="0" tIns="0" bIns="0">
+            <a:spAutoFit/>
+          </a:bodyPr>
+          <a:lstStyle/>
+          <a:p>
+            <a:pPr algn="l"/>
+            <a:r>
+              <a:rPr sz="1050" b="0" i="0">
+                <a:solidFill>
+                  <a:srgbClr val="16273D"/>
+                </a:solidFill>
+                <a:latin typeface="Arial"/>
+              </a:rPr>
+              <a:t>21% back · 44 portal adds — the biggest retool here</a:t>
+            </a:r>
+          </a:p>
+        </p:txBody>
+      </p:sp>
+      <p:sp>
+        <p:nvSpPr>
+          <p:cNvPr id="12" name="Oval 11"/>
+          <p:cNvSpPr/>
+          <p:nvPr/>
+        </p:nvSpPr>
+        <p:spPr>
+          <a:xfrm>
+            <a:off x="914400" y="3218688"/>
+            <a:ext cx="137160" cy="137160"/>
           </a:xfrm>
           <a:prstGeom prst="ellipse">
             <a:avLst/>
@@ -17073,29 +19613,29 @@
       </p:sp>
       <p:sp>
         <p:nvSpPr>
-          <p:cNvPr id="6" name="TextBox 5"/>
-          <p:cNvSpPr txBox="1"/>
-          <p:nvPr/>
-        </p:nvSpPr>
-        <p:spPr>
-          <a:xfrm>
-            <a:off x="1325880" y="2148840"/>
-            <a:ext cx="9601200" cy="777240"/>
-          </a:xfrm>
-          <a:prstGeom prst="rect">
-            <a:avLst/>
-          </a:prstGeom>
-          <a:noFill/>
-        </p:spPr>
-        <p:txBody>
-          <a:bodyPr wrap="square" lIns="0" rIns="0" tIns="0" bIns="0">
-            <a:spAutoFit/>
-          </a:bodyPr>
-          <a:lstStyle/>
-          <a:p>
-            <a:pPr algn="l"/>
-            <a:r>
-              <a:rPr sz="1700" b="0" i="0">
+          <p:cNvPr id="13" name="TextBox 12"/>
+          <p:cNvSpPr txBox="1"/>
+          <p:nvPr/>
+        </p:nvSpPr>
+        <p:spPr>
+          <a:xfrm>
+            <a:off x="1325880" y="3108960"/>
+            <a:ext cx="9601200" cy="731520"/>
+          </a:xfrm>
+          <a:prstGeom prst="rect">
+            <a:avLst/>
+          </a:prstGeom>
+          <a:noFill/>
+        </p:spPr>
+        <p:txBody>
+          <a:bodyPr wrap="square" lIns="0" rIns="0" tIns="0" bIns="0">
+            <a:spAutoFit/>
+          </a:bodyPr>
+          <a:lstStyle/>
+          <a:p>
+            <a:pPr algn="l"/>
+            <a:r>
+              <a:rPr sz="1550" b="0" i="0">
                 <a:solidFill>
                   <a:srgbClr val="16273D"/>
                 </a:solidFill>
@@ -17108,14 +19648,14 @@
       </p:sp>
       <p:sp>
         <p:nvSpPr>
-          <p:cNvPr id="7" name="Oval 6"/>
+          <p:cNvPr id="14" name="Oval 13"/>
           <p:cNvSpPr/>
           <p:nvPr/>
         </p:nvSpPr>
         <p:spPr>
           <a:xfrm>
-            <a:off x="914400" y="3236976"/>
-            <a:ext cx="146304" cy="146304"/>
+            <a:off x="914400" y="4059936"/>
+            <a:ext cx="137160" cy="137160"/>
           </a:xfrm>
           <a:prstGeom prst="ellipse">
             <a:avLst/>
@@ -17152,29 +19692,29 @@
       </p:sp>
       <p:sp>
         <p:nvSpPr>
-          <p:cNvPr id="8" name="TextBox 7"/>
-          <p:cNvSpPr txBox="1"/>
-          <p:nvPr/>
-        </p:nvSpPr>
-        <p:spPr>
-          <a:xfrm>
-            <a:off x="1325880" y="3108960"/>
-            <a:ext cx="9601200" cy="777240"/>
-          </a:xfrm>
-          <a:prstGeom prst="rect">
-            <a:avLst/>
-          </a:prstGeom>
-          <a:noFill/>
-        </p:spPr>
-        <p:txBody>
-          <a:bodyPr wrap="square" lIns="0" rIns="0" tIns="0" bIns="0">
-            <a:spAutoFit/>
-          </a:bodyPr>
-          <a:lstStyle/>
-          <a:p>
-            <a:pPr algn="l"/>
-            <a:r>
-              <a:rPr sz="1700" b="0" i="0">
+          <p:cNvPr id="15" name="TextBox 14"/>
+          <p:cNvSpPr txBox="1"/>
+          <p:nvPr/>
+        </p:nvSpPr>
+        <p:spPr>
+          <a:xfrm>
+            <a:off x="1325880" y="3950208"/>
+            <a:ext cx="9601200" cy="731520"/>
+          </a:xfrm>
+          <a:prstGeom prst="rect">
+            <a:avLst/>
+          </a:prstGeom>
+          <a:noFill/>
+        </p:spPr>
+        <p:txBody>
+          <a:bodyPr wrap="square" lIns="0" rIns="0" tIns="0" bIns="0">
+            <a:spAutoFit/>
+          </a:bodyPr>
+          <a:lstStyle/>
+          <a:p>
+            <a:pPr algn="l"/>
+            <a:r>
+              <a:rPr sz="1550" b="0" i="0">
                 <a:solidFill>
                   <a:srgbClr val="16273D"/>
                 </a:solidFill>
@@ -17187,14 +19727,14 @@
       </p:sp>
       <p:sp>
         <p:nvSpPr>
-          <p:cNvPr id="9" name="Oval 8"/>
+          <p:cNvPr id="16" name="Oval 15"/>
           <p:cNvSpPr/>
           <p:nvPr/>
         </p:nvSpPr>
         <p:spPr>
           <a:xfrm>
-            <a:off x="914400" y="4197096"/>
-            <a:ext cx="146304" cy="146304"/>
+            <a:off x="914400" y="4901184"/>
+            <a:ext cx="137160" cy="137160"/>
           </a:xfrm>
           <a:prstGeom prst="ellipse">
             <a:avLst/>
@@ -17231,29 +19771,29 @@
       </p:sp>
       <p:sp>
         <p:nvSpPr>
-          <p:cNvPr id="10" name="TextBox 9"/>
-          <p:cNvSpPr txBox="1"/>
-          <p:nvPr/>
-        </p:nvSpPr>
-        <p:spPr>
-          <a:xfrm>
-            <a:off x="1325880" y="4069080"/>
-            <a:ext cx="9601200" cy="777240"/>
-          </a:xfrm>
-          <a:prstGeom prst="rect">
-            <a:avLst/>
-          </a:prstGeom>
-          <a:noFill/>
-        </p:spPr>
-        <p:txBody>
-          <a:bodyPr wrap="square" lIns="0" rIns="0" tIns="0" bIns="0">
-            <a:spAutoFit/>
-          </a:bodyPr>
-          <a:lstStyle/>
-          <a:p>
-            <a:pPr algn="l"/>
-            <a:r>
-              <a:rPr sz="1700" b="0" i="0">
+          <p:cNvPr id="17" name="TextBox 16"/>
+          <p:cNvSpPr txBox="1"/>
+          <p:nvPr/>
+        </p:nvSpPr>
+        <p:spPr>
+          <a:xfrm>
+            <a:off x="1325880" y="4791456"/>
+            <a:ext cx="9601200" cy="731520"/>
+          </a:xfrm>
+          <a:prstGeom prst="rect">
+            <a:avLst/>
+          </a:prstGeom>
+          <a:noFill/>
+        </p:spPr>
+        <p:txBody>
+          <a:bodyPr wrap="square" lIns="0" rIns="0" tIns="0" bIns="0">
+            <a:spAutoFit/>
+          </a:bodyPr>
+          <a:lstStyle/>
+          <a:p>
+            <a:pPr algn="l"/>
+            <a:r>
+              <a:rPr sz="1550" b="0" i="0">
                 <a:solidFill>
                   <a:srgbClr val="16273D"/>
                 </a:solidFill>
@@ -17266,14 +19806,14 @@
       </p:sp>
       <p:sp>
         <p:nvSpPr>
-          <p:cNvPr id="11" name="Oval 10"/>
+          <p:cNvPr id="18" name="Oval 17"/>
           <p:cNvSpPr/>
           <p:nvPr/>
         </p:nvSpPr>
         <p:spPr>
           <a:xfrm>
-            <a:off x="914400" y="5157216"/>
-            <a:ext cx="146304" cy="146304"/>
+            <a:off x="914400" y="5742432"/>
+            <a:ext cx="137160" cy="137160"/>
           </a:xfrm>
           <a:prstGeom prst="ellipse">
             <a:avLst/>
@@ -17310,29 +19850,29 @@
       </p:sp>
       <p:sp>
         <p:nvSpPr>
-          <p:cNvPr id="12" name="TextBox 11"/>
-          <p:cNvSpPr txBox="1"/>
-          <p:nvPr/>
-        </p:nvSpPr>
-        <p:spPr>
-          <a:xfrm>
-            <a:off x="1325880" y="5029200"/>
-            <a:ext cx="9601200" cy="777240"/>
-          </a:xfrm>
-          <a:prstGeom prst="rect">
-            <a:avLst/>
-          </a:prstGeom>
-          <a:noFill/>
-        </p:spPr>
-        <p:txBody>
-          <a:bodyPr wrap="square" lIns="0" rIns="0" tIns="0" bIns="0">
-            <a:spAutoFit/>
-          </a:bodyPr>
-          <a:lstStyle/>
-          <a:p>
-            <a:pPr algn="l"/>
-            <a:r>
-              <a:rPr sz="1700" b="0" i="0">
+          <p:cNvPr id="19" name="TextBox 18"/>
+          <p:cNvSpPr txBox="1"/>
+          <p:nvPr/>
+        </p:nvSpPr>
+        <p:spPr>
+          <a:xfrm>
+            <a:off x="1325880" y="5632704"/>
+            <a:ext cx="9601200" cy="731520"/>
+          </a:xfrm>
+          <a:prstGeom prst="rect">
+            <a:avLst/>
+          </a:prstGeom>
+          <a:noFill/>
+        </p:spPr>
+        <p:txBody>
+          <a:bodyPr wrap="square" lIns="0" rIns="0" tIns="0" bIns="0">
+            <a:spAutoFit/>
+          </a:bodyPr>
+          <a:lstStyle/>
+          <a:p>
+            <a:pPr algn="l"/>
+            <a:r>
+              <a:rPr sz="1550" b="0" i="0">
                 <a:solidFill>
                   <a:srgbClr val="16273D"/>
                 </a:solidFill>
@@ -17345,7 +19885,7 @@
       </p:sp>
       <p:sp>
         <p:nvSpPr>
-          <p:cNvPr id="13" name="TextBox 12"/>
+          <p:cNvPr id="20" name="TextBox 19"/>
           <p:cNvSpPr txBox="1"/>
           <p:nvPr/>
         </p:nvSpPr>
@@ -17587,7 +20127,7 @@
                 </a:solidFill>
                 <a:latin typeface="Arial"/>
               </a:rPr>
-              <a:t>WHAT DECIDES IT</a:t>
+              <a:t>WHY IT MATTERS</a:t>
             </a:r>
           </a:p>
         </p:txBody>
@@ -17666,7 +20206,7 @@
                 </a:solidFill>
                 <a:latin typeface="Arial"/>
               </a:rPr>
-              <a:t>Chambliss — the nation's best at turning dead plays into first downs — vs a bust-prone Louisville back end</a:t>
+              <a:t>Golding's first game as the head man — keeping a 13-win CFP program's identity after Kiffin left with it</a:t>
             </a:r>
           </a:p>
         </p:txBody>
@@ -17745,7 +20285,7 @@
                 </a:solidFill>
                 <a:latin typeface="Arial"/>
               </a:rPr>
-              <a:t>Brohm's third QB1 in three years: Kienholz is the least-proven starter he's had here</a:t>
+              <a:t>Chambliss is the rare continuity star (50% of production back); Brohm counters with his third new QB1 in three years</a:t>
             </a:r>
           </a:p>
         </p:txBody>
@@ -17824,7 +20364,7 @@
                 </a:solidFill>
                 <a:latin typeface="Arial"/>
               </a:rPr>
-              <a:t>Golding's first game as head coach after Kiffin took the identity engine to Baton Rouge</a:t>
+              <a:t>Sunday night in Nashville — neutral on paper, Ole Miss crowd in practice</a:t>
             </a:r>
           </a:p>
         </p:txBody>
@@ -17903,7 +20443,7 @@
                 </a:solidFill>
                 <a:latin typeface="Arial"/>
               </a:rPr>
-              <a:t>Louisville's edge rush vs a rebuilt Ole Miss pass-pro — the one place the dog can win snaps</a:t>
+              <a:t>Both need this one: Louisville's easiest big-name scalp; Ole Miss defending the CFP-program label</a:t>
             </a:r>
           </a:p>
         </p:txBody>

--- a/decks/2026_Week1_Episode2.pptx
+++ b/decks/2026_Week1_Episode2.pptx
@@ -23,6 +23,7 @@
     <p:sldId id="271" r:id="rId22"/>
     <p:sldId id="272" r:id="rId23"/>
     <p:sldId id="273" r:id="rId24"/>
+    <p:sldId id="274" r:id="rId25"/>
   </p:sldIdLst>
   <p:sldSz cx="12191695" cy="6858000" type="screen4x3"/>
   <p:notesSz cx="6858000" cy="9144000"/>
@@ -11569,6 +11570,785 @@
 </file>
 
 <file path=ppt/slides/slide18.xml><?xml version="1.0" encoding="utf-8"?>
+<p:sld xmlns:a="http://schemas.openxmlformats.org/drawingml/2006/main" xmlns:p="http://schemas.openxmlformats.org/presentationml/2006/main" xmlns:r="http://schemas.openxmlformats.org/officeDocument/2006/relationships">
+  <p:cSld>
+    <p:bg>
+      <p:bgPr>
+        <a:solidFill>
+          <a:srgbClr val="FFFFFF"/>
+        </a:solidFill>
+        <a:effectLst/>
+      </p:bgPr>
+    </p:bg>
+    <p:spTree>
+      <p:nvGrpSpPr>
+        <p:cNvPr id="1" name=""/>
+        <p:cNvGrpSpPr/>
+        <p:nvPr/>
+      </p:nvGrpSpPr>
+      <p:grpSpPr/>
+      <p:sp>
+        <p:nvSpPr>
+          <p:cNvPr id="2" name="TextBox 1"/>
+          <p:cNvSpPr txBox="1"/>
+          <p:nvPr/>
+        </p:nvSpPr>
+        <p:spPr>
+          <a:xfrm>
+            <a:off x="822960" y="457200"/>
+            <a:ext cx="10515600" cy="502920"/>
+          </a:xfrm>
+          <a:prstGeom prst="rect">
+            <a:avLst/>
+          </a:prstGeom>
+          <a:noFill/>
+        </p:spPr>
+        <p:txBody>
+          <a:bodyPr wrap="square" lIns="0" rIns="0" tIns="0" bIns="0">
+            <a:spAutoFit/>
+          </a:bodyPr>
+          <a:lstStyle/>
+          <a:p>
+            <a:pPr algn="l"/>
+            <a:r>
+              <a:rPr sz="3000" b="1" i="0">
+                <a:solidFill>
+                  <a:srgbClr val="0A2851"/>
+                </a:solidFill>
+                <a:latin typeface="Arial"/>
+              </a:rPr>
+              <a:t>Superdog Picks</a:t>
+            </a:r>
+          </a:p>
+        </p:txBody>
+      </p:sp>
+      <p:sp>
+        <p:nvSpPr>
+          <p:cNvPr id="3" name="TextBox 2"/>
+          <p:cNvSpPr txBox="1"/>
+          <p:nvPr/>
+        </p:nvSpPr>
+        <p:spPr>
+          <a:xfrm>
+            <a:off x="822960" y="987552"/>
+            <a:ext cx="10515600" cy="274320"/>
+          </a:xfrm>
+          <a:prstGeom prst="rect">
+            <a:avLst/>
+          </a:prstGeom>
+          <a:noFill/>
+        </p:spPr>
+        <p:txBody>
+          <a:bodyPr wrap="square" lIns="0" rIns="0" tIns="0" bIns="0">
+            <a:spAutoFit/>
+          </a:bodyPr>
+          <a:lstStyle/>
+          <a:p>
+            <a:pPr algn="l"/>
+            <a:r>
+              <a:rPr sz="1100" b="0" i="1">
+                <a:solidFill>
+                  <a:srgbClr val="5C6B7E"/>
+                </a:solidFill>
+                <a:latin typeface="Arial"/>
+              </a:rPr>
+              <a:t>Pick a dog to WIN OUTRIGHT — points = the spread · machine board: model win prob vs market, expected points = prob × spread</a:t>
+            </a:r>
+          </a:p>
+        </p:txBody>
+      </p:sp>
+      <p:sp>
+        <p:nvSpPr>
+          <p:cNvPr id="4" name="Rounded Rectangle 3"/>
+          <p:cNvSpPr/>
+          <p:nvPr/>
+        </p:nvSpPr>
+        <p:spPr>
+          <a:xfrm>
+            <a:off x="822960" y="1463040"/>
+            <a:ext cx="5074920" cy="4480560"/>
+          </a:xfrm>
+          <a:prstGeom prst="roundRect">
+            <a:avLst/>
+          </a:prstGeom>
+          <a:solidFill>
+            <a:srgbClr val="EAF0F8"/>
+          </a:solidFill>
+          <a:ln>
+            <a:noFill/>
+          </a:ln>
+          <a:effectLst/>
+        </p:spPr>
+        <p:style>
+          <a:lnRef idx="1">
+            <a:schemeClr val="accent1"/>
+          </a:lnRef>
+          <a:fillRef idx="3">
+            <a:schemeClr val="accent1"/>
+          </a:fillRef>
+          <a:effectRef idx="2">
+            <a:schemeClr val="accent1"/>
+          </a:effectRef>
+          <a:fontRef idx="minor">
+            <a:schemeClr val="lt1"/>
+          </a:fontRef>
+        </p:style>
+        <p:txBody>
+          <a:bodyPr rtlCol="0" anchor="ctr"/>
+          <a:lstStyle/>
+          <a:p>
+            <a:pPr algn="ctr"/>
+          </a:p>
+        </p:txBody>
+      </p:sp>
+      <p:sp>
+        <p:nvSpPr>
+          <p:cNvPr id="5" name="TextBox 4"/>
+          <p:cNvSpPr txBox="1"/>
+          <p:nvPr/>
+        </p:nvSpPr>
+        <p:spPr>
+          <a:xfrm>
+            <a:off x="1097280" y="1645920"/>
+            <a:ext cx="4572000" cy="274320"/>
+          </a:xfrm>
+          <a:prstGeom prst="rect">
+            <a:avLst/>
+          </a:prstGeom>
+          <a:noFill/>
+        </p:spPr>
+        <p:txBody>
+          <a:bodyPr wrap="square" lIns="0" rIns="0" tIns="0" bIns="0">
+            <a:spAutoFit/>
+          </a:bodyPr>
+          <a:lstStyle/>
+          <a:p>
+            <a:pPr algn="l"/>
+            <a:r>
+              <a:rPr sz="1200" b="1" i="0">
+                <a:solidFill>
+                  <a:srgbClr val="F47321"/>
+                </a:solidFill>
+                <a:latin typeface="Arial"/>
+              </a:rPr>
+              <a:t>ANY GAME</a:t>
+            </a:r>
+          </a:p>
+        </p:txBody>
+      </p:sp>
+      <p:sp>
+        <p:nvSpPr>
+          <p:cNvPr id="6" name="TextBox 5"/>
+          <p:cNvSpPr txBox="1"/>
+          <p:nvPr/>
+        </p:nvSpPr>
+        <p:spPr>
+          <a:xfrm>
+            <a:off x="1097280" y="2057400"/>
+            <a:ext cx="4572000" cy="320040"/>
+          </a:xfrm>
+          <a:prstGeom prst="rect">
+            <a:avLst/>
+          </a:prstGeom>
+          <a:noFill/>
+        </p:spPr>
+        <p:txBody>
+          <a:bodyPr wrap="square" lIns="0" rIns="0" tIns="0" bIns="0">
+            <a:spAutoFit/>
+          </a:bodyPr>
+          <a:lstStyle/>
+          <a:p>
+            <a:pPr algn="l"/>
+            <a:r>
+              <a:rPr sz="1300" b="1" i="0">
+                <a:solidFill>
+                  <a:srgbClr val="F47321"/>
+                </a:solidFill>
+                <a:latin typeface="Arial"/>
+              </a:rPr>
+              <a:t>★ Coastal Carolina +21.5 at West Virginia</a:t>
+            </a:r>
+          </a:p>
+        </p:txBody>
+      </p:sp>
+      <p:sp>
+        <p:nvSpPr>
+          <p:cNvPr id="7" name="TextBox 6"/>
+          <p:cNvSpPr txBox="1"/>
+          <p:nvPr/>
+        </p:nvSpPr>
+        <p:spPr>
+          <a:xfrm>
+            <a:off x="1097280" y="2386584"/>
+            <a:ext cx="4572000" cy="274320"/>
+          </a:xfrm>
+          <a:prstGeom prst="rect">
+            <a:avLst/>
+          </a:prstGeom>
+          <a:noFill/>
+        </p:spPr>
+        <p:txBody>
+          <a:bodyPr wrap="square" lIns="0" rIns="0" tIns="0" bIns="0">
+            <a:spAutoFit/>
+          </a:bodyPr>
+          <a:lstStyle/>
+          <a:p>
+            <a:pPr algn="l"/>
+            <a:r>
+              <a:rPr sz="1000" b="0" i="0">
+                <a:solidFill>
+                  <a:srgbClr val="5C6B7E"/>
+                </a:solidFill>
+                <a:latin typeface="Arial"/>
+              </a:rPr>
+              <a:t>model 21% · market 9% · expected pts 4.4</a:t>
+            </a:r>
+          </a:p>
+        </p:txBody>
+      </p:sp>
+      <p:sp>
+        <p:nvSpPr>
+          <p:cNvPr id="8" name="TextBox 7"/>
+          <p:cNvSpPr txBox="1"/>
+          <p:nvPr/>
+        </p:nvSpPr>
+        <p:spPr>
+          <a:xfrm>
+            <a:off x="1097280" y="2926080"/>
+            <a:ext cx="4572000" cy="320040"/>
+          </a:xfrm>
+          <a:prstGeom prst="rect">
+            <a:avLst/>
+          </a:prstGeom>
+          <a:noFill/>
+        </p:spPr>
+        <p:txBody>
+          <a:bodyPr wrap="square" lIns="0" rIns="0" tIns="0" bIns="0">
+            <a:spAutoFit/>
+          </a:bodyPr>
+          <a:lstStyle/>
+          <a:p>
+            <a:pPr algn="l"/>
+            <a:r>
+              <a:rPr sz="1200" b="1" i="0">
+                <a:solidFill>
+                  <a:srgbClr val="16273D"/>
+                </a:solidFill>
+                <a:latin typeface="Arial"/>
+              </a:rPr>
+              <a:t>Tulsa +14 vs Oklahoma State</a:t>
+            </a:r>
+          </a:p>
+        </p:txBody>
+      </p:sp>
+      <p:sp>
+        <p:nvSpPr>
+          <p:cNvPr id="9" name="TextBox 8"/>
+          <p:cNvSpPr txBox="1"/>
+          <p:nvPr/>
+        </p:nvSpPr>
+        <p:spPr>
+          <a:xfrm>
+            <a:off x="1097280" y="3255264"/>
+            <a:ext cx="4572000" cy="274320"/>
+          </a:xfrm>
+          <a:prstGeom prst="rect">
+            <a:avLst/>
+          </a:prstGeom>
+          <a:noFill/>
+        </p:spPr>
+        <p:txBody>
+          <a:bodyPr wrap="square" lIns="0" rIns="0" tIns="0" bIns="0">
+            <a:spAutoFit/>
+          </a:bodyPr>
+          <a:lstStyle/>
+          <a:p>
+            <a:pPr algn="l"/>
+            <a:r>
+              <a:rPr sz="1000" b="0" i="0">
+                <a:solidFill>
+                  <a:srgbClr val="5C6B7E"/>
+                </a:solidFill>
+                <a:latin typeface="Arial"/>
+              </a:rPr>
+              <a:t>model 30% · market 18% · expected pts 4.2</a:t>
+            </a:r>
+          </a:p>
+        </p:txBody>
+      </p:sp>
+      <p:sp>
+        <p:nvSpPr>
+          <p:cNvPr id="10" name="TextBox 9"/>
+          <p:cNvSpPr txBox="1"/>
+          <p:nvPr/>
+        </p:nvSpPr>
+        <p:spPr>
+          <a:xfrm>
+            <a:off x="1097280" y="3794760"/>
+            <a:ext cx="4572000" cy="320040"/>
+          </a:xfrm>
+          <a:prstGeom prst="rect">
+            <a:avLst/>
+          </a:prstGeom>
+          <a:noFill/>
+        </p:spPr>
+        <p:txBody>
+          <a:bodyPr wrap="square" lIns="0" rIns="0" tIns="0" bIns="0">
+            <a:spAutoFit/>
+          </a:bodyPr>
+          <a:lstStyle/>
+          <a:p>
+            <a:pPr algn="l"/>
+            <a:r>
+              <a:rPr sz="1200" b="1" i="0">
+                <a:solidFill>
+                  <a:srgbClr val="16273D"/>
+                </a:solidFill>
+                <a:latin typeface="Arial"/>
+              </a:rPr>
+              <a:t>Tulane +9.5 at Duke</a:t>
+            </a:r>
+          </a:p>
+        </p:txBody>
+      </p:sp>
+      <p:sp>
+        <p:nvSpPr>
+          <p:cNvPr id="11" name="TextBox 10"/>
+          <p:cNvSpPr txBox="1"/>
+          <p:nvPr/>
+        </p:nvSpPr>
+        <p:spPr>
+          <a:xfrm>
+            <a:off x="1097280" y="4123944"/>
+            <a:ext cx="4572000" cy="274320"/>
+          </a:xfrm>
+          <a:prstGeom prst="rect">
+            <a:avLst/>
+          </a:prstGeom>
+          <a:noFill/>
+        </p:spPr>
+        <p:txBody>
+          <a:bodyPr wrap="square" lIns="0" rIns="0" tIns="0" bIns="0">
+            <a:spAutoFit/>
+          </a:bodyPr>
+          <a:lstStyle/>
+          <a:p>
+            <a:pPr algn="l"/>
+            <a:r>
+              <a:rPr sz="1000" b="0" i="0">
+                <a:solidFill>
+                  <a:srgbClr val="5C6B7E"/>
+                </a:solidFill>
+                <a:latin typeface="Arial"/>
+              </a:rPr>
+              <a:t>model 41% · market 24% · expected pts 3.9</a:t>
+            </a:r>
+          </a:p>
+        </p:txBody>
+      </p:sp>
+      <p:sp>
+        <p:nvSpPr>
+          <p:cNvPr id="12" name="Rounded Rectangle 11"/>
+          <p:cNvSpPr/>
+          <p:nvPr/>
+        </p:nvSpPr>
+        <p:spPr>
+          <a:xfrm>
+            <a:off x="6263640" y="1463040"/>
+            <a:ext cx="5074920" cy="4480560"/>
+          </a:xfrm>
+          <a:prstGeom prst="roundRect">
+            <a:avLst/>
+          </a:prstGeom>
+          <a:solidFill>
+            <a:srgbClr val="EAF0F8"/>
+          </a:solidFill>
+          <a:ln>
+            <a:noFill/>
+          </a:ln>
+          <a:effectLst/>
+        </p:spPr>
+        <p:style>
+          <a:lnRef idx="1">
+            <a:schemeClr val="accent1"/>
+          </a:lnRef>
+          <a:fillRef idx="3">
+            <a:schemeClr val="accent1"/>
+          </a:fillRef>
+          <a:effectRef idx="2">
+            <a:schemeClr val="accent1"/>
+          </a:effectRef>
+          <a:fontRef idx="minor">
+            <a:schemeClr val="lt1"/>
+          </a:fontRef>
+        </p:style>
+        <p:txBody>
+          <a:bodyPr rtlCol="0" anchor="ctr"/>
+          <a:lstStyle/>
+          <a:p>
+            <a:pPr algn="ctr"/>
+          </a:p>
+        </p:txBody>
+      </p:sp>
+      <p:sp>
+        <p:nvSpPr>
+          <p:cNvPr id="13" name="TextBox 12"/>
+          <p:cNvSpPr txBox="1"/>
+          <p:nvPr/>
+        </p:nvSpPr>
+        <p:spPr>
+          <a:xfrm>
+            <a:off x="6537960" y="1645920"/>
+            <a:ext cx="4572000" cy="274320"/>
+          </a:xfrm>
+          <a:prstGeom prst="rect">
+            <a:avLst/>
+          </a:prstGeom>
+          <a:noFill/>
+        </p:spPr>
+        <p:txBody>
+          <a:bodyPr wrap="square" lIns="0" rIns="0" tIns="0" bIns="0">
+            <a:spAutoFit/>
+          </a:bodyPr>
+          <a:lstStyle/>
+          <a:p>
+            <a:pPr algn="l"/>
+            <a:r>
+              <a:rPr sz="1200" b="1" i="0">
+                <a:solidFill>
+                  <a:srgbClr val="F47321"/>
+                </a:solidFill>
+                <a:latin typeface="Arial"/>
+              </a:rPr>
+              <a:t>GIANT KILLER — dog vs an AP top-25 team</a:t>
+            </a:r>
+          </a:p>
+        </p:txBody>
+      </p:sp>
+      <p:sp>
+        <p:nvSpPr>
+          <p:cNvPr id="14" name="TextBox 13"/>
+          <p:cNvSpPr txBox="1"/>
+          <p:nvPr/>
+        </p:nvSpPr>
+        <p:spPr>
+          <a:xfrm>
+            <a:off x="6537960" y="2057400"/>
+            <a:ext cx="4572000" cy="320040"/>
+          </a:xfrm>
+          <a:prstGeom prst="rect">
+            <a:avLst/>
+          </a:prstGeom>
+          <a:noFill/>
+        </p:spPr>
+        <p:txBody>
+          <a:bodyPr wrap="square" lIns="0" rIns="0" tIns="0" bIns="0">
+            <a:spAutoFit/>
+          </a:bodyPr>
+          <a:lstStyle/>
+          <a:p>
+            <a:pPr algn="l"/>
+            <a:r>
+              <a:rPr sz="1300" b="1" i="0">
+                <a:solidFill>
+                  <a:srgbClr val="F47321"/>
+                </a:solidFill>
+                <a:latin typeface="Arial"/>
+              </a:rPr>
+              <a:t>★ Washington State +23.5 at #17 Washington</a:t>
+            </a:r>
+          </a:p>
+        </p:txBody>
+      </p:sp>
+      <p:sp>
+        <p:nvSpPr>
+          <p:cNvPr id="15" name="TextBox 14"/>
+          <p:cNvSpPr txBox="1"/>
+          <p:nvPr/>
+        </p:nvSpPr>
+        <p:spPr>
+          <a:xfrm>
+            <a:off x="6537960" y="2386584"/>
+            <a:ext cx="4572000" cy="274320"/>
+          </a:xfrm>
+          <a:prstGeom prst="rect">
+            <a:avLst/>
+          </a:prstGeom>
+          <a:noFill/>
+        </p:spPr>
+        <p:txBody>
+          <a:bodyPr wrap="square" lIns="0" rIns="0" tIns="0" bIns="0">
+            <a:spAutoFit/>
+          </a:bodyPr>
+          <a:lstStyle/>
+          <a:p>
+            <a:pPr algn="l"/>
+            <a:r>
+              <a:rPr sz="1000" b="0" i="0">
+                <a:solidFill>
+                  <a:srgbClr val="5C6B7E"/>
+                </a:solidFill>
+                <a:latin typeface="Arial"/>
+              </a:rPr>
+              <a:t>model 18% · market 7% · expected pts 4.3</a:t>
+            </a:r>
+          </a:p>
+        </p:txBody>
+      </p:sp>
+      <p:sp>
+        <p:nvSpPr>
+          <p:cNvPr id="16" name="TextBox 15"/>
+          <p:cNvSpPr txBox="1"/>
+          <p:nvPr/>
+        </p:nvSpPr>
+        <p:spPr>
+          <a:xfrm>
+            <a:off x="6537960" y="2926080"/>
+            <a:ext cx="4572000" cy="320040"/>
+          </a:xfrm>
+          <a:prstGeom prst="rect">
+            <a:avLst/>
+          </a:prstGeom>
+          <a:noFill/>
+        </p:spPr>
+        <p:txBody>
+          <a:bodyPr wrap="square" lIns="0" rIns="0" tIns="0" bIns="0">
+            <a:spAutoFit/>
+          </a:bodyPr>
+          <a:lstStyle/>
+          <a:p>
+            <a:pPr algn="l"/>
+            <a:r>
+              <a:rPr sz="1200" b="1" i="0">
+                <a:solidFill>
+                  <a:srgbClr val="16273D"/>
+                </a:solidFill>
+                <a:latin typeface="Arial"/>
+              </a:rPr>
+              <a:t>Oregon State +20.5 at #23 Houston</a:t>
+            </a:r>
+          </a:p>
+        </p:txBody>
+      </p:sp>
+      <p:sp>
+        <p:nvSpPr>
+          <p:cNvPr id="17" name="TextBox 16"/>
+          <p:cNvSpPr txBox="1"/>
+          <p:nvPr/>
+        </p:nvSpPr>
+        <p:spPr>
+          <a:xfrm>
+            <a:off x="6537960" y="3255264"/>
+            <a:ext cx="4572000" cy="274320"/>
+          </a:xfrm>
+          <a:prstGeom prst="rect">
+            <a:avLst/>
+          </a:prstGeom>
+          <a:noFill/>
+        </p:spPr>
+        <p:txBody>
+          <a:bodyPr wrap="square" lIns="0" rIns="0" tIns="0" bIns="0">
+            <a:spAutoFit/>
+          </a:bodyPr>
+          <a:lstStyle/>
+          <a:p>
+            <a:pPr algn="l"/>
+            <a:r>
+              <a:rPr sz="1000" b="0" i="0">
+                <a:solidFill>
+                  <a:srgbClr val="5C6B7E"/>
+                </a:solidFill>
+                <a:latin typeface="Arial"/>
+              </a:rPr>
+              <a:t>model 17% · market 9% · expected pts 3.4</a:t>
+            </a:r>
+          </a:p>
+        </p:txBody>
+      </p:sp>
+      <p:sp>
+        <p:nvSpPr>
+          <p:cNvPr id="18" name="TextBox 17"/>
+          <p:cNvSpPr txBox="1"/>
+          <p:nvPr/>
+        </p:nvSpPr>
+        <p:spPr>
+          <a:xfrm>
+            <a:off x="6537960" y="3794760"/>
+            <a:ext cx="4572000" cy="320040"/>
+          </a:xfrm>
+          <a:prstGeom prst="rect">
+            <a:avLst/>
+          </a:prstGeom>
+          <a:noFill/>
+        </p:spPr>
+        <p:txBody>
+          <a:bodyPr wrap="square" lIns="0" rIns="0" tIns="0" bIns="0">
+            <a:spAutoFit/>
+          </a:bodyPr>
+          <a:lstStyle/>
+          <a:p>
+            <a:pPr algn="l"/>
+            <a:r>
+              <a:rPr sz="1200" b="1" i="0">
+                <a:solidFill>
+                  <a:srgbClr val="16273D"/>
+                </a:solidFill>
+                <a:latin typeface="Arial"/>
+              </a:rPr>
+              <a:t>Clemson +10.5 at #11 LSU</a:t>
+            </a:r>
+          </a:p>
+        </p:txBody>
+      </p:sp>
+      <p:sp>
+        <p:nvSpPr>
+          <p:cNvPr id="19" name="TextBox 18"/>
+          <p:cNvSpPr txBox="1"/>
+          <p:nvPr/>
+        </p:nvSpPr>
+        <p:spPr>
+          <a:xfrm>
+            <a:off x="6537960" y="4123944"/>
+            <a:ext cx="4572000" cy="274320"/>
+          </a:xfrm>
+          <a:prstGeom prst="rect">
+            <a:avLst/>
+          </a:prstGeom>
+          <a:noFill/>
+        </p:spPr>
+        <p:txBody>
+          <a:bodyPr wrap="square" lIns="0" rIns="0" tIns="0" bIns="0">
+            <a:spAutoFit/>
+          </a:bodyPr>
+          <a:lstStyle/>
+          <a:p>
+            <a:pPr algn="l"/>
+            <a:r>
+              <a:rPr sz="1000" b="0" i="0">
+                <a:solidFill>
+                  <a:srgbClr val="5C6B7E"/>
+                </a:solidFill>
+                <a:latin typeface="Arial"/>
+              </a:rPr>
+              <a:t>model 30% · market 24% · expected pts 3.2</a:t>
+            </a:r>
+          </a:p>
+        </p:txBody>
+      </p:sp>
+      <p:sp>
+        <p:nvSpPr>
+          <p:cNvPr id="20" name="TextBox 19"/>
+          <p:cNvSpPr txBox="1"/>
+          <p:nvPr/>
+        </p:nvSpPr>
+        <p:spPr>
+          <a:xfrm>
+            <a:off x="6537960" y="4892040"/>
+            <a:ext cx="4572000" cy="822960"/>
+          </a:xfrm>
+          <a:prstGeom prst="rect">
+            <a:avLst/>
+          </a:prstGeom>
+          <a:noFill/>
+        </p:spPr>
+        <p:txBody>
+          <a:bodyPr wrap="square" lIns="0" rIns="0" tIns="0" bIns="0">
+            <a:spAutoFit/>
+          </a:bodyPr>
+          <a:lstStyle/>
+          <a:p>
+            <a:pPr algn="l"/>
+            <a:r>
+              <a:rPr sz="1050" b="0" i="1">
+                <a:solidFill>
+                  <a:srgbClr val="16273D"/>
+                </a:solidFill>
+                <a:latin typeface="Arial"/>
+              </a:rPr>
+              <a:t>Most likely ranked upset: Florida State +3 vs #19 SMU — 52% (low points, high cash rate)</a:t>
+            </a:r>
+          </a:p>
+        </p:txBody>
+      </p:sp>
+      <p:sp>
+        <p:nvSpPr>
+          <p:cNvPr id="21" name="TextBox 20"/>
+          <p:cNvSpPr txBox="1"/>
+          <p:nvPr/>
+        </p:nvSpPr>
+        <p:spPr>
+          <a:xfrm>
+            <a:off x="822960" y="6126480"/>
+            <a:ext cx="10515600" cy="457200"/>
+          </a:xfrm>
+          <a:prstGeom prst="rect">
+            <a:avLst/>
+          </a:prstGeom>
+          <a:noFill/>
+        </p:spPr>
+        <p:txBody>
+          <a:bodyPr wrap="square" lIns="0" rIns="0" tIns="0" bIns="0">
+            <a:spAutoFit/>
+          </a:bodyPr>
+          <a:lstStyle/>
+          <a:p>
+            <a:pPr algn="l"/>
+            <a:r>
+              <a:rPr sz="1000" b="0" i="1">
+                <a:solidFill>
+                  <a:srgbClr val="5C6B7E"/>
+                </a:solidFill>
+                <a:latin typeface="Arial"/>
+              </a:rPr>
+              <a:t>Honesty: model probs ride preseason priors and σ 17.9 — the biggest model-vs-market gaps sit exactly where the favorite-longshot bias lives. A points game between hosts, not a betting card.</a:t>
+            </a:r>
+          </a:p>
+        </p:txBody>
+      </p:sp>
+      <p:sp>
+        <p:nvSpPr>
+          <p:cNvPr id="22" name="TextBox 21"/>
+          <p:cNvSpPr txBox="1"/>
+          <p:nvPr/>
+        </p:nvSpPr>
+        <p:spPr>
+          <a:xfrm>
+            <a:off x="822960" y="6519672"/>
+            <a:ext cx="10515600" cy="274320"/>
+          </a:xfrm>
+          <a:prstGeom prst="rect">
+            <a:avLst/>
+          </a:prstGeom>
+          <a:noFill/>
+        </p:spPr>
+        <p:txBody>
+          <a:bodyPr wrap="square" lIns="0" rIns="0" tIns="0" bIns="0">
+            <a:spAutoFit/>
+          </a:bodyPr>
+          <a:lstStyle/>
+          <a:p>
+            <a:pPr algn="l"/>
+            <a:r>
+              <a:rPr sz="900" b="0" i="0">
+                <a:solidFill>
+                  <a:srgbClr val="5C6B7E"/>
+                </a:solidFill>
+                <a:latin typeface="Arial"/>
+              </a:rPr>
+              <a:t>EP 2 · WEEK 1 · SUPERDOG PICKS</a:t>
+            </a:r>
+          </a:p>
+        </p:txBody>
+      </p:sp>
+    </p:spTree>
+  </p:cSld>
+  <p:clrMapOvr>
+    <a:masterClrMapping/>
+  </p:clrMapOvr>
+</p:sld>
+</file>
+
+<file path=ppt/slides/slide19.xml><?xml version="1.0" encoding="utf-8"?>
 <p:sld xmlns:a="http://schemas.openxmlformats.org/drawingml/2006/main" xmlns:p="http://schemas.openxmlformats.org/presentationml/2006/main" xmlns:r="http://schemas.openxmlformats.org/officeDocument/2006/relationships">
   <p:cSld>
     <p:bg>

--- a/decks/2026_Week1_Episode2.pptx
+++ b/decks/2026_Week1_Episode2.pptx
@@ -11665,8 +11665,8 @@
         </p:nvSpPr>
         <p:spPr>
           <a:xfrm>
-            <a:off x="822960" y="1463040"/>
-            <a:ext cx="5074920" cy="4480560"/>
+            <a:off x="822960" y="1554480"/>
+            <a:ext cx="5074920" cy="2834640"/>
           </a:xfrm>
           <a:prstGeom prst="roundRect">
             <a:avLst/>
@@ -11709,7 +11709,7 @@
         </p:nvSpPr>
         <p:spPr>
           <a:xfrm>
-            <a:off x="1097280" y="1645920"/>
+            <a:off x="1097280" y="1783080"/>
             <a:ext cx="4572000" cy="274320"/>
           </a:xfrm>
           <a:prstGeom prst="rect">
@@ -11744,23 +11744,23 @@
         </p:nvSpPr>
         <p:spPr>
           <a:xfrm>
-            <a:off x="1097280" y="2057400"/>
-            <a:ext cx="4572000" cy="320040"/>
-          </a:xfrm>
-          <a:prstGeom prst="rect">
-            <a:avLst/>
-          </a:prstGeom>
-          <a:noFill/>
-        </p:spPr>
-        <p:txBody>
-          <a:bodyPr wrap="square" lIns="0" rIns="0" tIns="0" bIns="0">
-            <a:spAutoFit/>
-          </a:bodyPr>
-          <a:lstStyle/>
-          <a:p>
-            <a:pPr algn="l"/>
-            <a:r>
-              <a:rPr sz="1300" b="1" i="0">
+            <a:off x="1097280" y="2240280"/>
+            <a:ext cx="4572000" cy="457200"/>
+          </a:xfrm>
+          <a:prstGeom prst="rect">
+            <a:avLst/>
+          </a:prstGeom>
+          <a:noFill/>
+        </p:spPr>
+        <p:txBody>
+          <a:bodyPr wrap="square" lIns="0" rIns="0" tIns="0" bIns="0">
+            <a:spAutoFit/>
+          </a:bodyPr>
+          <a:lstStyle/>
+          <a:p>
+            <a:pPr algn="l"/>
+            <a:r>
+              <a:rPr sz="1700" b="1" i="0">
                 <a:solidFill>
                   <a:srgbClr val="F47321"/>
                 </a:solidFill>
@@ -11779,7 +11779,7 @@
         </p:nvSpPr>
         <p:spPr>
           <a:xfrm>
-            <a:off x="1097280" y="2386584"/>
+            <a:off x="1097280" y="2788920"/>
             <a:ext cx="4572000" cy="274320"/>
           </a:xfrm>
           <a:prstGeom prst="rect">
@@ -11795,13 +11795,13 @@
           <a:p>
             <a:pPr algn="l"/>
             <a:r>
-              <a:rPr sz="1000" b="0" i="0">
+              <a:rPr sz="1050" b="0" i="0">
                 <a:solidFill>
                   <a:srgbClr val="5C6B7E"/>
                 </a:solidFill>
                 <a:latin typeface="Arial"/>
               </a:rPr>
-              <a:t>model 21% · market 9% · expected pts 4.4</a:t>
+              <a:t>model 21% to win outright · market 9% · expected pts 4.4</a:t>
             </a:r>
           </a:p>
         </p:txBody>
@@ -11814,148 +11814,43 @@
         </p:nvSpPr>
         <p:spPr>
           <a:xfrm>
-            <a:off x="1097280" y="2926080"/>
-            <a:ext cx="4572000" cy="320040"/>
-          </a:xfrm>
-          <a:prstGeom prst="rect">
-            <a:avLst/>
-          </a:prstGeom>
-          <a:noFill/>
-        </p:spPr>
-        <p:txBody>
-          <a:bodyPr wrap="square" lIns="0" rIns="0" tIns="0" bIns="0">
-            <a:spAutoFit/>
-          </a:bodyPr>
-          <a:lstStyle/>
-          <a:p>
-            <a:pPr algn="l"/>
-            <a:r>
-              <a:rPr sz="1200" b="1" i="0">
+            <a:off x="1097280" y="3246120"/>
+            <a:ext cx="4572000" cy="868680"/>
+          </a:xfrm>
+          <a:prstGeom prst="rect">
+            <a:avLst/>
+          </a:prstGeom>
+          <a:noFill/>
+        </p:spPr>
+        <p:txBody>
+          <a:bodyPr wrap="square" lIns="0" rIns="0" tIns="0" bIns="0">
+            <a:spAutoFit/>
+          </a:bodyPr>
+          <a:lstStyle/>
+          <a:p>
+            <a:pPr algn="l"/>
+            <a:r>
+              <a:rPr sz="1100" b="0" i="1">
                 <a:solidFill>
                   <a:srgbClr val="16273D"/>
                 </a:solidFill>
                 <a:latin typeface="Arial"/>
               </a:rPr>
-              <a:t>Tulsa +14 vs Oklahoma State</a:t>
-            </a:r>
-          </a:p>
-        </p:txBody>
-      </p:sp>
-      <p:sp>
-        <p:nvSpPr>
-          <p:cNvPr id="9" name="TextBox 8"/>
-          <p:cNvSpPr txBox="1"/>
-          <p:nvPr/>
-        </p:nvSpPr>
-        <p:spPr>
-          <a:xfrm>
-            <a:off x="1097280" y="3255264"/>
-            <a:ext cx="4572000" cy="274320"/>
-          </a:xfrm>
-          <a:prstGeom prst="rect">
-            <a:avLst/>
-          </a:prstGeom>
-          <a:noFill/>
-        </p:spPr>
-        <p:txBody>
-          <a:bodyPr wrap="square" lIns="0" rIns="0" tIns="0" bIns="0">
-            <a:spAutoFit/>
-          </a:bodyPr>
-          <a:lstStyle/>
-          <a:p>
-            <a:pPr algn="l"/>
-            <a:r>
-              <a:rPr sz="1000" b="0" i="0">
-                <a:solidFill>
-                  <a:srgbClr val="5C6B7E"/>
-                </a:solidFill>
-                <a:latin typeface="Arial"/>
-              </a:rPr>
-              <a:t>model 30% · market 18% · expected pts 4.2</a:t>
-            </a:r>
-          </a:p>
-        </p:txBody>
-      </p:sp>
-      <p:sp>
-        <p:nvSpPr>
-          <p:cNvPr id="10" name="TextBox 9"/>
-          <p:cNvSpPr txBox="1"/>
-          <p:nvPr/>
-        </p:nvSpPr>
-        <p:spPr>
-          <a:xfrm>
-            <a:off x="1097280" y="3794760"/>
-            <a:ext cx="4572000" cy="320040"/>
-          </a:xfrm>
-          <a:prstGeom prst="rect">
-            <a:avLst/>
-          </a:prstGeom>
-          <a:noFill/>
-        </p:spPr>
-        <p:txBody>
-          <a:bodyPr wrap="square" lIns="0" rIns="0" tIns="0" bIns="0">
-            <a:spAutoFit/>
-          </a:bodyPr>
-          <a:lstStyle/>
-          <a:p>
-            <a:pPr algn="l"/>
-            <a:r>
-              <a:rPr sz="1200" b="1" i="0">
-                <a:solidFill>
-                  <a:srgbClr val="16273D"/>
-                </a:solidFill>
-                <a:latin typeface="Arial"/>
-              </a:rPr>
-              <a:t>Tulane +9.5 at Duke</a:t>
-            </a:r>
-          </a:p>
-        </p:txBody>
-      </p:sp>
-      <p:sp>
-        <p:nvSpPr>
-          <p:cNvPr id="11" name="TextBox 10"/>
-          <p:cNvSpPr txBox="1"/>
-          <p:nvPr/>
-        </p:nvSpPr>
-        <p:spPr>
-          <a:xfrm>
-            <a:off x="1097280" y="4123944"/>
-            <a:ext cx="4572000" cy="274320"/>
-          </a:xfrm>
-          <a:prstGeom prst="rect">
-            <a:avLst/>
-          </a:prstGeom>
-          <a:noFill/>
-        </p:spPr>
-        <p:txBody>
-          <a:bodyPr wrap="square" lIns="0" rIns="0" tIns="0" bIns="0">
-            <a:spAutoFit/>
-          </a:bodyPr>
-          <a:lstStyle/>
-          <a:p>
-            <a:pPr algn="l"/>
-            <a:r>
-              <a:rPr sz="1000" b="0" i="0">
-                <a:solidFill>
-                  <a:srgbClr val="5C6B7E"/>
-                </a:solidFill>
-                <a:latin typeface="Arial"/>
-              </a:rPr>
-              <a:t>model 41% · market 24% · expected pts 3.9</a:t>
-            </a:r>
-          </a:p>
-        </p:txBody>
-      </p:sp>
-      <p:sp>
-        <p:nvSpPr>
-          <p:cNvPr id="12" name="Rounded Rectangle 11"/>
+              <a:t>The board's biggest model-vs-market fight — the machine never bought the move from −17.5 to −21.5.</a:t>
+            </a:r>
+          </a:p>
+        </p:txBody>
+      </p:sp>
+      <p:sp>
+        <p:nvSpPr>
+          <p:cNvPr id="9" name="Rounded Rectangle 8"/>
           <p:cNvSpPr/>
           <p:nvPr/>
         </p:nvSpPr>
         <p:spPr>
           <a:xfrm>
-            <a:off x="6263640" y="1463040"/>
-            <a:ext cx="5074920" cy="4480560"/>
+            <a:off x="6263640" y="1554480"/>
+            <a:ext cx="5074920" cy="2834640"/>
           </a:xfrm>
           <a:prstGeom prst="roundRect">
             <a:avLst/>
@@ -11992,35 +11887,140 @@
       </p:sp>
       <p:sp>
         <p:nvSpPr>
+          <p:cNvPr id="10" name="TextBox 9"/>
+          <p:cNvSpPr txBox="1"/>
+          <p:nvPr/>
+        </p:nvSpPr>
+        <p:spPr>
+          <a:xfrm>
+            <a:off x="6537960" y="1783080"/>
+            <a:ext cx="4572000" cy="274320"/>
+          </a:xfrm>
+          <a:prstGeom prst="rect">
+            <a:avLst/>
+          </a:prstGeom>
+          <a:noFill/>
+        </p:spPr>
+        <p:txBody>
+          <a:bodyPr wrap="square" lIns="0" rIns="0" tIns="0" bIns="0">
+            <a:spAutoFit/>
+          </a:bodyPr>
+          <a:lstStyle/>
+          <a:p>
+            <a:pPr algn="l"/>
+            <a:r>
+              <a:rPr sz="1200" b="1" i="0">
+                <a:solidFill>
+                  <a:srgbClr val="F47321"/>
+                </a:solidFill>
+                <a:latin typeface="Arial"/>
+              </a:rPr>
+              <a:t>GIANT KILLER — dog vs an AP top-25 team</a:t>
+            </a:r>
+          </a:p>
+        </p:txBody>
+      </p:sp>
+      <p:sp>
+        <p:nvSpPr>
+          <p:cNvPr id="11" name="TextBox 10"/>
+          <p:cNvSpPr txBox="1"/>
+          <p:nvPr/>
+        </p:nvSpPr>
+        <p:spPr>
+          <a:xfrm>
+            <a:off x="6537960" y="2240280"/>
+            <a:ext cx="4572000" cy="457200"/>
+          </a:xfrm>
+          <a:prstGeom prst="rect">
+            <a:avLst/>
+          </a:prstGeom>
+          <a:noFill/>
+        </p:spPr>
+        <p:txBody>
+          <a:bodyPr wrap="square" lIns="0" rIns="0" tIns="0" bIns="0">
+            <a:spAutoFit/>
+          </a:bodyPr>
+          <a:lstStyle/>
+          <a:p>
+            <a:pPr algn="l"/>
+            <a:r>
+              <a:rPr sz="1700" b="1" i="0">
+                <a:solidFill>
+                  <a:srgbClr val="F47321"/>
+                </a:solidFill>
+                <a:latin typeface="Arial"/>
+              </a:rPr>
+              <a:t>★ Washington State +23.5 at #17 Washington</a:t>
+            </a:r>
+          </a:p>
+        </p:txBody>
+      </p:sp>
+      <p:sp>
+        <p:nvSpPr>
+          <p:cNvPr id="12" name="TextBox 11"/>
+          <p:cNvSpPr txBox="1"/>
+          <p:nvPr/>
+        </p:nvSpPr>
+        <p:spPr>
+          <a:xfrm>
+            <a:off x="6537960" y="2788920"/>
+            <a:ext cx="4572000" cy="274320"/>
+          </a:xfrm>
+          <a:prstGeom prst="rect">
+            <a:avLst/>
+          </a:prstGeom>
+          <a:noFill/>
+        </p:spPr>
+        <p:txBody>
+          <a:bodyPr wrap="square" lIns="0" rIns="0" tIns="0" bIns="0">
+            <a:spAutoFit/>
+          </a:bodyPr>
+          <a:lstStyle/>
+          <a:p>
+            <a:pPr algn="l"/>
+            <a:r>
+              <a:rPr sz="1050" b="0" i="0">
+                <a:solidFill>
+                  <a:srgbClr val="5C6B7E"/>
+                </a:solidFill>
+                <a:latin typeface="Arial"/>
+              </a:rPr>
+              <a:t>model 18% to win outright · market 7% · expected pts 4.3</a:t>
+            </a:r>
+          </a:p>
+        </p:txBody>
+      </p:sp>
+      <p:sp>
+        <p:nvSpPr>
           <p:cNvPr id="13" name="TextBox 12"/>
           <p:cNvSpPr txBox="1"/>
           <p:nvPr/>
         </p:nvSpPr>
         <p:spPr>
           <a:xfrm>
-            <a:off x="6537960" y="1645920"/>
-            <a:ext cx="4572000" cy="274320"/>
-          </a:xfrm>
-          <a:prstGeom prst="rect">
-            <a:avLst/>
-          </a:prstGeom>
-          <a:noFill/>
-        </p:spPr>
-        <p:txBody>
-          <a:bodyPr wrap="square" lIns="0" rIns="0" tIns="0" bIns="0">
-            <a:spAutoFit/>
-          </a:bodyPr>
-          <a:lstStyle/>
-          <a:p>
-            <a:pPr algn="l"/>
-            <a:r>
-              <a:rPr sz="1200" b="1" i="0">
-                <a:solidFill>
-                  <a:srgbClr val="F47321"/>
-                </a:solidFill>
-                <a:latin typeface="Arial"/>
-              </a:rPr>
-              <a:t>GIANT KILLER — dog vs an AP top-25 team</a:t>
+            <a:off x="6537960" y="3246120"/>
+            <a:ext cx="4572000" cy="868680"/>
+          </a:xfrm>
+          <a:prstGeom prst="rect">
+            <a:avLst/>
+          </a:prstGeom>
+          <a:noFill/>
+        </p:spPr>
+        <p:txBody>
+          <a:bodyPr wrap="square" lIns="0" rIns="0" tIns="0" bIns="0">
+            <a:spAutoFit/>
+          </a:bodyPr>
+          <a:lstStyle/>
+          <a:p>
+            <a:pPr algn="l"/>
+            <a:r>
+              <a:rPr sz="1100" b="0" i="1">
+                <a:solidFill>
+                  <a:srgbClr val="16273D"/>
+                </a:solidFill>
+                <a:latin typeface="Arial"/>
+              </a:rPr>
+              <a:t>The Apple Cup — rivalry chaos at a 23-point price, and the machine has the dog at more than double the market's chance.</a:t>
             </a:r>
           </a:p>
         </p:txBody>
@@ -12033,29 +12033,29 @@
         </p:nvSpPr>
         <p:spPr>
           <a:xfrm>
-            <a:off x="6537960" y="2057400"/>
-            <a:ext cx="4572000" cy="320040"/>
-          </a:xfrm>
-          <a:prstGeom prst="rect">
-            <a:avLst/>
-          </a:prstGeom>
-          <a:noFill/>
-        </p:spPr>
-        <p:txBody>
-          <a:bodyPr wrap="square" lIns="0" rIns="0" tIns="0" bIns="0">
-            <a:spAutoFit/>
-          </a:bodyPr>
-          <a:lstStyle/>
-          <a:p>
-            <a:pPr algn="l"/>
-            <a:r>
-              <a:rPr sz="1300" b="1" i="0">
-                <a:solidFill>
-                  <a:srgbClr val="F47321"/>
-                </a:solidFill>
-                <a:latin typeface="Arial"/>
-              </a:rPr>
-              <a:t>★ Washington State +23.5 at #17 Washington</a:t>
+            <a:off x="822960" y="4800600"/>
+            <a:ext cx="10515600" cy="457200"/>
+          </a:xfrm>
+          <a:prstGeom prst="rect">
+            <a:avLst/>
+          </a:prstGeom>
+          <a:noFill/>
+        </p:spPr>
+        <p:txBody>
+          <a:bodyPr wrap="square" lIns="0" rIns="0" tIns="0" bIns="0">
+            <a:spAutoFit/>
+          </a:bodyPr>
+          <a:lstStyle/>
+          <a:p>
+            <a:pPr algn="l"/>
+            <a:r>
+              <a:rPr sz="1000" b="0" i="1">
+                <a:solidFill>
+                  <a:srgbClr val="5C6B7E"/>
+                </a:solidFill>
+                <a:latin typeface="Arial"/>
+              </a:rPr>
+              <a:t>Honesty: model probs ride preseason priors and σ 17.9 — the biggest model-vs-market gaps sit exactly where the favorite-longshot bias lives. A points game between hosts, not a betting card.</a:t>
             </a:r>
           </a:p>
         </p:txBody>
@@ -12063,251 +12063,6 @@
       <p:sp>
         <p:nvSpPr>
           <p:cNvPr id="15" name="TextBox 14"/>
-          <p:cNvSpPr txBox="1"/>
-          <p:nvPr/>
-        </p:nvSpPr>
-        <p:spPr>
-          <a:xfrm>
-            <a:off x="6537960" y="2386584"/>
-            <a:ext cx="4572000" cy="274320"/>
-          </a:xfrm>
-          <a:prstGeom prst="rect">
-            <a:avLst/>
-          </a:prstGeom>
-          <a:noFill/>
-        </p:spPr>
-        <p:txBody>
-          <a:bodyPr wrap="square" lIns="0" rIns="0" tIns="0" bIns="0">
-            <a:spAutoFit/>
-          </a:bodyPr>
-          <a:lstStyle/>
-          <a:p>
-            <a:pPr algn="l"/>
-            <a:r>
-              <a:rPr sz="1000" b="0" i="0">
-                <a:solidFill>
-                  <a:srgbClr val="5C6B7E"/>
-                </a:solidFill>
-                <a:latin typeface="Arial"/>
-              </a:rPr>
-              <a:t>model 18% · market 7% · expected pts 4.3</a:t>
-            </a:r>
-          </a:p>
-        </p:txBody>
-      </p:sp>
-      <p:sp>
-        <p:nvSpPr>
-          <p:cNvPr id="16" name="TextBox 15"/>
-          <p:cNvSpPr txBox="1"/>
-          <p:nvPr/>
-        </p:nvSpPr>
-        <p:spPr>
-          <a:xfrm>
-            <a:off x="6537960" y="2926080"/>
-            <a:ext cx="4572000" cy="320040"/>
-          </a:xfrm>
-          <a:prstGeom prst="rect">
-            <a:avLst/>
-          </a:prstGeom>
-          <a:noFill/>
-        </p:spPr>
-        <p:txBody>
-          <a:bodyPr wrap="square" lIns="0" rIns="0" tIns="0" bIns="0">
-            <a:spAutoFit/>
-          </a:bodyPr>
-          <a:lstStyle/>
-          <a:p>
-            <a:pPr algn="l"/>
-            <a:r>
-              <a:rPr sz="1200" b="1" i="0">
-                <a:solidFill>
-                  <a:srgbClr val="16273D"/>
-                </a:solidFill>
-                <a:latin typeface="Arial"/>
-              </a:rPr>
-              <a:t>Oregon State +20.5 at #23 Houston</a:t>
-            </a:r>
-          </a:p>
-        </p:txBody>
-      </p:sp>
-      <p:sp>
-        <p:nvSpPr>
-          <p:cNvPr id="17" name="TextBox 16"/>
-          <p:cNvSpPr txBox="1"/>
-          <p:nvPr/>
-        </p:nvSpPr>
-        <p:spPr>
-          <a:xfrm>
-            <a:off x="6537960" y="3255264"/>
-            <a:ext cx="4572000" cy="274320"/>
-          </a:xfrm>
-          <a:prstGeom prst="rect">
-            <a:avLst/>
-          </a:prstGeom>
-          <a:noFill/>
-        </p:spPr>
-        <p:txBody>
-          <a:bodyPr wrap="square" lIns="0" rIns="0" tIns="0" bIns="0">
-            <a:spAutoFit/>
-          </a:bodyPr>
-          <a:lstStyle/>
-          <a:p>
-            <a:pPr algn="l"/>
-            <a:r>
-              <a:rPr sz="1000" b="0" i="0">
-                <a:solidFill>
-                  <a:srgbClr val="5C6B7E"/>
-                </a:solidFill>
-                <a:latin typeface="Arial"/>
-              </a:rPr>
-              <a:t>model 17% · market 9% · expected pts 3.4</a:t>
-            </a:r>
-          </a:p>
-        </p:txBody>
-      </p:sp>
-      <p:sp>
-        <p:nvSpPr>
-          <p:cNvPr id="18" name="TextBox 17"/>
-          <p:cNvSpPr txBox="1"/>
-          <p:nvPr/>
-        </p:nvSpPr>
-        <p:spPr>
-          <a:xfrm>
-            <a:off x="6537960" y="3794760"/>
-            <a:ext cx="4572000" cy="320040"/>
-          </a:xfrm>
-          <a:prstGeom prst="rect">
-            <a:avLst/>
-          </a:prstGeom>
-          <a:noFill/>
-        </p:spPr>
-        <p:txBody>
-          <a:bodyPr wrap="square" lIns="0" rIns="0" tIns="0" bIns="0">
-            <a:spAutoFit/>
-          </a:bodyPr>
-          <a:lstStyle/>
-          <a:p>
-            <a:pPr algn="l"/>
-            <a:r>
-              <a:rPr sz="1200" b="1" i="0">
-                <a:solidFill>
-                  <a:srgbClr val="16273D"/>
-                </a:solidFill>
-                <a:latin typeface="Arial"/>
-              </a:rPr>
-              <a:t>Clemson +10.5 at #11 LSU</a:t>
-            </a:r>
-          </a:p>
-        </p:txBody>
-      </p:sp>
-      <p:sp>
-        <p:nvSpPr>
-          <p:cNvPr id="19" name="TextBox 18"/>
-          <p:cNvSpPr txBox="1"/>
-          <p:nvPr/>
-        </p:nvSpPr>
-        <p:spPr>
-          <a:xfrm>
-            <a:off x="6537960" y="4123944"/>
-            <a:ext cx="4572000" cy="274320"/>
-          </a:xfrm>
-          <a:prstGeom prst="rect">
-            <a:avLst/>
-          </a:prstGeom>
-          <a:noFill/>
-        </p:spPr>
-        <p:txBody>
-          <a:bodyPr wrap="square" lIns="0" rIns="0" tIns="0" bIns="0">
-            <a:spAutoFit/>
-          </a:bodyPr>
-          <a:lstStyle/>
-          <a:p>
-            <a:pPr algn="l"/>
-            <a:r>
-              <a:rPr sz="1000" b="0" i="0">
-                <a:solidFill>
-                  <a:srgbClr val="5C6B7E"/>
-                </a:solidFill>
-                <a:latin typeface="Arial"/>
-              </a:rPr>
-              <a:t>model 30% · market 24% · expected pts 3.2</a:t>
-            </a:r>
-          </a:p>
-        </p:txBody>
-      </p:sp>
-      <p:sp>
-        <p:nvSpPr>
-          <p:cNvPr id="20" name="TextBox 19"/>
-          <p:cNvSpPr txBox="1"/>
-          <p:nvPr/>
-        </p:nvSpPr>
-        <p:spPr>
-          <a:xfrm>
-            <a:off x="6537960" y="4892040"/>
-            <a:ext cx="4572000" cy="822960"/>
-          </a:xfrm>
-          <a:prstGeom prst="rect">
-            <a:avLst/>
-          </a:prstGeom>
-          <a:noFill/>
-        </p:spPr>
-        <p:txBody>
-          <a:bodyPr wrap="square" lIns="0" rIns="0" tIns="0" bIns="0">
-            <a:spAutoFit/>
-          </a:bodyPr>
-          <a:lstStyle/>
-          <a:p>
-            <a:pPr algn="l"/>
-            <a:r>
-              <a:rPr sz="1050" b="0" i="1">
-                <a:solidFill>
-                  <a:srgbClr val="16273D"/>
-                </a:solidFill>
-                <a:latin typeface="Arial"/>
-              </a:rPr>
-              <a:t>Most likely ranked upset: Florida State +3 vs #19 SMU — 52% (low points, high cash rate)</a:t>
-            </a:r>
-          </a:p>
-        </p:txBody>
-      </p:sp>
-      <p:sp>
-        <p:nvSpPr>
-          <p:cNvPr id="21" name="TextBox 20"/>
-          <p:cNvSpPr txBox="1"/>
-          <p:nvPr/>
-        </p:nvSpPr>
-        <p:spPr>
-          <a:xfrm>
-            <a:off x="822960" y="6126480"/>
-            <a:ext cx="10515600" cy="457200"/>
-          </a:xfrm>
-          <a:prstGeom prst="rect">
-            <a:avLst/>
-          </a:prstGeom>
-          <a:noFill/>
-        </p:spPr>
-        <p:txBody>
-          <a:bodyPr wrap="square" lIns="0" rIns="0" tIns="0" bIns="0">
-            <a:spAutoFit/>
-          </a:bodyPr>
-          <a:lstStyle/>
-          <a:p>
-            <a:pPr algn="l"/>
-            <a:r>
-              <a:rPr sz="1000" b="0" i="1">
-                <a:solidFill>
-                  <a:srgbClr val="5C6B7E"/>
-                </a:solidFill>
-                <a:latin typeface="Arial"/>
-              </a:rPr>
-              <a:t>Honesty: model probs ride preseason priors and σ 17.9 — the biggest model-vs-market gaps sit exactly where the favorite-longshot bias lives. A points game between hosts, not a betting card.</a:t>
-            </a:r>
-          </a:p>
-        </p:txBody>
-      </p:sp>
-      <p:sp>
-        <p:nvSpPr>
-          <p:cNvPr id="22" name="TextBox 21"/>
           <p:cNvSpPr txBox="1"/>
           <p:nvPr/>
         </p:nvSpPr>

--- a/decks/2026_Week1_Episode2.pptx
+++ b/decks/2026_Week1_Episode2.pptx
@@ -23,7 +23,6 @@
     <p:sldId id="271" r:id="rId22"/>
     <p:sldId id="272" r:id="rId23"/>
     <p:sldId id="273" r:id="rId24"/>
-    <p:sldId id="274" r:id="rId25"/>
   </p:sldIdLst>
   <p:sldSz cx="12191695" cy="6858000" type="screen4x3"/>
   <p:notesSz cx="6858000" cy="9144000"/>
@@ -11575,540 +11574,6 @@
     <p:bg>
       <p:bgPr>
         <a:solidFill>
-          <a:srgbClr val="FFFFFF"/>
-        </a:solidFill>
-        <a:effectLst/>
-      </p:bgPr>
-    </p:bg>
-    <p:spTree>
-      <p:nvGrpSpPr>
-        <p:cNvPr id="1" name=""/>
-        <p:cNvGrpSpPr/>
-        <p:nvPr/>
-      </p:nvGrpSpPr>
-      <p:grpSpPr/>
-      <p:sp>
-        <p:nvSpPr>
-          <p:cNvPr id="2" name="TextBox 1"/>
-          <p:cNvSpPr txBox="1"/>
-          <p:nvPr/>
-        </p:nvSpPr>
-        <p:spPr>
-          <a:xfrm>
-            <a:off x="822960" y="457200"/>
-            <a:ext cx="10515600" cy="502920"/>
-          </a:xfrm>
-          <a:prstGeom prst="rect">
-            <a:avLst/>
-          </a:prstGeom>
-          <a:noFill/>
-        </p:spPr>
-        <p:txBody>
-          <a:bodyPr wrap="square" lIns="0" rIns="0" tIns="0" bIns="0">
-            <a:spAutoFit/>
-          </a:bodyPr>
-          <a:lstStyle/>
-          <a:p>
-            <a:pPr algn="l"/>
-            <a:r>
-              <a:rPr sz="3000" b="1" i="0">
-                <a:solidFill>
-                  <a:srgbClr val="0A2851"/>
-                </a:solidFill>
-                <a:latin typeface="Arial"/>
-              </a:rPr>
-              <a:t>Superdog Picks</a:t>
-            </a:r>
-          </a:p>
-        </p:txBody>
-      </p:sp>
-      <p:sp>
-        <p:nvSpPr>
-          <p:cNvPr id="3" name="TextBox 2"/>
-          <p:cNvSpPr txBox="1"/>
-          <p:nvPr/>
-        </p:nvSpPr>
-        <p:spPr>
-          <a:xfrm>
-            <a:off x="822960" y="987552"/>
-            <a:ext cx="10515600" cy="274320"/>
-          </a:xfrm>
-          <a:prstGeom prst="rect">
-            <a:avLst/>
-          </a:prstGeom>
-          <a:noFill/>
-        </p:spPr>
-        <p:txBody>
-          <a:bodyPr wrap="square" lIns="0" rIns="0" tIns="0" bIns="0">
-            <a:spAutoFit/>
-          </a:bodyPr>
-          <a:lstStyle/>
-          <a:p>
-            <a:pPr algn="l"/>
-            <a:r>
-              <a:rPr sz="1100" b="0" i="1">
-                <a:solidFill>
-                  <a:srgbClr val="5C6B7E"/>
-                </a:solidFill>
-                <a:latin typeface="Arial"/>
-              </a:rPr>
-              <a:t>Pick a dog to WIN OUTRIGHT — points = the spread · machine board: model win prob vs market, expected points = prob × spread</a:t>
-            </a:r>
-          </a:p>
-        </p:txBody>
-      </p:sp>
-      <p:sp>
-        <p:nvSpPr>
-          <p:cNvPr id="4" name="Rounded Rectangle 3"/>
-          <p:cNvSpPr/>
-          <p:nvPr/>
-        </p:nvSpPr>
-        <p:spPr>
-          <a:xfrm>
-            <a:off x="822960" y="1554480"/>
-            <a:ext cx="5074920" cy="2834640"/>
-          </a:xfrm>
-          <a:prstGeom prst="roundRect">
-            <a:avLst/>
-          </a:prstGeom>
-          <a:solidFill>
-            <a:srgbClr val="EAF0F8"/>
-          </a:solidFill>
-          <a:ln>
-            <a:noFill/>
-          </a:ln>
-          <a:effectLst/>
-        </p:spPr>
-        <p:style>
-          <a:lnRef idx="1">
-            <a:schemeClr val="accent1"/>
-          </a:lnRef>
-          <a:fillRef idx="3">
-            <a:schemeClr val="accent1"/>
-          </a:fillRef>
-          <a:effectRef idx="2">
-            <a:schemeClr val="accent1"/>
-          </a:effectRef>
-          <a:fontRef idx="minor">
-            <a:schemeClr val="lt1"/>
-          </a:fontRef>
-        </p:style>
-        <p:txBody>
-          <a:bodyPr rtlCol="0" anchor="ctr"/>
-          <a:lstStyle/>
-          <a:p>
-            <a:pPr algn="ctr"/>
-          </a:p>
-        </p:txBody>
-      </p:sp>
-      <p:sp>
-        <p:nvSpPr>
-          <p:cNvPr id="5" name="TextBox 4"/>
-          <p:cNvSpPr txBox="1"/>
-          <p:nvPr/>
-        </p:nvSpPr>
-        <p:spPr>
-          <a:xfrm>
-            <a:off x="1097280" y="1783080"/>
-            <a:ext cx="4572000" cy="274320"/>
-          </a:xfrm>
-          <a:prstGeom prst="rect">
-            <a:avLst/>
-          </a:prstGeom>
-          <a:noFill/>
-        </p:spPr>
-        <p:txBody>
-          <a:bodyPr wrap="square" lIns="0" rIns="0" tIns="0" bIns="0">
-            <a:spAutoFit/>
-          </a:bodyPr>
-          <a:lstStyle/>
-          <a:p>
-            <a:pPr algn="l"/>
-            <a:r>
-              <a:rPr sz="1200" b="1" i="0">
-                <a:solidFill>
-                  <a:srgbClr val="F47321"/>
-                </a:solidFill>
-                <a:latin typeface="Arial"/>
-              </a:rPr>
-              <a:t>ANY GAME</a:t>
-            </a:r>
-          </a:p>
-        </p:txBody>
-      </p:sp>
-      <p:sp>
-        <p:nvSpPr>
-          <p:cNvPr id="6" name="TextBox 5"/>
-          <p:cNvSpPr txBox="1"/>
-          <p:nvPr/>
-        </p:nvSpPr>
-        <p:spPr>
-          <a:xfrm>
-            <a:off x="1097280" y="2240280"/>
-            <a:ext cx="4572000" cy="457200"/>
-          </a:xfrm>
-          <a:prstGeom prst="rect">
-            <a:avLst/>
-          </a:prstGeom>
-          <a:noFill/>
-        </p:spPr>
-        <p:txBody>
-          <a:bodyPr wrap="square" lIns="0" rIns="0" tIns="0" bIns="0">
-            <a:spAutoFit/>
-          </a:bodyPr>
-          <a:lstStyle/>
-          <a:p>
-            <a:pPr algn="l"/>
-            <a:r>
-              <a:rPr sz="1700" b="1" i="0">
-                <a:solidFill>
-                  <a:srgbClr val="F47321"/>
-                </a:solidFill>
-                <a:latin typeface="Arial"/>
-              </a:rPr>
-              <a:t>★ Coastal Carolina +21.5 at West Virginia</a:t>
-            </a:r>
-          </a:p>
-        </p:txBody>
-      </p:sp>
-      <p:sp>
-        <p:nvSpPr>
-          <p:cNvPr id="7" name="TextBox 6"/>
-          <p:cNvSpPr txBox="1"/>
-          <p:nvPr/>
-        </p:nvSpPr>
-        <p:spPr>
-          <a:xfrm>
-            <a:off x="1097280" y="2788920"/>
-            <a:ext cx="4572000" cy="274320"/>
-          </a:xfrm>
-          <a:prstGeom prst="rect">
-            <a:avLst/>
-          </a:prstGeom>
-          <a:noFill/>
-        </p:spPr>
-        <p:txBody>
-          <a:bodyPr wrap="square" lIns="0" rIns="0" tIns="0" bIns="0">
-            <a:spAutoFit/>
-          </a:bodyPr>
-          <a:lstStyle/>
-          <a:p>
-            <a:pPr algn="l"/>
-            <a:r>
-              <a:rPr sz="1050" b="0" i="0">
-                <a:solidFill>
-                  <a:srgbClr val="5C6B7E"/>
-                </a:solidFill>
-                <a:latin typeface="Arial"/>
-              </a:rPr>
-              <a:t>model 21% to win outright · market 9% · expected pts 4.4</a:t>
-            </a:r>
-          </a:p>
-        </p:txBody>
-      </p:sp>
-      <p:sp>
-        <p:nvSpPr>
-          <p:cNvPr id="8" name="TextBox 7"/>
-          <p:cNvSpPr txBox="1"/>
-          <p:nvPr/>
-        </p:nvSpPr>
-        <p:spPr>
-          <a:xfrm>
-            <a:off x="1097280" y="3246120"/>
-            <a:ext cx="4572000" cy="868680"/>
-          </a:xfrm>
-          <a:prstGeom prst="rect">
-            <a:avLst/>
-          </a:prstGeom>
-          <a:noFill/>
-        </p:spPr>
-        <p:txBody>
-          <a:bodyPr wrap="square" lIns="0" rIns="0" tIns="0" bIns="0">
-            <a:spAutoFit/>
-          </a:bodyPr>
-          <a:lstStyle/>
-          <a:p>
-            <a:pPr algn="l"/>
-            <a:r>
-              <a:rPr sz="1100" b="0" i="1">
-                <a:solidFill>
-                  <a:srgbClr val="16273D"/>
-                </a:solidFill>
-                <a:latin typeface="Arial"/>
-              </a:rPr>
-              <a:t>The board's biggest model-vs-market fight — the machine never bought the move from −17.5 to −21.5.</a:t>
-            </a:r>
-          </a:p>
-        </p:txBody>
-      </p:sp>
-      <p:sp>
-        <p:nvSpPr>
-          <p:cNvPr id="9" name="Rounded Rectangle 8"/>
-          <p:cNvSpPr/>
-          <p:nvPr/>
-        </p:nvSpPr>
-        <p:spPr>
-          <a:xfrm>
-            <a:off x="6263640" y="1554480"/>
-            <a:ext cx="5074920" cy="2834640"/>
-          </a:xfrm>
-          <a:prstGeom prst="roundRect">
-            <a:avLst/>
-          </a:prstGeom>
-          <a:solidFill>
-            <a:srgbClr val="EAF0F8"/>
-          </a:solidFill>
-          <a:ln>
-            <a:noFill/>
-          </a:ln>
-          <a:effectLst/>
-        </p:spPr>
-        <p:style>
-          <a:lnRef idx="1">
-            <a:schemeClr val="accent1"/>
-          </a:lnRef>
-          <a:fillRef idx="3">
-            <a:schemeClr val="accent1"/>
-          </a:fillRef>
-          <a:effectRef idx="2">
-            <a:schemeClr val="accent1"/>
-          </a:effectRef>
-          <a:fontRef idx="minor">
-            <a:schemeClr val="lt1"/>
-          </a:fontRef>
-        </p:style>
-        <p:txBody>
-          <a:bodyPr rtlCol="0" anchor="ctr"/>
-          <a:lstStyle/>
-          <a:p>
-            <a:pPr algn="ctr"/>
-          </a:p>
-        </p:txBody>
-      </p:sp>
-      <p:sp>
-        <p:nvSpPr>
-          <p:cNvPr id="10" name="TextBox 9"/>
-          <p:cNvSpPr txBox="1"/>
-          <p:nvPr/>
-        </p:nvSpPr>
-        <p:spPr>
-          <a:xfrm>
-            <a:off x="6537960" y="1783080"/>
-            <a:ext cx="4572000" cy="274320"/>
-          </a:xfrm>
-          <a:prstGeom prst="rect">
-            <a:avLst/>
-          </a:prstGeom>
-          <a:noFill/>
-        </p:spPr>
-        <p:txBody>
-          <a:bodyPr wrap="square" lIns="0" rIns="0" tIns="0" bIns="0">
-            <a:spAutoFit/>
-          </a:bodyPr>
-          <a:lstStyle/>
-          <a:p>
-            <a:pPr algn="l"/>
-            <a:r>
-              <a:rPr sz="1200" b="1" i="0">
-                <a:solidFill>
-                  <a:srgbClr val="F47321"/>
-                </a:solidFill>
-                <a:latin typeface="Arial"/>
-              </a:rPr>
-              <a:t>GIANT KILLER — dog vs an AP top-25 team</a:t>
-            </a:r>
-          </a:p>
-        </p:txBody>
-      </p:sp>
-      <p:sp>
-        <p:nvSpPr>
-          <p:cNvPr id="11" name="TextBox 10"/>
-          <p:cNvSpPr txBox="1"/>
-          <p:nvPr/>
-        </p:nvSpPr>
-        <p:spPr>
-          <a:xfrm>
-            <a:off x="6537960" y="2240280"/>
-            <a:ext cx="4572000" cy="457200"/>
-          </a:xfrm>
-          <a:prstGeom prst="rect">
-            <a:avLst/>
-          </a:prstGeom>
-          <a:noFill/>
-        </p:spPr>
-        <p:txBody>
-          <a:bodyPr wrap="square" lIns="0" rIns="0" tIns="0" bIns="0">
-            <a:spAutoFit/>
-          </a:bodyPr>
-          <a:lstStyle/>
-          <a:p>
-            <a:pPr algn="l"/>
-            <a:r>
-              <a:rPr sz="1700" b="1" i="0">
-                <a:solidFill>
-                  <a:srgbClr val="F47321"/>
-                </a:solidFill>
-                <a:latin typeface="Arial"/>
-              </a:rPr>
-              <a:t>★ Washington State +23.5 at #17 Washington</a:t>
-            </a:r>
-          </a:p>
-        </p:txBody>
-      </p:sp>
-      <p:sp>
-        <p:nvSpPr>
-          <p:cNvPr id="12" name="TextBox 11"/>
-          <p:cNvSpPr txBox="1"/>
-          <p:nvPr/>
-        </p:nvSpPr>
-        <p:spPr>
-          <a:xfrm>
-            <a:off x="6537960" y="2788920"/>
-            <a:ext cx="4572000" cy="274320"/>
-          </a:xfrm>
-          <a:prstGeom prst="rect">
-            <a:avLst/>
-          </a:prstGeom>
-          <a:noFill/>
-        </p:spPr>
-        <p:txBody>
-          <a:bodyPr wrap="square" lIns="0" rIns="0" tIns="0" bIns="0">
-            <a:spAutoFit/>
-          </a:bodyPr>
-          <a:lstStyle/>
-          <a:p>
-            <a:pPr algn="l"/>
-            <a:r>
-              <a:rPr sz="1050" b="0" i="0">
-                <a:solidFill>
-                  <a:srgbClr val="5C6B7E"/>
-                </a:solidFill>
-                <a:latin typeface="Arial"/>
-              </a:rPr>
-              <a:t>model 18% to win outright · market 7% · expected pts 4.3</a:t>
-            </a:r>
-          </a:p>
-        </p:txBody>
-      </p:sp>
-      <p:sp>
-        <p:nvSpPr>
-          <p:cNvPr id="13" name="TextBox 12"/>
-          <p:cNvSpPr txBox="1"/>
-          <p:nvPr/>
-        </p:nvSpPr>
-        <p:spPr>
-          <a:xfrm>
-            <a:off x="6537960" y="3246120"/>
-            <a:ext cx="4572000" cy="868680"/>
-          </a:xfrm>
-          <a:prstGeom prst="rect">
-            <a:avLst/>
-          </a:prstGeom>
-          <a:noFill/>
-        </p:spPr>
-        <p:txBody>
-          <a:bodyPr wrap="square" lIns="0" rIns="0" tIns="0" bIns="0">
-            <a:spAutoFit/>
-          </a:bodyPr>
-          <a:lstStyle/>
-          <a:p>
-            <a:pPr algn="l"/>
-            <a:r>
-              <a:rPr sz="1100" b="0" i="1">
-                <a:solidFill>
-                  <a:srgbClr val="16273D"/>
-                </a:solidFill>
-                <a:latin typeface="Arial"/>
-              </a:rPr>
-              <a:t>The Apple Cup — rivalry chaos at a 23-point price, and the machine has the dog at more than double the market's chance.</a:t>
-            </a:r>
-          </a:p>
-        </p:txBody>
-      </p:sp>
-      <p:sp>
-        <p:nvSpPr>
-          <p:cNvPr id="14" name="TextBox 13"/>
-          <p:cNvSpPr txBox="1"/>
-          <p:nvPr/>
-        </p:nvSpPr>
-        <p:spPr>
-          <a:xfrm>
-            <a:off x="822960" y="4800600"/>
-            <a:ext cx="10515600" cy="457200"/>
-          </a:xfrm>
-          <a:prstGeom prst="rect">
-            <a:avLst/>
-          </a:prstGeom>
-          <a:noFill/>
-        </p:spPr>
-        <p:txBody>
-          <a:bodyPr wrap="square" lIns="0" rIns="0" tIns="0" bIns="0">
-            <a:spAutoFit/>
-          </a:bodyPr>
-          <a:lstStyle/>
-          <a:p>
-            <a:pPr algn="l"/>
-            <a:r>
-              <a:rPr sz="1000" b="0" i="1">
-                <a:solidFill>
-                  <a:srgbClr val="5C6B7E"/>
-                </a:solidFill>
-                <a:latin typeface="Arial"/>
-              </a:rPr>
-              <a:t>Honesty: model probs ride preseason priors and σ 17.9 — the biggest model-vs-market gaps sit exactly where the favorite-longshot bias lives. A points game between hosts, not a betting card.</a:t>
-            </a:r>
-          </a:p>
-        </p:txBody>
-      </p:sp>
-      <p:sp>
-        <p:nvSpPr>
-          <p:cNvPr id="15" name="TextBox 14"/>
-          <p:cNvSpPr txBox="1"/>
-          <p:nvPr/>
-        </p:nvSpPr>
-        <p:spPr>
-          <a:xfrm>
-            <a:off x="822960" y="6519672"/>
-            <a:ext cx="10515600" cy="274320"/>
-          </a:xfrm>
-          <a:prstGeom prst="rect">
-            <a:avLst/>
-          </a:prstGeom>
-          <a:noFill/>
-        </p:spPr>
-        <p:txBody>
-          <a:bodyPr wrap="square" lIns="0" rIns="0" tIns="0" bIns="0">
-            <a:spAutoFit/>
-          </a:bodyPr>
-          <a:lstStyle/>
-          <a:p>
-            <a:pPr algn="l"/>
-            <a:r>
-              <a:rPr sz="900" b="0" i="0">
-                <a:solidFill>
-                  <a:srgbClr val="5C6B7E"/>
-                </a:solidFill>
-                <a:latin typeface="Arial"/>
-              </a:rPr>
-              <a:t>EP 2 · WEEK 1 · SUPERDOG PICKS</a:t>
-            </a:r>
-          </a:p>
-        </p:txBody>
-      </p:sp>
-    </p:spTree>
-  </p:cSld>
-  <p:clrMapOvr>
-    <a:masterClrMapping/>
-  </p:clrMapOvr>
-</p:sld>
-</file>
-
-<file path=ppt/slides/slide19.xml><?xml version="1.0" encoding="utf-8"?>
-<p:sld xmlns:a="http://schemas.openxmlformats.org/drawingml/2006/main" xmlns:p="http://schemas.openxmlformats.org/presentationml/2006/main" xmlns:r="http://schemas.openxmlformats.org/officeDocument/2006/relationships">
-  <p:cSld>
-    <p:bg>
-      <p:bgPr>
-        <a:solidFill>
           <a:srgbClr val="0A2851"/>
         </a:solidFill>
         <a:effectLst/>
@@ -12129,7 +11594,7 @@
         </p:nvSpPr>
         <p:spPr>
           <a:xfrm>
-            <a:off x="822960" y="640080"/>
+            <a:off x="822960" y="502920"/>
             <a:ext cx="10515600" cy="411480"/>
           </a:xfrm>
           <a:prstGeom prst="rect">
@@ -12151,7 +11616,7 @@
                 </a:solidFill>
                 <a:latin typeface="Arial"/>
               </a:rPr>
-              <a:t>EPISODE 2 · THE CARD · OUR PREDICTIONS</a:t>
+              <a:t>EPISODE 2 · THE CARD</a:t>
             </a:r>
           </a:p>
         </p:txBody>
@@ -12164,8 +11629,8 @@
         </p:nvSpPr>
         <p:spPr>
           <a:xfrm>
-            <a:off x="822960" y="1005840"/>
-            <a:ext cx="10515600" cy="822960"/>
+            <a:off x="822960" y="868680"/>
+            <a:ext cx="10515600" cy="731520"/>
           </a:xfrm>
           <a:prstGeom prst="rect">
             <a:avLst/>
@@ -12186,7 +11651,7 @@
                 </a:solidFill>
                 <a:latin typeface="Arial"/>
               </a:rPr>
-              <a:t>Where the machine stands</a:t>
+              <a:t>Our predictions</a:t>
             </a:r>
           </a:p>
         </p:txBody>
@@ -12199,8 +11664,8 @@
         </p:nvSpPr>
         <p:spPr>
           <a:xfrm>
-            <a:off x="822960" y="1965960"/>
-            <a:ext cx="10515600" cy="768096"/>
+            <a:off x="822960" y="1783080"/>
+            <a:ext cx="10515600" cy="658368"/>
           </a:xfrm>
           <a:prstGeom prst="roundRect">
             <a:avLst/>
@@ -12243,8 +11708,8 @@
         </p:nvSpPr>
         <p:spPr>
           <a:xfrm>
-            <a:off x="1005840" y="2075688"/>
-            <a:ext cx="548640" cy="548640"/>
+            <a:off x="1005840" y="1874519"/>
+            <a:ext cx="475488" cy="475488"/>
           </a:xfrm>
           <a:prstGeom prst="ellipse">
             <a:avLst/>
@@ -12295,8 +11760,8 @@
         </p:blipFill>
         <p:spPr>
           <a:xfrm>
-            <a:off x="1060704" y="2130552"/>
-            <a:ext cx="438912" cy="438912"/>
+            <a:off x="1053388" y="1922068"/>
+            <a:ext cx="380390" cy="380390"/>
           </a:xfrm>
           <a:prstGeom prst="rect">
             <a:avLst/>
@@ -12311,8 +11776,8 @@
         </p:nvSpPr>
         <p:spPr>
           <a:xfrm>
-            <a:off x="1691640" y="2075688"/>
-            <a:ext cx="548640" cy="548640"/>
+            <a:off x="1600200" y="1874519"/>
+            <a:ext cx="475488" cy="475488"/>
           </a:xfrm>
           <a:prstGeom prst="ellipse">
             <a:avLst/>
@@ -12363,8 +11828,8 @@
         </p:blipFill>
         <p:spPr>
           <a:xfrm>
-            <a:off x="1746504" y="2130552"/>
-            <a:ext cx="438912" cy="438912"/>
+            <a:off x="1647748" y="1922068"/>
+            <a:ext cx="380390" cy="380390"/>
           </a:xfrm>
           <a:prstGeom prst="rect">
             <a:avLst/>
@@ -12379,7 +11844,7 @@
         </p:nvSpPr>
         <p:spPr>
           <a:xfrm>
-            <a:off x="2468880" y="2039112"/>
+            <a:off x="2286000" y="1956816"/>
             <a:ext cx="4937760" cy="365760"/>
           </a:xfrm>
           <a:prstGeom prst="rect">
@@ -12395,7 +11860,7 @@
           <a:p>
             <a:pPr algn="l"/>
             <a:r>
-              <a:rPr sz="1450" b="1" i="0">
+              <a:rPr sz="1400" b="1" i="0">
                 <a:solidFill>
                   <a:srgbClr val="FFFFFF"/>
                 </a:solidFill>
@@ -12414,29 +11879,29 @@
         </p:nvSpPr>
         <p:spPr>
           <a:xfrm>
-            <a:off x="2468880" y="2368296"/>
-            <a:ext cx="4937760" cy="347472"/>
-          </a:xfrm>
-          <a:prstGeom prst="rect">
-            <a:avLst/>
-          </a:prstGeom>
-          <a:noFill/>
-        </p:spPr>
-        <p:txBody>
-          <a:bodyPr wrap="square" lIns="0" rIns="0" tIns="0" bIns="0">
-            <a:spAutoFit/>
-          </a:bodyPr>
-          <a:lstStyle/>
-          <a:p>
-            <a:pPr algn="l"/>
-            <a:r>
-              <a:rPr sz="950" b="0" i="0">
-                <a:solidFill>
-                  <a:srgbClr val="CADCFC"/>
-                </a:solidFill>
-                <a:latin typeface="Arial"/>
-              </a:rPr>
-              <a:t>first-seen –6.5 (Aug 18) → now –7 · CLV -0.5</a:t>
+            <a:off x="6400800" y="1865376"/>
+            <a:ext cx="4754880" cy="384048"/>
+          </a:xfrm>
+          <a:prstGeom prst="rect">
+            <a:avLst/>
+          </a:prstGeom>
+          <a:noFill/>
+        </p:spPr>
+        <p:txBody>
+          <a:bodyPr wrap="square" lIns="0" rIns="0" tIns="0" bIns="0">
+            <a:spAutoFit/>
+          </a:bodyPr>
+          <a:lstStyle/>
+          <a:p>
+            <a:pPr algn="r"/>
+            <a:r>
+              <a:rPr sz="1550" b="1" i="0">
+                <a:solidFill>
+                  <a:srgbClr val="F47321"/>
+                </a:solidFill>
+                <a:latin typeface="Arial"/>
+              </a:rPr>
+              <a:t>Auburn 33 – Baylor 27</a:t>
             </a:r>
           </a:p>
         </p:txBody>
@@ -12449,8 +11914,8 @@
         </p:nvSpPr>
         <p:spPr>
           <a:xfrm>
-            <a:off x="7406640" y="2020824"/>
-            <a:ext cx="3749039" cy="384048"/>
+            <a:off x="6400800" y="2212848"/>
+            <a:ext cx="4754880" cy="228600"/>
           </a:xfrm>
           <a:prstGeom prst="rect">
             <a:avLst/>
@@ -12465,62 +11930,27 @@
           <a:p>
             <a:pPr algn="r"/>
             <a:r>
-              <a:rPr sz="1550" b="1" i="0">
-                <a:solidFill>
-                  <a:srgbClr val="F47321"/>
-                </a:solidFill>
-                <a:latin typeface="Arial"/>
-              </a:rPr>
-              <a:t>Auburn 33 – Baylor 27</a:t>
-            </a:r>
-          </a:p>
-        </p:txBody>
-      </p:sp>
-      <p:sp>
-        <p:nvSpPr>
-          <p:cNvPr id="12" name="TextBox 11"/>
-          <p:cNvSpPr txBox="1"/>
-          <p:nvPr/>
-        </p:nvSpPr>
-        <p:spPr>
-          <a:xfrm>
-            <a:off x="7406640" y="2423160"/>
-            <a:ext cx="3749039" cy="274320"/>
-          </a:xfrm>
-          <a:prstGeom prst="rect">
-            <a:avLst/>
-          </a:prstGeom>
-          <a:noFill/>
-        </p:spPr>
-        <p:txBody>
-          <a:bodyPr wrap="square" lIns="0" rIns="0" tIns="0" bIns="0">
-            <a:spAutoFit/>
-          </a:bodyPr>
-          <a:lstStyle/>
-          <a:p>
-            <a:pPr algn="r"/>
-            <a:r>
               <a:rPr sz="850" b="0" i="0">
                 <a:solidFill>
                   <a:srgbClr val="8FA5C4"/>
                 </a:solidFill>
                 <a:latin typeface="Arial"/>
               </a:rPr>
-              <a:t>machine Auburn –5.5 · market –7 / –7</a:t>
-            </a:r>
-          </a:p>
-        </p:txBody>
-      </p:sp>
-      <p:sp>
-        <p:nvSpPr>
-          <p:cNvPr id="13" name="Rounded Rectangle 12"/>
+              <a:t>market –7 / –7</a:t>
+            </a:r>
+          </a:p>
+        </p:txBody>
+      </p:sp>
+      <p:sp>
+        <p:nvSpPr>
+          <p:cNvPr id="12" name="Rounded Rectangle 11"/>
           <p:cNvSpPr/>
           <p:nvPr/>
         </p:nvSpPr>
         <p:spPr>
           <a:xfrm>
-            <a:off x="822960" y="2807208"/>
-            <a:ext cx="10515600" cy="768096"/>
+            <a:off x="822960" y="2514600"/>
+            <a:ext cx="10515600" cy="658368"/>
           </a:xfrm>
           <a:prstGeom prst="roundRect">
             <a:avLst/>
@@ -12557,14 +11987,14 @@
       </p:sp>
       <p:sp>
         <p:nvSpPr>
-          <p:cNvPr id="14" name="Oval 13"/>
+          <p:cNvPr id="13" name="Oval 12"/>
           <p:cNvSpPr/>
           <p:nvPr/>
         </p:nvSpPr>
         <p:spPr>
           <a:xfrm>
-            <a:off x="1005840" y="2916936"/>
-            <a:ext cx="548640" cy="548640"/>
+            <a:off x="1005840" y="2606040"/>
+            <a:ext cx="475488" cy="475488"/>
           </a:xfrm>
           <a:prstGeom prst="ellipse">
             <a:avLst/>
@@ -12601,7 +12031,7 @@
       </p:sp>
       <p:pic>
         <p:nvPicPr>
-          <p:cNvPr id="15" name="Picture 14" descr="clemson.png"/>
+          <p:cNvPr id="14" name="Picture 13" descr="clemson.png"/>
           <p:cNvPicPr>
             <a:picLocks noChangeAspect="1"/>
           </p:cNvPicPr>
@@ -12615,8 +12045,8 @@
         </p:blipFill>
         <p:spPr>
           <a:xfrm>
-            <a:off x="1060704" y="2971800"/>
-            <a:ext cx="438912" cy="438912"/>
+            <a:off x="1053388" y="2653588"/>
+            <a:ext cx="380390" cy="380390"/>
           </a:xfrm>
           <a:prstGeom prst="rect">
             <a:avLst/>
@@ -12625,14 +12055,14 @@
       </p:pic>
       <p:sp>
         <p:nvSpPr>
-          <p:cNvPr id="16" name="Oval 15"/>
+          <p:cNvPr id="15" name="Oval 14"/>
           <p:cNvSpPr/>
           <p:nvPr/>
         </p:nvSpPr>
         <p:spPr>
           <a:xfrm>
-            <a:off x="1691640" y="2916936"/>
-            <a:ext cx="548640" cy="548640"/>
+            <a:off x="1600200" y="2606040"/>
+            <a:ext cx="475488" cy="475488"/>
           </a:xfrm>
           <a:prstGeom prst="ellipse">
             <a:avLst/>
@@ -12669,7 +12099,7 @@
       </p:sp>
       <p:pic>
         <p:nvPicPr>
-          <p:cNvPr id="17" name="Picture 16" descr="lsu.png"/>
+          <p:cNvPr id="16" name="Picture 15" descr="lsu.png"/>
           <p:cNvPicPr>
             <a:picLocks noChangeAspect="1"/>
           </p:cNvPicPr>
@@ -12683,8 +12113,8 @@
         </p:blipFill>
         <p:spPr>
           <a:xfrm>
-            <a:off x="1746504" y="2971800"/>
-            <a:ext cx="438912" cy="438912"/>
+            <a:off x="1647748" y="2653588"/>
+            <a:ext cx="380390" cy="380390"/>
           </a:xfrm>
           <a:prstGeom prst="rect">
             <a:avLst/>
@@ -12693,35 +12123,70 @@
       </p:pic>
       <p:sp>
         <p:nvSpPr>
+          <p:cNvPr id="17" name="TextBox 16"/>
+          <p:cNvSpPr txBox="1"/>
+          <p:nvPr/>
+        </p:nvSpPr>
+        <p:spPr>
+          <a:xfrm>
+            <a:off x="2286000" y="2688336"/>
+            <a:ext cx="4937760" cy="365760"/>
+          </a:xfrm>
+          <a:prstGeom prst="rect">
+            <a:avLst/>
+          </a:prstGeom>
+          <a:noFill/>
+        </p:spPr>
+        <p:txBody>
+          <a:bodyPr wrap="square" lIns="0" rIns="0" tIns="0" bIns="0">
+            <a:spAutoFit/>
+          </a:bodyPr>
+          <a:lstStyle/>
+          <a:p>
+            <a:pPr algn="l"/>
+            <a:r>
+              <a:rPr sz="1400" b="1" i="0">
+                <a:solidFill>
+                  <a:srgbClr val="FFFFFF"/>
+                </a:solidFill>
+                <a:latin typeface="Arial"/>
+              </a:rPr>
+              <a:t>Clemson at LSU</a:t>
+            </a:r>
+          </a:p>
+        </p:txBody>
+      </p:sp>
+      <p:sp>
+        <p:nvSpPr>
           <p:cNvPr id="18" name="TextBox 17"/>
           <p:cNvSpPr txBox="1"/>
           <p:nvPr/>
         </p:nvSpPr>
         <p:spPr>
           <a:xfrm>
-            <a:off x="2468880" y="2880360"/>
-            <a:ext cx="4937760" cy="365760"/>
-          </a:xfrm>
-          <a:prstGeom prst="rect">
-            <a:avLst/>
-          </a:prstGeom>
-          <a:noFill/>
-        </p:spPr>
-        <p:txBody>
-          <a:bodyPr wrap="square" lIns="0" rIns="0" tIns="0" bIns="0">
-            <a:spAutoFit/>
-          </a:bodyPr>
-          <a:lstStyle/>
-          <a:p>
-            <a:pPr algn="l"/>
-            <a:r>
-              <a:rPr sz="1450" b="1" i="0">
-                <a:solidFill>
-                  <a:srgbClr val="FFFFFF"/>
-                </a:solidFill>
-                <a:latin typeface="Arial"/>
-              </a:rPr>
-              <a:t>Clemson at LSU</a:t>
+            <a:off x="6400800" y="2596896"/>
+            <a:ext cx="4754880" cy="384048"/>
+          </a:xfrm>
+          <a:prstGeom prst="rect">
+            <a:avLst/>
+          </a:prstGeom>
+          <a:noFill/>
+        </p:spPr>
+        <p:txBody>
+          <a:bodyPr wrap="square" lIns="0" rIns="0" tIns="0" bIns="0">
+            <a:spAutoFit/>
+          </a:bodyPr>
+          <a:lstStyle/>
+          <a:p>
+            <a:pPr algn="r"/>
+            <a:r>
+              <a:rPr sz="1550" b="1" i="0">
+                <a:solidFill>
+                  <a:srgbClr val="F47321"/>
+                </a:solidFill>
+                <a:latin typeface="Arial"/>
+              </a:rPr>
+              <a:t>LSU 30 – Clemson 21</a:t>
             </a:r>
           </a:p>
         </p:txBody>
@@ -12734,43 +12199,8 @@
         </p:nvSpPr>
         <p:spPr>
           <a:xfrm>
-            <a:off x="2468880" y="3209544"/>
-            <a:ext cx="4937760" cy="347472"/>
-          </a:xfrm>
-          <a:prstGeom prst="rect">
-            <a:avLst/>
-          </a:prstGeom>
-          <a:noFill/>
-        </p:spPr>
-        <p:txBody>
-          <a:bodyPr wrap="square" lIns="0" rIns="0" tIns="0" bIns="0">
-            <a:spAutoFit/>
-          </a:bodyPr>
-          <a:lstStyle/>
-          <a:p>
-            <a:pPr algn="l"/>
-            <a:r>
-              <a:rPr sz="950" b="0" i="0">
-                <a:solidFill>
-                  <a:srgbClr val="CADCFC"/>
-                </a:solidFill>
-                <a:latin typeface="Arial"/>
-              </a:rPr>
-              <a:t>first-seen –10.5 (Aug 18) → now –10.5 · opened –11.5 · CLV +0</a:t>
-            </a:r>
-          </a:p>
-        </p:txBody>
-      </p:sp>
-      <p:sp>
-        <p:nvSpPr>
-          <p:cNvPr id="20" name="TextBox 19"/>
-          <p:cNvSpPr txBox="1"/>
-          <p:nvPr/>
-        </p:nvSpPr>
-        <p:spPr>
-          <a:xfrm>
-            <a:off x="7406640" y="2862072"/>
-            <a:ext cx="3749039" cy="384048"/>
+            <a:off x="6400800" y="2944368"/>
+            <a:ext cx="4754880" cy="228600"/>
           </a:xfrm>
           <a:prstGeom prst="rect">
             <a:avLst/>
@@ -12785,62 +12215,27 @@
           <a:p>
             <a:pPr algn="r"/>
             <a:r>
-              <a:rPr sz="1550" b="1" i="0">
-                <a:solidFill>
-                  <a:srgbClr val="F47321"/>
-                </a:solidFill>
-                <a:latin typeface="Arial"/>
-              </a:rPr>
-              <a:t>LSU 30 – Clemson 21</a:t>
-            </a:r>
-          </a:p>
-        </p:txBody>
-      </p:sp>
-      <p:sp>
-        <p:nvSpPr>
-          <p:cNvPr id="21" name="TextBox 20"/>
-          <p:cNvSpPr txBox="1"/>
-          <p:nvPr/>
-        </p:nvSpPr>
-        <p:spPr>
-          <a:xfrm>
-            <a:off x="7406640" y="3264408"/>
-            <a:ext cx="3749039" cy="274320"/>
-          </a:xfrm>
-          <a:prstGeom prst="rect">
-            <a:avLst/>
-          </a:prstGeom>
-          <a:noFill/>
-        </p:spPr>
-        <p:txBody>
-          <a:bodyPr wrap="square" lIns="0" rIns="0" tIns="0" bIns="0">
-            <a:spAutoFit/>
-          </a:bodyPr>
-          <a:lstStyle/>
-          <a:p>
-            <a:pPr algn="r"/>
-            <a:r>
               <a:rPr sz="850" b="0" i="0">
                 <a:solidFill>
                   <a:srgbClr val="8FA5C4"/>
                 </a:solidFill>
                 <a:latin typeface="Arial"/>
               </a:rPr>
-              <a:t>machine LSU –9 · market –10.5 / –10.5</a:t>
-            </a:r>
-          </a:p>
-        </p:txBody>
-      </p:sp>
-      <p:sp>
-        <p:nvSpPr>
-          <p:cNvPr id="22" name="Rounded Rectangle 21"/>
+              <a:t>market –10.5 / –10.5</a:t>
+            </a:r>
+          </a:p>
+        </p:txBody>
+      </p:sp>
+      <p:sp>
+        <p:nvSpPr>
+          <p:cNvPr id="20" name="Rounded Rectangle 19"/>
           <p:cNvSpPr/>
           <p:nvPr/>
         </p:nvSpPr>
         <p:spPr>
           <a:xfrm>
-            <a:off x="822960" y="3648456"/>
-            <a:ext cx="10515600" cy="768096"/>
+            <a:off x="822960" y="3246120"/>
+            <a:ext cx="10515600" cy="658368"/>
           </a:xfrm>
           <a:prstGeom prst="roundRect">
             <a:avLst/>
@@ -12877,14 +12272,14 @@
       </p:sp>
       <p:sp>
         <p:nvSpPr>
-          <p:cNvPr id="23" name="Oval 22"/>
+          <p:cNvPr id="21" name="Oval 20"/>
           <p:cNvSpPr/>
           <p:nvPr/>
         </p:nvSpPr>
         <p:spPr>
           <a:xfrm>
-            <a:off x="1005840" y="3758183"/>
-            <a:ext cx="548640" cy="548640"/>
+            <a:off x="1005840" y="3337560"/>
+            <a:ext cx="475488" cy="475488"/>
           </a:xfrm>
           <a:prstGeom prst="ellipse">
             <a:avLst/>
@@ -12921,7 +12316,7 @@
       </p:sp>
       <p:pic>
         <p:nvPicPr>
-          <p:cNvPr id="24" name="Picture 23" descr="louisville.png"/>
+          <p:cNvPr id="22" name="Picture 21" descr="louisville.png"/>
           <p:cNvPicPr>
             <a:picLocks noChangeAspect="1"/>
           </p:cNvPicPr>
@@ -12935,8 +12330,8 @@
         </p:blipFill>
         <p:spPr>
           <a:xfrm>
-            <a:off x="1060704" y="3813047"/>
-            <a:ext cx="438912" cy="438912"/>
+            <a:off x="1053388" y="3385108"/>
+            <a:ext cx="380390" cy="380390"/>
           </a:xfrm>
           <a:prstGeom prst="rect">
             <a:avLst/>
@@ -12945,14 +12340,14 @@
       </p:pic>
       <p:sp>
         <p:nvSpPr>
-          <p:cNvPr id="25" name="Oval 24"/>
+          <p:cNvPr id="23" name="Oval 22"/>
           <p:cNvSpPr/>
           <p:nvPr/>
         </p:nvSpPr>
         <p:spPr>
           <a:xfrm>
-            <a:off x="1691640" y="3758183"/>
-            <a:ext cx="548640" cy="548640"/>
+            <a:off x="1600200" y="3337560"/>
+            <a:ext cx="475488" cy="475488"/>
           </a:xfrm>
           <a:prstGeom prst="ellipse">
             <a:avLst/>
@@ -12989,7 +12384,7 @@
       </p:sp>
       <p:pic>
         <p:nvPicPr>
-          <p:cNvPr id="26" name="Picture 25" descr="olemiss.png"/>
+          <p:cNvPr id="24" name="Picture 23" descr="olemiss.png"/>
           <p:cNvPicPr>
             <a:picLocks noChangeAspect="1"/>
           </p:cNvPicPr>
@@ -13003,8 +12398,8 @@
         </p:blipFill>
         <p:spPr>
           <a:xfrm>
-            <a:off x="1746504" y="3813047"/>
-            <a:ext cx="438912" cy="438912"/>
+            <a:off x="1647748" y="3385108"/>
+            <a:ext cx="380390" cy="380390"/>
           </a:xfrm>
           <a:prstGeom prst="rect">
             <a:avLst/>
@@ -13013,84 +12408,84 @@
       </p:pic>
       <p:sp>
         <p:nvSpPr>
+          <p:cNvPr id="25" name="TextBox 24"/>
+          <p:cNvSpPr txBox="1"/>
+          <p:nvPr/>
+        </p:nvSpPr>
+        <p:spPr>
+          <a:xfrm>
+            <a:off x="2286000" y="3419856"/>
+            <a:ext cx="4937760" cy="365760"/>
+          </a:xfrm>
+          <a:prstGeom prst="rect">
+            <a:avLst/>
+          </a:prstGeom>
+          <a:noFill/>
+        </p:spPr>
+        <p:txBody>
+          <a:bodyPr wrap="square" lIns="0" rIns="0" tIns="0" bIns="0">
+            <a:spAutoFit/>
+          </a:bodyPr>
+          <a:lstStyle/>
+          <a:p>
+            <a:pPr algn="l"/>
+            <a:r>
+              <a:rPr sz="1400" b="1" i="0">
+                <a:solidFill>
+                  <a:srgbClr val="FFFFFF"/>
+                </a:solidFill>
+                <a:latin typeface="Arial"/>
+              </a:rPr>
+              <a:t>Louisville vs Ole Miss</a:t>
+            </a:r>
+          </a:p>
+        </p:txBody>
+      </p:sp>
+      <p:sp>
+        <p:nvSpPr>
+          <p:cNvPr id="26" name="TextBox 25"/>
+          <p:cNvSpPr txBox="1"/>
+          <p:nvPr/>
+        </p:nvSpPr>
+        <p:spPr>
+          <a:xfrm>
+            <a:off x="6400800" y="3328415"/>
+            <a:ext cx="4754880" cy="384048"/>
+          </a:xfrm>
+          <a:prstGeom prst="rect">
+            <a:avLst/>
+          </a:prstGeom>
+          <a:noFill/>
+        </p:spPr>
+        <p:txBody>
+          <a:bodyPr wrap="square" lIns="0" rIns="0" tIns="0" bIns="0">
+            <a:spAutoFit/>
+          </a:bodyPr>
+          <a:lstStyle/>
+          <a:p>
+            <a:pPr algn="r"/>
+            <a:r>
+              <a:rPr sz="1550" b="1" i="0">
+                <a:solidFill>
+                  <a:srgbClr val="F47321"/>
+                </a:solidFill>
+                <a:latin typeface="Arial"/>
+              </a:rPr>
+              <a:t>Ole Miss 31 – Louisville 25</a:t>
+            </a:r>
+          </a:p>
+        </p:txBody>
+      </p:sp>
+      <p:sp>
+        <p:nvSpPr>
           <p:cNvPr id="27" name="TextBox 26"/>
           <p:cNvSpPr txBox="1"/>
           <p:nvPr/>
         </p:nvSpPr>
         <p:spPr>
           <a:xfrm>
-            <a:off x="2468880" y="3721607"/>
-            <a:ext cx="4937760" cy="365760"/>
-          </a:xfrm>
-          <a:prstGeom prst="rect">
-            <a:avLst/>
-          </a:prstGeom>
-          <a:noFill/>
-        </p:spPr>
-        <p:txBody>
-          <a:bodyPr wrap="square" lIns="0" rIns="0" tIns="0" bIns="0">
-            <a:spAutoFit/>
-          </a:bodyPr>
-          <a:lstStyle/>
-          <a:p>
-            <a:pPr algn="l"/>
-            <a:r>
-              <a:rPr sz="1450" b="1" i="0">
-                <a:solidFill>
-                  <a:srgbClr val="FFFFFF"/>
-                </a:solidFill>
-                <a:latin typeface="Arial"/>
-              </a:rPr>
-              <a:t>Louisville vs Ole Miss</a:t>
-            </a:r>
-          </a:p>
-        </p:txBody>
-      </p:sp>
-      <p:sp>
-        <p:nvSpPr>
-          <p:cNvPr id="28" name="TextBox 27"/>
-          <p:cNvSpPr txBox="1"/>
-          <p:nvPr/>
-        </p:nvSpPr>
-        <p:spPr>
-          <a:xfrm>
-            <a:off x="2468880" y="4050791"/>
-            <a:ext cx="4937760" cy="347472"/>
-          </a:xfrm>
-          <a:prstGeom prst="rect">
-            <a:avLst/>
-          </a:prstGeom>
-          <a:noFill/>
-        </p:spPr>
-        <p:txBody>
-          <a:bodyPr wrap="square" lIns="0" rIns="0" tIns="0" bIns="0">
-            <a:spAutoFit/>
-          </a:bodyPr>
-          <a:lstStyle/>
-          <a:p>
-            <a:pPr algn="l"/>
-            <a:r>
-              <a:rPr sz="950" b="0" i="0">
-                <a:solidFill>
-                  <a:srgbClr val="CADCFC"/>
-                </a:solidFill>
-                <a:latin typeface="Arial"/>
-              </a:rPr>
-              <a:t>first-seen –6.5 (Aug 18) → now –7 · opened –8.5 · CLV -0.5</a:t>
-            </a:r>
-          </a:p>
-        </p:txBody>
-      </p:sp>
-      <p:sp>
-        <p:nvSpPr>
-          <p:cNvPr id="29" name="TextBox 28"/>
-          <p:cNvSpPr txBox="1"/>
-          <p:nvPr/>
-        </p:nvSpPr>
-        <p:spPr>
-          <a:xfrm>
-            <a:off x="7406640" y="3703320"/>
-            <a:ext cx="3749039" cy="384048"/>
+            <a:off x="6400800" y="3675887"/>
+            <a:ext cx="4754880" cy="228600"/>
           </a:xfrm>
           <a:prstGeom prst="rect">
             <a:avLst/>
@@ -13105,62 +12500,27 @@
           <a:p>
             <a:pPr algn="r"/>
             <a:r>
-              <a:rPr sz="1550" b="1" i="0">
-                <a:solidFill>
-                  <a:srgbClr val="F47321"/>
-                </a:solidFill>
-                <a:latin typeface="Arial"/>
-              </a:rPr>
-              <a:t>Ole Miss 31 – Louisville 25</a:t>
-            </a:r>
-          </a:p>
-        </p:txBody>
-      </p:sp>
-      <p:sp>
-        <p:nvSpPr>
-          <p:cNvPr id="30" name="TextBox 29"/>
-          <p:cNvSpPr txBox="1"/>
-          <p:nvPr/>
-        </p:nvSpPr>
-        <p:spPr>
-          <a:xfrm>
-            <a:off x="7406640" y="4105656"/>
-            <a:ext cx="3749039" cy="274320"/>
-          </a:xfrm>
-          <a:prstGeom prst="rect">
-            <a:avLst/>
-          </a:prstGeom>
-          <a:noFill/>
-        </p:spPr>
-        <p:txBody>
-          <a:bodyPr wrap="square" lIns="0" rIns="0" tIns="0" bIns="0">
-            <a:spAutoFit/>
-          </a:bodyPr>
-          <a:lstStyle/>
-          <a:p>
-            <a:pPr algn="r"/>
-            <a:r>
               <a:rPr sz="850" b="0" i="0">
                 <a:solidFill>
                   <a:srgbClr val="8FA5C4"/>
                 </a:solidFill>
                 <a:latin typeface="Arial"/>
               </a:rPr>
-              <a:t>machine Ole Miss –6.5 · market –7 / –6.5</a:t>
-            </a:r>
-          </a:p>
-        </p:txBody>
-      </p:sp>
-      <p:sp>
-        <p:nvSpPr>
-          <p:cNvPr id="31" name="Rounded Rectangle 30"/>
+              <a:t>market –7 / –6.5</a:t>
+            </a:r>
+          </a:p>
+        </p:txBody>
+      </p:sp>
+      <p:sp>
+        <p:nvSpPr>
+          <p:cNvPr id="28" name="Rounded Rectangle 27"/>
           <p:cNvSpPr/>
           <p:nvPr/>
         </p:nvSpPr>
         <p:spPr>
           <a:xfrm>
-            <a:off x="822960" y="4489704"/>
-            <a:ext cx="10515600" cy="768096"/>
+            <a:off x="822960" y="3977639"/>
+            <a:ext cx="10515600" cy="658368"/>
           </a:xfrm>
           <a:prstGeom prst="roundRect">
             <a:avLst/>
@@ -13197,14 +12557,14 @@
       </p:sp>
       <p:sp>
         <p:nvSpPr>
-          <p:cNvPr id="32" name="Oval 31"/>
+          <p:cNvPr id="29" name="Oval 28"/>
           <p:cNvSpPr/>
           <p:nvPr/>
         </p:nvSpPr>
         <p:spPr>
           <a:xfrm>
-            <a:off x="1005840" y="4599432"/>
-            <a:ext cx="548640" cy="548640"/>
+            <a:off x="1005840" y="4069079"/>
+            <a:ext cx="475488" cy="475488"/>
           </a:xfrm>
           <a:prstGeom prst="ellipse">
             <a:avLst/>
@@ -13241,7 +12601,7 @@
       </p:sp>
       <p:pic>
         <p:nvPicPr>
-          <p:cNvPr id="33" name="Picture 32" descr="wisconsin.png"/>
+          <p:cNvPr id="30" name="Picture 29" descr="wisconsin.png"/>
           <p:cNvPicPr>
             <a:picLocks noChangeAspect="1"/>
           </p:cNvPicPr>
@@ -13255,8 +12615,8 @@
         </p:blipFill>
         <p:spPr>
           <a:xfrm>
-            <a:off x="1060704" y="4654296"/>
-            <a:ext cx="438912" cy="438912"/>
+            <a:off x="1053388" y="4116628"/>
+            <a:ext cx="380390" cy="380390"/>
           </a:xfrm>
           <a:prstGeom prst="rect">
             <a:avLst/>
@@ -13265,14 +12625,14 @@
       </p:pic>
       <p:sp>
         <p:nvSpPr>
-          <p:cNvPr id="34" name="Oval 33"/>
+          <p:cNvPr id="31" name="Oval 30"/>
           <p:cNvSpPr/>
           <p:nvPr/>
         </p:nvSpPr>
         <p:spPr>
           <a:xfrm>
-            <a:off x="1691640" y="4599432"/>
-            <a:ext cx="548640" cy="548640"/>
+            <a:off x="1600200" y="4069079"/>
+            <a:ext cx="475488" cy="475488"/>
           </a:xfrm>
           <a:prstGeom prst="ellipse">
             <a:avLst/>
@@ -13309,7 +12669,7 @@
       </p:sp>
       <p:pic>
         <p:nvPicPr>
-          <p:cNvPr id="35" name="Picture 34" descr="notredame.png"/>
+          <p:cNvPr id="32" name="Picture 31" descr="notredame.png"/>
           <p:cNvPicPr>
             <a:picLocks noChangeAspect="1"/>
           </p:cNvPicPr>
@@ -13323,8 +12683,8 @@
         </p:blipFill>
         <p:spPr>
           <a:xfrm>
-            <a:off x="1746504" y="4654296"/>
-            <a:ext cx="438912" cy="438912"/>
+            <a:off x="1647748" y="4116628"/>
+            <a:ext cx="380390" cy="380390"/>
           </a:xfrm>
           <a:prstGeom prst="rect">
             <a:avLst/>
@@ -13333,13 +12693,13 @@
       </p:pic>
       <p:sp>
         <p:nvSpPr>
-          <p:cNvPr id="36" name="TextBox 35"/>
-          <p:cNvSpPr txBox="1"/>
-          <p:nvPr/>
-        </p:nvSpPr>
-        <p:spPr>
-          <a:xfrm>
-            <a:off x="2468880" y="4562856"/>
+          <p:cNvPr id="33" name="TextBox 32"/>
+          <p:cNvSpPr txBox="1"/>
+          <p:nvPr/>
+        </p:nvSpPr>
+        <p:spPr>
+          <a:xfrm>
+            <a:off x="2286000" y="4151376"/>
             <a:ext cx="4937760" cy="365760"/>
           </a:xfrm>
           <a:prstGeom prst="rect">
@@ -13355,7 +12715,7 @@
           <a:p>
             <a:pPr algn="l"/>
             <a:r>
-              <a:rPr sz="1450" b="1" i="0">
+              <a:rPr sz="1400" b="1" i="0">
                 <a:solidFill>
                   <a:srgbClr val="FFFFFF"/>
                 </a:solidFill>
@@ -13368,49 +12728,14 @@
       </p:sp>
       <p:sp>
         <p:nvSpPr>
-          <p:cNvPr id="37" name="TextBox 36"/>
-          <p:cNvSpPr txBox="1"/>
-          <p:nvPr/>
-        </p:nvSpPr>
-        <p:spPr>
-          <a:xfrm>
-            <a:off x="2468880" y="4892040"/>
-            <a:ext cx="4937760" cy="347472"/>
-          </a:xfrm>
-          <a:prstGeom prst="rect">
-            <a:avLst/>
-          </a:prstGeom>
-          <a:noFill/>
-        </p:spPr>
-        <p:txBody>
-          <a:bodyPr wrap="square" lIns="0" rIns="0" tIns="0" bIns="0">
-            <a:spAutoFit/>
-          </a:bodyPr>
-          <a:lstStyle/>
-          <a:p>
-            <a:pPr algn="l"/>
-            <a:r>
-              <a:rPr sz="950" b="0" i="0">
-                <a:solidFill>
-                  <a:srgbClr val="CADCFC"/>
-                </a:solidFill>
-                <a:latin typeface="Arial"/>
-              </a:rPr>
-              <a:t>opened –16.5 → now –20.5 (first-seen excluded: sides-flip data error)</a:t>
-            </a:r>
-          </a:p>
-        </p:txBody>
-      </p:sp>
-      <p:sp>
-        <p:nvSpPr>
-          <p:cNvPr id="38" name="TextBox 37"/>
-          <p:cNvSpPr txBox="1"/>
-          <p:nvPr/>
-        </p:nvSpPr>
-        <p:spPr>
-          <a:xfrm>
-            <a:off x="7406640" y="4544568"/>
-            <a:ext cx="3749039" cy="384048"/>
+          <p:cNvPr id="34" name="TextBox 33"/>
+          <p:cNvSpPr txBox="1"/>
+          <p:nvPr/>
+        </p:nvSpPr>
+        <p:spPr>
+          <a:xfrm>
+            <a:off x="6400800" y="4059935"/>
+            <a:ext cx="4754880" cy="384048"/>
           </a:xfrm>
           <a:prstGeom prst="rect">
             <a:avLst/>
@@ -13438,14 +12763,14 @@
       </p:sp>
       <p:sp>
         <p:nvSpPr>
-          <p:cNvPr id="39" name="TextBox 38"/>
-          <p:cNvSpPr txBox="1"/>
-          <p:nvPr/>
-        </p:nvSpPr>
-        <p:spPr>
-          <a:xfrm>
-            <a:off x="7406640" y="4946904"/>
-            <a:ext cx="3749039" cy="274320"/>
+          <p:cNvPr id="35" name="TextBox 34"/>
+          <p:cNvSpPr txBox="1"/>
+          <p:nvPr/>
+        </p:nvSpPr>
+        <p:spPr>
+          <a:xfrm>
+            <a:off x="6400800" y="4407407"/>
+            <a:ext cx="4754880" cy="228600"/>
           </a:xfrm>
           <a:prstGeom prst="rect">
             <a:avLst/>
@@ -13466,21 +12791,21 @@
                 </a:solidFill>
                 <a:latin typeface="Arial"/>
               </a:rPr>
-              <a:t>machine ND –21 · market –20.5 / –20</a:t>
-            </a:r>
-          </a:p>
-        </p:txBody>
-      </p:sp>
-      <p:sp>
-        <p:nvSpPr>
-          <p:cNvPr id="40" name="Rounded Rectangle 39"/>
+              <a:t>market –20.5 / –20</a:t>
+            </a:r>
+          </a:p>
+        </p:txBody>
+      </p:sp>
+      <p:sp>
+        <p:nvSpPr>
+          <p:cNvPr id="36" name="Rounded Rectangle 35"/>
           <p:cNvSpPr/>
           <p:nvPr/>
         </p:nvSpPr>
         <p:spPr>
           <a:xfrm>
-            <a:off x="822960" y="5330952"/>
-            <a:ext cx="10515600" cy="768096"/>
+            <a:off x="822960" y="4709159"/>
+            <a:ext cx="10515600" cy="658368"/>
           </a:xfrm>
           <a:prstGeom prst="roundRect">
             <a:avLst/>
@@ -13517,14 +12842,14 @@
       </p:sp>
       <p:sp>
         <p:nvSpPr>
-          <p:cNvPr id="41" name="Oval 40"/>
+          <p:cNvPr id="37" name="Oval 36"/>
           <p:cNvSpPr/>
           <p:nvPr/>
         </p:nvSpPr>
         <p:spPr>
           <a:xfrm>
-            <a:off x="1005840" y="5440680"/>
-            <a:ext cx="548640" cy="548640"/>
+            <a:off x="1005840" y="4800599"/>
+            <a:ext cx="475488" cy="475488"/>
           </a:xfrm>
           <a:prstGeom prst="ellipse">
             <a:avLst/>
@@ -13561,7 +12886,7 @@
       </p:sp>
       <p:pic>
         <p:nvPicPr>
-          <p:cNvPr id="42" name="Picture 41" descr="smu.png"/>
+          <p:cNvPr id="38" name="Picture 37" descr="smu.png"/>
           <p:cNvPicPr>
             <a:picLocks noChangeAspect="1"/>
           </p:cNvPicPr>
@@ -13575,8 +12900,8 @@
         </p:blipFill>
         <p:spPr>
           <a:xfrm>
-            <a:off x="1060704" y="5495544"/>
-            <a:ext cx="438912" cy="438912"/>
+            <a:off x="1053388" y="4848148"/>
+            <a:ext cx="380390" cy="380390"/>
           </a:xfrm>
           <a:prstGeom prst="rect">
             <a:avLst/>
@@ -13585,14 +12910,14 @@
       </p:pic>
       <p:sp>
         <p:nvSpPr>
-          <p:cNvPr id="43" name="Oval 42"/>
+          <p:cNvPr id="39" name="Oval 38"/>
           <p:cNvSpPr/>
           <p:nvPr/>
         </p:nvSpPr>
         <p:spPr>
           <a:xfrm>
-            <a:off x="1691640" y="5440680"/>
-            <a:ext cx="548640" cy="548640"/>
+            <a:off x="1600200" y="4800599"/>
+            <a:ext cx="475488" cy="475488"/>
           </a:xfrm>
           <a:prstGeom prst="ellipse">
             <a:avLst/>
@@ -13629,7 +12954,7 @@
       </p:sp>
       <p:pic>
         <p:nvPicPr>
-          <p:cNvPr id="44" name="Picture 43" descr="fsu.png"/>
+          <p:cNvPr id="40" name="Picture 39" descr="fsu.png"/>
           <p:cNvPicPr>
             <a:picLocks noChangeAspect="1"/>
           </p:cNvPicPr>
@@ -13643,8 +12968,8 @@
         </p:blipFill>
         <p:spPr>
           <a:xfrm>
-            <a:off x="1746504" y="5495544"/>
-            <a:ext cx="438912" cy="438912"/>
+            <a:off x="1647748" y="4848148"/>
+            <a:ext cx="380390" cy="380390"/>
           </a:xfrm>
           <a:prstGeom prst="rect">
             <a:avLst/>
@@ -13653,70 +12978,219 @@
       </p:pic>
       <p:sp>
         <p:nvSpPr>
+          <p:cNvPr id="41" name="TextBox 40"/>
+          <p:cNvSpPr txBox="1"/>
+          <p:nvPr/>
+        </p:nvSpPr>
+        <p:spPr>
+          <a:xfrm>
+            <a:off x="2286000" y="4882896"/>
+            <a:ext cx="4937760" cy="365760"/>
+          </a:xfrm>
+          <a:prstGeom prst="rect">
+            <a:avLst/>
+          </a:prstGeom>
+          <a:noFill/>
+        </p:spPr>
+        <p:txBody>
+          <a:bodyPr wrap="square" lIns="0" rIns="0" tIns="0" bIns="0">
+            <a:spAutoFit/>
+          </a:bodyPr>
+          <a:lstStyle/>
+          <a:p>
+            <a:pPr algn="l"/>
+            <a:r>
+              <a:rPr sz="1400" b="1" i="0">
+                <a:solidFill>
+                  <a:srgbClr val="FFFFFF"/>
+                </a:solidFill>
+                <a:latin typeface="Arial"/>
+              </a:rPr>
+              <a:t>SMU at Florida State</a:t>
+            </a:r>
+          </a:p>
+        </p:txBody>
+      </p:sp>
+      <p:sp>
+        <p:nvSpPr>
+          <p:cNvPr id="42" name="TextBox 41"/>
+          <p:cNvSpPr txBox="1"/>
+          <p:nvPr/>
+        </p:nvSpPr>
+        <p:spPr>
+          <a:xfrm>
+            <a:off x="6400800" y="4791455"/>
+            <a:ext cx="4754880" cy="384048"/>
+          </a:xfrm>
+          <a:prstGeom prst="rect">
+            <a:avLst/>
+          </a:prstGeom>
+          <a:noFill/>
+        </p:spPr>
+        <p:txBody>
+          <a:bodyPr wrap="square" lIns="0" rIns="0" tIns="0" bIns="0">
+            <a:spAutoFit/>
+          </a:bodyPr>
+          <a:lstStyle/>
+          <a:p>
+            <a:pPr algn="r"/>
+            <a:r>
+              <a:rPr sz="1550" b="1" i="0">
+                <a:solidFill>
+                  <a:srgbClr val="F47321"/>
+                </a:solidFill>
+                <a:latin typeface="Arial"/>
+              </a:rPr>
+              <a:t>FSU 27 – SMU 26</a:t>
+            </a:r>
+          </a:p>
+        </p:txBody>
+      </p:sp>
+      <p:sp>
+        <p:nvSpPr>
+          <p:cNvPr id="43" name="TextBox 42"/>
+          <p:cNvSpPr txBox="1"/>
+          <p:nvPr/>
+        </p:nvSpPr>
+        <p:spPr>
+          <a:xfrm>
+            <a:off x="6400800" y="5138927"/>
+            <a:ext cx="4754880" cy="228600"/>
+          </a:xfrm>
+          <a:prstGeom prst="rect">
+            <a:avLst/>
+          </a:prstGeom>
+          <a:noFill/>
+        </p:spPr>
+        <p:txBody>
+          <a:bodyPr wrap="square" lIns="0" rIns="0" tIns="0" bIns="0">
+            <a:spAutoFit/>
+          </a:bodyPr>
+          <a:lstStyle/>
+          <a:p>
+            <a:pPr algn="r"/>
+            <a:r>
+              <a:rPr sz="850" b="0" i="0">
+                <a:solidFill>
+                  <a:srgbClr val="8FA5C4"/>
+                </a:solidFill>
+                <a:latin typeface="Arial"/>
+              </a:rPr>
+              <a:t>market +3 / +3</a:t>
+            </a:r>
+          </a:p>
+        </p:txBody>
+      </p:sp>
+      <p:sp>
+        <p:nvSpPr>
+          <p:cNvPr id="44" name="Rounded Rectangle 43"/>
+          <p:cNvSpPr/>
+          <p:nvPr/>
+        </p:nvSpPr>
+        <p:spPr>
+          <a:xfrm>
+            <a:off x="822960" y="5513831"/>
+            <a:ext cx="10515600" cy="932688"/>
+          </a:xfrm>
+          <a:prstGeom prst="roundRect">
+            <a:avLst/>
+          </a:prstGeom>
+          <a:solidFill>
+            <a:srgbClr val="F47321"/>
+          </a:solidFill>
+          <a:ln>
+            <a:noFill/>
+          </a:ln>
+          <a:effectLst/>
+        </p:spPr>
+        <p:style>
+          <a:lnRef idx="1">
+            <a:schemeClr val="accent1"/>
+          </a:lnRef>
+          <a:fillRef idx="3">
+            <a:schemeClr val="accent1"/>
+          </a:fillRef>
+          <a:effectRef idx="2">
+            <a:schemeClr val="accent1"/>
+          </a:effectRef>
+          <a:fontRef idx="minor">
+            <a:schemeClr val="lt1"/>
+          </a:fontRef>
+        </p:style>
+        <p:txBody>
+          <a:bodyPr rtlCol="0" anchor="ctr"/>
+          <a:lstStyle/>
+          <a:p>
+            <a:pPr algn="ctr"/>
+          </a:p>
+        </p:txBody>
+      </p:sp>
+      <p:sp>
+        <p:nvSpPr>
           <p:cNvPr id="45" name="TextBox 44"/>
           <p:cNvSpPr txBox="1"/>
           <p:nvPr/>
         </p:nvSpPr>
         <p:spPr>
           <a:xfrm>
-            <a:off x="2468880" y="5404104"/>
-            <a:ext cx="4937760" cy="365760"/>
-          </a:xfrm>
-          <a:prstGeom prst="rect">
-            <a:avLst/>
-          </a:prstGeom>
-          <a:noFill/>
-        </p:spPr>
-        <p:txBody>
-          <a:bodyPr wrap="square" lIns="0" rIns="0" tIns="0" bIns="0">
-            <a:spAutoFit/>
-          </a:bodyPr>
-          <a:lstStyle/>
-          <a:p>
-            <a:pPr algn="l"/>
-            <a:r>
-              <a:rPr sz="1450" b="1" i="0">
+            <a:off x="1097280" y="5596127"/>
+            <a:ext cx="2743200" cy="320040"/>
+          </a:xfrm>
+          <a:prstGeom prst="rect">
+            <a:avLst/>
+          </a:prstGeom>
+          <a:noFill/>
+        </p:spPr>
+        <p:txBody>
+          <a:bodyPr wrap="square" lIns="0" rIns="0" tIns="0" bIns="0">
+            <a:spAutoFit/>
+          </a:bodyPr>
+          <a:lstStyle/>
+          <a:p>
+            <a:pPr algn="l"/>
+            <a:r>
+              <a:rPr sz="1300" b="1" i="0">
+                <a:solidFill>
+                  <a:srgbClr val="0A2851"/>
+                </a:solidFill>
+                <a:latin typeface="Arial"/>
+              </a:rPr>
+              <a:t>★ SUPERDOG</a:t>
+            </a:r>
+          </a:p>
+        </p:txBody>
+      </p:sp>
+      <p:sp>
+        <p:nvSpPr>
+          <p:cNvPr id="46" name="TextBox 45"/>
+          <p:cNvSpPr txBox="1"/>
+          <p:nvPr/>
+        </p:nvSpPr>
+        <p:spPr>
+          <a:xfrm>
+            <a:off x="3291840" y="5596127"/>
+            <a:ext cx="7863840" cy="320040"/>
+          </a:xfrm>
+          <a:prstGeom prst="rect">
+            <a:avLst/>
+          </a:prstGeom>
+          <a:noFill/>
+        </p:spPr>
+        <p:txBody>
+          <a:bodyPr wrap="square" lIns="0" rIns="0" tIns="0" bIns="0">
+            <a:spAutoFit/>
+          </a:bodyPr>
+          <a:lstStyle/>
+          <a:p>
+            <a:pPr algn="l"/>
+            <a:r>
+              <a:rPr sz="1350" b="1" i="0">
                 <a:solidFill>
                   <a:srgbClr val="FFFFFF"/>
                 </a:solidFill>
                 <a:latin typeface="Arial"/>
               </a:rPr>
-              <a:t>SMU at Florida State</a:t>
-            </a:r>
-          </a:p>
-        </p:txBody>
-      </p:sp>
-      <p:sp>
-        <p:nvSpPr>
-          <p:cNvPr id="46" name="TextBox 45"/>
-          <p:cNvSpPr txBox="1"/>
-          <p:nvPr/>
-        </p:nvSpPr>
-        <p:spPr>
-          <a:xfrm>
-            <a:off x="2468880" y="5733288"/>
-            <a:ext cx="4937760" cy="347472"/>
-          </a:xfrm>
-          <a:prstGeom prst="rect">
-            <a:avLst/>
-          </a:prstGeom>
-          <a:noFill/>
-        </p:spPr>
-        <p:txBody>
-          <a:bodyPr wrap="square" lIns="0" rIns="0" tIns="0" bIns="0">
-            <a:spAutoFit/>
-          </a:bodyPr>
-          <a:lstStyle/>
-          <a:p>
-            <a:pPr algn="l"/>
-            <a:r>
-              <a:rPr sz="950" b="0" i="0">
-                <a:solidFill>
-                  <a:srgbClr val="CADCFC"/>
-                </a:solidFill>
-                <a:latin typeface="Arial"/>
-              </a:rPr>
-              <a:t>first-seen +2.5 (Aug 18) → now +3 · CLV -0.5</a:t>
+              <a:t>Coastal Carolina +21.5 at West Virginia · ML +1000</a:t>
             </a:r>
           </a:p>
         </p:txBody>
@@ -13729,29 +13203,29 @@
         </p:nvSpPr>
         <p:spPr>
           <a:xfrm>
-            <a:off x="7406640" y="5385816"/>
-            <a:ext cx="3749039" cy="384048"/>
-          </a:xfrm>
-          <a:prstGeom prst="rect">
-            <a:avLst/>
-          </a:prstGeom>
-          <a:noFill/>
-        </p:spPr>
-        <p:txBody>
-          <a:bodyPr wrap="square" lIns="0" rIns="0" tIns="0" bIns="0">
-            <a:spAutoFit/>
-          </a:bodyPr>
-          <a:lstStyle/>
-          <a:p>
-            <a:pPr algn="r"/>
-            <a:r>
-              <a:rPr sz="1550" b="1" i="0">
-                <a:solidFill>
-                  <a:srgbClr val="F47321"/>
-                </a:solidFill>
-                <a:latin typeface="Arial"/>
-              </a:rPr>
-              <a:t>FSU 27 – SMU 26</a:t>
+            <a:off x="1097280" y="5998464"/>
+            <a:ext cx="2743200" cy="320040"/>
+          </a:xfrm>
+          <a:prstGeom prst="rect">
+            <a:avLst/>
+          </a:prstGeom>
+          <a:noFill/>
+        </p:spPr>
+        <p:txBody>
+          <a:bodyPr wrap="square" lIns="0" rIns="0" tIns="0" bIns="0">
+            <a:spAutoFit/>
+          </a:bodyPr>
+          <a:lstStyle/>
+          <a:p>
+            <a:pPr algn="l"/>
+            <a:r>
+              <a:rPr sz="1300" b="1" i="0">
+                <a:solidFill>
+                  <a:srgbClr val="0A2851"/>
+                </a:solidFill>
+                <a:latin typeface="Arial"/>
+              </a:rPr>
+              <a:t>★ GIANT KILLER</a:t>
             </a:r>
           </a:p>
         </p:txBody>
@@ -13764,64 +13238,64 @@
         </p:nvSpPr>
         <p:spPr>
           <a:xfrm>
-            <a:off x="7406640" y="5788152"/>
-            <a:ext cx="3749039" cy="274320"/>
-          </a:xfrm>
-          <a:prstGeom prst="rect">
-            <a:avLst/>
-          </a:prstGeom>
-          <a:noFill/>
-        </p:spPr>
-        <p:txBody>
-          <a:bodyPr wrap="square" lIns="0" rIns="0" tIns="0" bIns="0">
-            <a:spAutoFit/>
-          </a:bodyPr>
-          <a:lstStyle/>
-          <a:p>
-            <a:pPr algn="r"/>
-            <a:r>
-              <a:rPr sz="850" b="0" i="0">
+            <a:off x="3291840" y="5998464"/>
+            <a:ext cx="7863840" cy="320040"/>
+          </a:xfrm>
+          <a:prstGeom prst="rect">
+            <a:avLst/>
+          </a:prstGeom>
+          <a:noFill/>
+        </p:spPr>
+        <p:txBody>
+          <a:bodyPr wrap="square" lIns="0" rIns="0" tIns="0" bIns="0">
+            <a:spAutoFit/>
+          </a:bodyPr>
+          <a:lstStyle/>
+          <a:p>
+            <a:pPr algn="l"/>
+            <a:r>
+              <a:rPr sz="1350" b="1" i="0">
+                <a:solidFill>
+                  <a:srgbClr val="FFFFFF"/>
+                </a:solidFill>
+                <a:latin typeface="Arial"/>
+              </a:rPr>
+              <a:t>Washington State +23.5 at #17 Washington · ML +1300</a:t>
+            </a:r>
+          </a:p>
+        </p:txBody>
+      </p:sp>
+      <p:sp>
+        <p:nvSpPr>
+          <p:cNvPr id="49" name="TextBox 48"/>
+          <p:cNvSpPr txBox="1"/>
+          <p:nvPr/>
+        </p:nvSpPr>
+        <p:spPr>
+          <a:xfrm>
+            <a:off x="822960" y="6565392"/>
+            <a:ext cx="10515600" cy="274320"/>
+          </a:xfrm>
+          <a:prstGeom prst="rect">
+            <a:avLst/>
+          </a:prstGeom>
+          <a:noFill/>
+        </p:spPr>
+        <p:txBody>
+          <a:bodyPr wrap="square" lIns="0" rIns="0" tIns="0" bIns="0">
+            <a:spAutoFit/>
+          </a:bodyPr>
+          <a:lstStyle/>
+          <a:p>
+            <a:pPr algn="l"/>
+            <a:r>
+              <a:rPr sz="900" b="0" i="1">
                 <a:solidFill>
                   <a:srgbClr val="8FA5C4"/>
                 </a:solidFill>
                 <a:latin typeface="Arial"/>
               </a:rPr>
-              <a:t>machine FSU –0.5 · market +3 / +3</a:t>
-            </a:r>
-          </a:p>
-        </p:txBody>
-      </p:sp>
-      <p:sp>
-        <p:nvSpPr>
-          <p:cNvPr id="49" name="TextBox 48"/>
-          <p:cNvSpPr txBox="1"/>
-          <p:nvPr/>
-        </p:nvSpPr>
-        <p:spPr>
-          <a:xfrm>
-            <a:off x="822960" y="6263640"/>
-            <a:ext cx="10515600" cy="457200"/>
-          </a:xfrm>
-          <a:prstGeom prst="rect">
-            <a:avLst/>
-          </a:prstGeom>
-          <a:noFill/>
-        </p:spPr>
-        <p:txBody>
-          <a:bodyPr wrap="square" lIns="0" rIns="0" tIns="0" bIns="0">
-            <a:spAutoFit/>
-          </a:bodyPr>
-          <a:lstStyle/>
-          <a:p>
-            <a:pPr algn="l"/>
-            <a:r>
-              <a:rPr sz="1100" b="0" i="1">
-                <a:solidFill>
-                  <a:srgbClr val="8FA5C4"/>
-                </a:solidFill>
-                <a:latin typeface="Arial"/>
-              </a:rPr>
-              <a:t>Paper record after Week 0: stated leans 1–2 — graded vs first-seen lines, never moved ones. Research, not picks.</a:t>
+              <a:t>projected scores = machine margin on the market total · superdogs = dog to win outright, points = the spread · graded vs first-seen lines · research, not picks</a:t>
             </a:r>
           </a:p>
         </p:txBody>

--- a/decks/2026_Week1_Episode2.pptx
+++ b/decks/2026_Week1_Episode2.pptx
@@ -7155,13 +7155,13 @@
           <a:p>
             <a:pPr algn="l"/>
             <a:r>
-              <a:rPr sz="1200" b="1" i="0">
+              <a:rPr sz="1500" b="1" i="0">
                 <a:solidFill>
                   <a:srgbClr val="F47321"/>
                 </a:solidFill>
                 <a:latin typeface="Arial"/>
               </a:rPr>
-              <a:t>no gap — watch, don't touch</a:t>
+              <a:t>ND 34 – Wisconsin 13</a:t>
             </a:r>
           </a:p>
         </p:txBody>
@@ -7196,7 +7196,7 @@
                 </a:solidFill>
                 <a:latin typeface="Arial"/>
               </a:rPr>
-              <a:t>the gap</a:t>
+              <a:t>score prediction</a:t>
             </a:r>
           </a:p>
         </p:txBody>
@@ -9801,13 +9801,13 @@
           <a:p>
             <a:pPr algn="l"/>
             <a:r>
-              <a:rPr sz="1200" b="1" i="0">
+              <a:rPr sz="1500" b="1" i="0">
                 <a:solidFill>
                   <a:srgbClr val="F47321"/>
                 </a:solidFill>
                 <a:latin typeface="Arial"/>
               </a:rPr>
-              <a:t>RED: home dog outright</a:t>
+              <a:t>FSU 27 – SMU 26</a:t>
             </a:r>
           </a:p>
         </p:txBody>
@@ -9842,7 +9842,7 @@
                 </a:solidFill>
                 <a:latin typeface="Arial"/>
               </a:rPr>
-              <a:t>the gap</a:t>
+              <a:t>score prediction</a:t>
             </a:r>
           </a:p>
         </p:txBody>
@@ -15522,13 +15522,13 @@
           <a:p>
             <a:pPr algn="l"/>
             <a:r>
-              <a:rPr sz="1200" b="1" i="0">
+              <a:rPr sz="1500" b="1" i="0">
                 <a:solidFill>
                   <a:srgbClr val="F47321"/>
                 </a:solidFill>
                 <a:latin typeface="Arial"/>
               </a:rPr>
-              <a:t>1.5 on Baylor · U-TAIL under 59.5</a:t>
+              <a:t>Auburn 33 – Baylor 27</a:t>
             </a:r>
           </a:p>
         </p:txBody>
@@ -15563,7 +15563,7 @@
                 </a:solidFill>
                 <a:latin typeface="Arial"/>
               </a:rPr>
-              <a:t>the gap</a:t>
+              <a:t>score prediction</a:t>
             </a:r>
           </a:p>
         </p:txBody>
@@ -18168,13 +18168,13 @@
           <a:p>
             <a:pPr algn="l"/>
             <a:r>
-              <a:rPr sz="1200" b="1" i="0">
+              <a:rPr sz="1500" b="1" i="0">
                 <a:solidFill>
                   <a:srgbClr val="F47321"/>
                 </a:solidFill>
                 <a:latin typeface="Arial"/>
               </a:rPr>
-              <a:t>1.5 to Clemson — quibble, not a play</a:t>
+              <a:t>LSU 30 – Clemson 21</a:t>
             </a:r>
           </a:p>
         </p:txBody>
@@ -18209,7 +18209,7 @@
                 </a:solidFill>
                 <a:latin typeface="Arial"/>
               </a:rPr>
-              <a:t>the gap</a:t>
+              <a:t>score prediction</a:t>
             </a:r>
           </a:p>
         </p:txBody>
@@ -20814,13 +20814,13 @@
           <a:p>
             <a:pPr algn="l"/>
             <a:r>
-              <a:rPr sz="1200" b="1" i="0">
+              <a:rPr sz="1300" b="1" i="0">
                 <a:solidFill>
                   <a:srgbClr val="F47321"/>
                 </a:solidFill>
                 <a:latin typeface="Arial"/>
               </a:rPr>
-              <a:t>machine = market — no gap</a:t>
+              <a:t>Ole Miss 31 – Louisville 25</a:t>
             </a:r>
           </a:p>
         </p:txBody>
@@ -20855,7 +20855,7 @@
                 </a:solidFill>
                 <a:latin typeface="Arial"/>
               </a:rPr>
-              <a:t>the gap</a:t>
+              <a:t>score prediction</a:t>
             </a:r>
           </a:p>
         </p:txBody>

--- a/decks/2026_Week1_Episode2.pptx
+++ b/decks/2026_Week1_Episode2.pptx
@@ -15160,7 +15160,7 @@
                 </a:solidFill>
                 <a:latin typeface="Arial"/>
               </a:rPr>
-              <a:t>U-TAIL: the model leans UNDER the 59.5 — two year-one offenses in a dome</a:t>
+              <a:t>The 59.5 total is top-decile — five years of closing lines say that class of game goes UNDER 55% of the time</a:t>
             </a:r>
           </a:p>
         </p:txBody>

--- a/decks/2026_Week1_Episode2.pptx
+++ b/decks/2026_Week1_Episode2.pptx
@@ -3463,7 +3463,7 @@
                 </a:solidFill>
                 <a:latin typeface="Arial"/>
               </a:rPr>
-              <a:t>Auburn –5.5   ·   –7 / –7</a:t>
+              <a:t>Auburn –5.5   ·   –7.5 / –7</a:t>
             </a:r>
           </a:p>
         </p:txBody>
@@ -3783,7 +3783,7 @@
                 </a:solidFill>
                 <a:latin typeface="Arial"/>
               </a:rPr>
-              <a:t>LSU –9   ·   –10.5 / –10.5</a:t>
+              <a:t>LSU –9   ·   –10 / –10</a:t>
             </a:r>
           </a:p>
         </p:txBody>
@@ -4103,7 +4103,7 @@
                 </a:solidFill>
                 <a:latin typeface="Arial"/>
               </a:rPr>
-              <a:t>Ole Miss –6.5   ·   –7 / –6.5</a:t>
+              <a:t>Ole Miss –6.5   ·   –7 / –7</a:t>
             </a:r>
           </a:p>
         </p:txBody>
@@ -4423,7 +4423,7 @@
                 </a:solidFill>
                 <a:latin typeface="Arial"/>
               </a:rPr>
-              <a:t>ND –21   ·   –20.5 / –20</a:t>
+              <a:t>ND –21   ·   –20.5 / –20.5</a:t>
             </a:r>
           </a:p>
         </p:txBody>
@@ -4813,7 +4813,7 @@
                 </a:solidFill>
                 <a:latin typeface="Arial"/>
               </a:rPr>
-              <a:t>Machine = ESPN 2026 preseason FPI + 2.5 HFA, empirical margin curve (σ 17.9, 2021–25 fit) · lines as of Aug 31 · model plays graded vs first-seen lines</a:t>
+              <a:t>Machine = ESPN 2026 preseason FPI + 2.5 HFA, empirical margin curve (σ 17.9, 2021–25 fit) · lines as of Sep 1 · model plays graded vs first-seen lines</a:t>
             </a:r>
           </a:p>
         </p:txBody>
@@ -7091,7 +7091,7 @@
                 </a:solidFill>
                 <a:latin typeface="Arial"/>
               </a:rPr>
-              <a:t>–20.5 / –20</a:t>
+              <a:t>–20.5 / –20.5</a:t>
             </a:r>
           </a:p>
         </p:txBody>
@@ -7126,7 +7126,7 @@
                 </a:solidFill>
                 <a:latin typeface="Arial"/>
               </a:rPr>
-              <a:t>market (DK / Bovada) · DK ND -1800 / Wisconsin +1000 · Bov ND -2500 / Wisconsin +1000</a:t>
+              <a:t>market (DK / Bovada) · DK ND -1650 / Wisconsin +950 · Bov ND -2500 / Wisconsin +1000</a:t>
             </a:r>
           </a:p>
         </p:txBody>
@@ -9772,7 +9772,7 @@
                 </a:solidFill>
                 <a:latin typeface="Arial"/>
               </a:rPr>
-              <a:t>market (DK / Bovada) · DK FSU +130 / SMU -155 · Bov FSU +145 / SMU -170</a:t>
+              <a:t>market (DK / Bovada) · DK FSU +136 / SMU -162 · Bov FSU +145 / SMU -170</a:t>
             </a:r>
           </a:p>
         </p:txBody>
@@ -11936,7 +11936,7 @@
                 </a:solidFill>
                 <a:latin typeface="Arial"/>
               </a:rPr>
-              <a:t>market –7 / –7</a:t>
+              <a:t>market –7.5 / –7</a:t>
             </a:r>
           </a:p>
         </p:txBody>
@@ -12221,7 +12221,7 @@
                 </a:solidFill>
                 <a:latin typeface="Arial"/>
               </a:rPr>
-              <a:t>market –10.5 / –10.5</a:t>
+              <a:t>market –10 / –10</a:t>
             </a:r>
           </a:p>
         </p:txBody>
@@ -12506,7 +12506,7 @@
                 </a:solidFill>
                 <a:latin typeface="Arial"/>
               </a:rPr>
-              <a:t>market –7 / –6.5</a:t>
+              <a:t>market –7 / –7</a:t>
             </a:r>
           </a:p>
         </p:txBody>
@@ -12791,7 +12791,7 @@
                 </a:solidFill>
                 <a:latin typeface="Arial"/>
               </a:rPr>
-              <a:t>market –20.5 / –20</a:t>
+              <a:t>market –20.5 / –20.5</a:t>
             </a:r>
           </a:p>
         </p:txBody>
@@ -13190,7 +13190,7 @@
                 </a:solidFill>
                 <a:latin typeface="Arial"/>
               </a:rPr>
-              <a:t>Coastal Carolina +21.5 at West Virginia · ML +1000</a:t>
+              <a:t>Coastal Carolina +21 at West Virginia · ML +950</a:t>
             </a:r>
           </a:p>
         </p:txBody>
@@ -15458,7 +15458,7 @@
                 </a:solidFill>
                 <a:latin typeface="Arial"/>
               </a:rPr>
-              <a:t>–7 / –7</a:t>
+              <a:t>–7.5 / –7</a:t>
             </a:r>
           </a:p>
         </p:txBody>
@@ -15493,7 +15493,7 @@
                 </a:solidFill>
                 <a:latin typeface="Arial"/>
               </a:rPr>
-              <a:t>market (DK / Bovada) · DK Auburn -298 / Baylor +240 · Bov Auburn -270 / Baylor +220</a:t>
+              <a:t>market (DK / Bovada) · DK Auburn -285 / Baylor +230 · Bov Auburn -270 / Baylor +220</a:t>
             </a:r>
           </a:p>
         </p:txBody>
@@ -15791,7 +15791,7 @@
                 </a:solidFill>
                 <a:latin typeface="Arial"/>
               </a:rPr>
-              <a:t>LINE MOVE  –6.5 → –7 · CLV -0.5</a:t>
+              <a:t>LINE MOVE  –6.5 → –7.5 · CLV -1</a:t>
             </a:r>
           </a:p>
         </p:txBody>
@@ -15826,7 +15826,7 @@
                 </a:solidFill>
                 <a:latin typeface="Arial"/>
               </a:rPr>
-              <a:t>Line movement: first-seen –6.5 (Aug 18) → now –7 · CLV -0.5</a:t>
+              <a:t>Line movement: first-seen –6.5 (Aug 18) → now –7.5 · CLV -1</a:t>
             </a:r>
           </a:p>
         </p:txBody>
@@ -18104,7 +18104,7 @@
                 </a:solidFill>
                 <a:latin typeface="Arial"/>
               </a:rPr>
-              <a:t>–10.5 / –10.5</a:t>
+              <a:t>–10 / –10</a:t>
             </a:r>
           </a:p>
         </p:txBody>
@@ -18139,7 +18139,7 @@
                 </a:solidFill>
                 <a:latin typeface="Arial"/>
               </a:rPr>
-              <a:t>market (DK / Bovada) · DK LSU -380 / Clemson +300 · Bov LSU -480 / Clemson +350</a:t>
+              <a:t>market (DK / Bovada) · DK LSU -375 / Clemson +295 · Bov LSU -480 / Clemson +350</a:t>
             </a:r>
           </a:p>
         </p:txBody>
@@ -18437,7 +18437,7 @@
                 </a:solidFill>
                 <a:latin typeface="Arial"/>
               </a:rPr>
-              <a:t>LINE MOVE  –10.5 → –10.5</a:t>
+              <a:t>LINE MOVE  –10.5 → –10 · CLV +0.5</a:t>
             </a:r>
           </a:p>
         </p:txBody>
@@ -18472,7 +18472,7 @@
                 </a:solidFill>
                 <a:latin typeface="Arial"/>
               </a:rPr>
-              <a:t>Line movement: first-seen –10.5 (Aug 18) → now –10.5 · opened –11.5 · CLV +0</a:t>
+              <a:t>Line movement: first-seen –10.5 (Aug 18) → now –10 · opened –11.5 · CLV +0.5</a:t>
             </a:r>
           </a:p>
         </p:txBody>
@@ -20750,7 +20750,7 @@
                 </a:solidFill>
                 <a:latin typeface="Arial"/>
               </a:rPr>
-              <a:t>–7 / –6.5</a:t>
+              <a:t>–7 / –7</a:t>
             </a:r>
           </a:p>
         </p:txBody>
@@ -20785,7 +20785,7 @@
                 </a:solidFill>
                 <a:latin typeface="Arial"/>
               </a:rPr>
-              <a:t>market (DK / Bovada) · DK Ole Miss -258 / Louisville +210 · Bov Ole Miss -270 / Louisville +220</a:t>
+              <a:t>market (DK / Bovada) · DK Ole Miss -265 / Louisville +215 · Bov Ole Miss -270 / Louisville +220</a:t>
             </a:r>
           </a:p>
         </p:txBody>

--- a/decks/2026_Week1_Episode2.pptx
+++ b/decks/2026_Week1_Episode2.pptx
@@ -17569,7 +17569,7 @@
                 </a:solidFill>
                 <a:latin typeface="Arial"/>
               </a:rPr>
-              <a:t>Kiffin's first game at LSU — a CFP-or-bust construction unveiled at night in Death Valley</a:t>
+              <a:t>The biggest coaching debut of the season: Kiffin left a 13-win CFP team for this — first drive at night in Death Valley</a:t>
             </a:r>
           </a:p>
         </p:txBody>
@@ -17648,7 +17648,7 @@
                 </a:solidFill>
                 <a:latin typeface="Arial"/>
               </a:rPr>
-              <a:t>Dabo answering the worst season in 15 years with a first-year QB and a throwback OC</a:t>
+              <a:t>Dabo answers his worst season in 15 years with a throwback: Morris back as OC, first-year QB Vizzina — and Clemson opens UNRANKED vs No. 11</a:t>
             </a:r>
           </a:p>
         </p:txBody>
@@ -17727,7 +17727,7 @@
                 </a:solidFill>
                 <a:latin typeface="Arial"/>
               </a:rPr>
-              <a:t>LSU returns 21% of production with 44 portal adds — the most aggressive retool on the card; Clemson added 11</a:t>
+              <a:t>Opposite repair jobs: LSU rebuilt with 44 transfers (21% back), Clemson added just 11 (41% back) — Saturday tells us which was right</a:t>
             </a:r>
           </a:p>
         </p:txBody>
@@ -17806,7 +17806,7 @@
                 </a:solidFill>
                 <a:latin typeface="Arial"/>
               </a:rPr>
-              <a:t>Week 1 loser burns a playoff mulligan immediately — both fanbases know it</a:t>
+              <a:t>The market opened −11.5 and has walked to −10, toward the machine's −9 all week — and the loser burns a playoff mulligan</a:t>
             </a:r>
           </a:p>
         </p:txBody>
@@ -17885,7 +17885,7 @@
                 </a:solidFill>
                 <a:latin typeface="Arial"/>
               </a:rPr>
-              <a:t>The machine's −9.1 is a preseason guess about a team with a new head coach, new QB and new OC — and the same is true across the field. The market opened −11.5 and drifted to −10.5; the machine sits a point and a half friendlier to Clemson. Install-week variance says treat all of it gently.</a:t>
+              <a:t>The machine's −9.1 is a preseason guess about a program running its second system and second staff inside one calendar year — and Clemson's offense is just as new. Install-week variance says treat every number here gently; 30–21 is a margin on a market total, not a script.</a:t>
             </a:r>
           </a:p>
         </p:txBody>
@@ -18925,7 +18925,7 @@
                 </a:solidFill>
                 <a:latin typeface="Arial"/>
               </a:rPr>
-              <a:t>Let Allen's defense set the terms early</a:t>
+              <a:t>Let Allen's defense set the terms — the only unit on this field that never stopped being itself</a:t>
             </a:r>
           </a:p>
         </p:txBody>
@@ -19004,7 +19004,7 @@
                 </a:solidFill>
                 <a:latin typeface="Arial"/>
               </a:rPr>
-              <a:t>Give Vizzina pressure answers — quick game and screens</a:t>
+              <a:t>Give Vizzina his pressure answers BEFORE the snap: quick game and screens, no improvising against Baker</a:t>
             </a:r>
           </a:p>
         </p:txBody>
@@ -19083,7 +19083,7 @@
                 </a:solidFill>
                 <a:latin typeface="Arial"/>
               </a:rPr>
-              <a:t>Win explosives; don't trade field goals with LSU's skill talent</a:t>
+              <a:t>Win explosives — don't trade field goals with LSU's skill talent; the top-5 blue-chip roster has to cash as big plays</a:t>
             </a:r>
           </a:p>
         </p:txBody>
@@ -19162,7 +19162,7 @@
                 </a:solidFill>
                 <a:latin typeface="Arial"/>
               </a:rPr>
-              <a:t>Silence the crowd with third-down conversions</a:t>
+              <a:t>Silence the crowd on third down — remove Death Valley's 2.5 and the machine has this at only 6.6</a:t>
             </a:r>
           </a:p>
         </p:txBody>
@@ -19650,7 +19650,7 @@
                 </a:solidFill>
                 <a:latin typeface="Arial"/>
               </a:rPr>
-              <a:t>Protect Leavitt — the rebuilt OL is the bet of the season</a:t>
+              <a:t>Protect Leavitt — the portal-built OL on a short runway is the bet of the entire season</a:t>
             </a:r>
           </a:p>
         </p:txBody>
@@ -19729,7 +19729,7 @@
                 </a:solidFill>
                 <a:latin typeface="Arial"/>
               </a:rPr>
-              <a:t>Tempo early: make Allen's defense align fast, then strike</a:t>
+              <a:t>Tempo early: force Allen's 4-2-5 to line up plain before the disguises load</a:t>
             </a:r>
           </a:p>
         </p:txBody>
@@ -19808,7 +19808,7 @@
                 </a:solidFill>
                 <a:latin typeface="Arial"/>
               </a:rPr>
-              <a:t>Let Baker hunt with the pressure package on obvious downs</a:t>
+              <a:t>Let Baker hunt — SP+'s projected No. 2 defense against a first-career-start QB</a:t>
             </a:r>
           </a:p>
         </p:txBody>
@@ -19887,7 +19887,7 @@
                 </a:solidFill>
                 <a:latin typeface="Arial"/>
               </a:rPr>
-              <a:t>Finish drives — red-zone scripts vs a blue-chip front</a:t>
+              <a:t>Finish in the red zone: settling for field goals keeps an unranked underdog alive all night</a:t>
             </a:r>
           </a:p>
         </p:txBody>

--- a/decks/2026_Week1_Episode2.pptx
+++ b/decks/2026_Week1_Episode2.pptx
@@ -5266,7 +5266,7 @@
                 </a:solidFill>
                 <a:latin typeface="Arial"/>
               </a:rPr>
-              <a:t>Ride the run game and keep Chambliss on the sideline</a:t>
+              <a:t>Ride the run game — the RB room is the roster's sneaky strength, and every carry keeps Chambliss on the sideline</a:t>
             </a:r>
           </a:p>
         </p:txBody>
@@ -5345,7 +5345,7 @@
                 </a:solidFill>
                 <a:latin typeface="Arial"/>
               </a:rPr>
-              <a:t>No coverage busts — the season-long bug can't show up here</a:t>
+              <a:t>No coverage busts: top-20 havoc with bottom-40 explosives allowed is the Brohm tradeoff — one bust loses this game</a:t>
             </a:r>
           </a:p>
         </p:txBody>
@@ -5424,7 +5424,7 @@
                 </a:solidFill>
                 <a:latin typeface="Arial"/>
               </a:rPr>
-              <a:t>Pressure with the edges, not blitz-and-bust gambles</a:t>
+              <a:t>Pressure with the edges vs a rebuilt Ole Miss pass-pro — the one matchup the underdog clearly wins</a:t>
             </a:r>
           </a:p>
         </p:txBody>
@@ -5503,7 +5503,7 @@
                 </a:solidFill>
                 <a:latin typeface="Arial"/>
               </a:rPr>
-              <a:t>Keep Kienholz's menu short and make an early lead real</a:t>
+              <a:t>Keep Kienholz's menu short — Brohm's system has made a top-25 offense of every QB; let it work before asking for heroes</a:t>
             </a:r>
           </a:p>
         </p:txBody>
@@ -5991,7 +5991,7 @@
                 </a:solidFill>
                 <a:latin typeface="Arial"/>
               </a:rPr>
-              <a:t>Let Chambliss escape — the off-script plays are the edge</a:t>
+              <a:t>Let Chambliss escape — statistically the nation's best at turning dead plays into first downs</a:t>
             </a:r>
           </a:p>
         </p:txBody>
@@ -6070,7 +6070,7 @@
                 </a:solidFill>
                 <a:latin typeface="Arial"/>
               </a:rPr>
-              <a:t>Interior line vs Louisville's backfield: end the run game early</a:t>
+              <a:t>The interior line ends Louisville's run game early — force the least-proven Brohm QB to win it himself</a:t>
             </a:r>
           </a:p>
         </p:txBody>
@@ -6149,7 +6149,7 @@
                 </a:solidFill>
                 <a:latin typeface="Arial"/>
               </a:rPr>
-              <a:t>Tempo the Brohm defense into simple, static looks</a:t>
+              <a:t>Tempo the Brohm defense into simple, static looks — no disguise time, no gambling looks</a:t>
             </a:r>
           </a:p>
         </p:txBody>
@@ -6228,7 +6228,7 @@
                 </a:solidFill>
                 <a:latin typeface="Arial"/>
               </a:rPr>
-              <a:t>Win field position all night on a neutral floor</a:t>
+              <a:t>Win field position all night — on a neutral floor against a new QB, the long field is a weapon</a:t>
             </a:r>
           </a:p>
         </p:txBody>
@@ -6556,7 +6556,7 @@
                 </a:solidFill>
                 <a:latin typeface="Arial"/>
               </a:rPr>
-              <a:t>The revenge tour begins — 'Leave No Doubt' opens at Lambeau Field</a:t>
+              <a:t>The revenge tour begins: 'Leave No Doubt' was born from the selection-show snub — Freeman rewatches the pain on purpose</a:t>
             </a:r>
           </a:p>
         </p:txBody>
@@ -6635,7 +6635,7 @@
                 </a:solidFill>
                 <a:latin typeface="Arial"/>
               </a:rPr>
-              <a:t>ND is the card's continuity outlier: Carr in year two, 51% of production back, just 7 portal adds</a:t>
+              <a:t>ND is the card's continuity outlier — Carr in year two, 51% of production back, just 7 portal adds — in a week full of reboots</a:t>
             </a:r>
           </a:p>
         </p:txBody>
@@ -6714,7 +6714,7 @@
                 </a:solidFill>
                 <a:latin typeface="Arial"/>
               </a:rPr>
-              <a:t>Fickell's survival season starts as a 20-point dog, with a new QB again (Joseph, 31% back)</a:t>
+              <a:t>Fickell's survival season: a public vote of confidence, the Air Raid detour dead, and a G5 dual-threat QB making the B1G jump as a 20-point dog</a:t>
             </a:r>
           </a:p>
         </p:txBody>
@@ -6793,7 +6793,7 @@
                 </a:solidFill>
                 <a:latin typeface="Arial"/>
               </a:rPr>
-              <a:t>A No. 1-seed résumé game for the Irish; a cover is Wisconsin's moral win</a:t>
+              <a:t>No. 4 ND plays for a top-seed résumé; Wisconsin's 3-3-5 — top-25 two straight years with zero offensive help — plays for a moral cover</a:t>
             </a:r>
           </a:p>
         </p:txBody>
@@ -6872,7 +6872,7 @@
                 </a:solidFill>
                 <a:latin typeface="Arial"/>
               </a:rPr>
-              <a:t>Housekeeping: our ledger's July first-seen on this game is a known CFBD sides-flip data error, so the honest movement read is the opener — Bovada hung −16.5 and the market walked it to −20.5, four points toward the Irish. Machine −21.1, market −20.5: nothing to do but watch.</a:t>
+              <a:t>Housekeeping: our ledger's July first-seen here is a known CFBD sides-flip error — the honest movement read is the opener, −16.5 walked to −20.5, four points toward the Irish. Machine −21.1, market −20.5: agreement, and spreads this size sit in the favorite-longshot zone anyway. Watch, don't touch.</a:t>
             </a:r>
           </a:p>
         </p:txBody>
@@ -7912,7 +7912,7 @@
                 </a:solidFill>
                 <a:latin typeface="Arial"/>
               </a:rPr>
-              <a:t>Shorten the game: long drives, no clock stoppages, no gifts</a:t>
+              <a:t>Shorten the game: long drives, clock runs, zero gifts — fewer possessions is the underdog's only math</a:t>
             </a:r>
           </a:p>
         </p:txBody>
@@ -7991,7 +7991,7 @@
                 </a:solidFill>
                 <a:latin typeface="Arial"/>
               </a:rPr>
-              <a:t>Find counters vs a tite front built to erase the run-first pivot</a:t>
+              <a:t>Find counters vs the tite front built to erase the run-first pivot — the league's most veteran OL has to earn it</a:t>
             </a:r>
           </a:p>
         </p:txBody>
@@ -8070,7 +8070,7 @@
                 </a:solidFill>
                 <a:latin typeface="Arial"/>
               </a:rPr>
-              <a:t>Joseph's legs on third-and-medium — the one chain-mover that travels</a:t>
+              <a:t>Joseph's legs on third-and-medium — the one chain-mover that travels up from the G5</a:t>
             </a:r>
           </a:p>
         </p:txBody>
@@ -8149,7 +8149,7 @@
                 </a:solidFill>
                 <a:latin typeface="Arial"/>
               </a:rPr>
-              <a:t>Force Carr to beat the 3-3-5 from the pocket</a:t>
+              <a:t>Force Carr to beat the 3-3-5 from the pocket — this defense is genuinely good enough to keep it inside 20</a:t>
             </a:r>
           </a:p>
         </p:txBody>
@@ -8637,7 +8637,7 @@
                 </a:solidFill>
                 <a:latin typeface="Arial"/>
               </a:rPr>
-              <a:t>Post-Love backfield: prove the duo/counter identity early</a:t>
+              <a:t>Prove the post-Love duo/counter identity early — the gap-scheme run game sets up everything else</a:t>
             </a:r>
           </a:p>
         </p:txBody>
@@ -8716,7 +8716,7 @@
                 </a:solidFill>
                 <a:latin typeface="Arial"/>
               </a:rPr>
-              <a:t>Carr in rhythm — play-action on schedule, nothing forced</a:t>
+              <a:t>Carr in rhythm: play-action on schedule, nothing forced — his year-two leap is the top 10's likeliest QB jump</a:t>
             </a:r>
           </a:p>
         </p:txBody>
@@ -8795,7 +8795,7 @@
                 </a:solidFill>
                 <a:latin typeface="Arial"/>
               </a:rPr>
-              <a:t>Erase explosives; make Wisconsin play 12-play drives</a:t>
+              <a:t>Erase explosives and make Wisconsin drive 12 plays — bend-don't-break with elite tackling wins by attrition</a:t>
             </a:r>
           </a:p>
         </p:txBody>
@@ -8874,7 +8874,7 @@
                 </a:solidFill>
                 <a:latin typeface="Arial"/>
               </a:rPr>
-              <a:t>'Leave No Doubt' means no scoreboard mercy — bury it early</a:t>
+              <a:t>'Leave No Doubt' means no scoreboard mercy — style points are seed points in a week-one résumé game</a:t>
             </a:r>
           </a:p>
         </p:txBody>
@@ -9202,7 +9202,7 @@
                 </a:solidFill>
                 <a:latin typeface="Arial"/>
               </a:rPr>
-              <a:t>Monday night, alone on the calendar — the week's last word</a:t>
+              <a:t>Monday night, alone on the calendar — the whole sport watches the week's last word</a:t>
             </a:r>
           </a:p>
         </p:txBody>
@@ -9281,7 +9281,7 @@
                 </a:solidFill>
                 <a:latin typeface="Arial"/>
               </a:rPr>
-              <a:t>FSU's 36-month whiplash (CFP → 2–10 → reset) meets SMU's post-CFP expectations</a:t>
+              <a:t>No program swung harder in 36 months than FSU (CFP → 2–10 → rebound) — now it hosts SMU's post-CFP expectations and a No. 19 ranking</a:t>
             </a:r>
           </a:p>
         </p:txBody>
@@ -9360,7 +9360,7 @@
                 </a:solidFill>
                 <a:latin typeface="Arial"/>
               </a:rPr>
-              <a:t>SMU kept the roster (57% back) but lost both coordinators; FSU kept Norvell but reloads via portal again</a:t>
+              <a:t>SMU kept the roster (57% back, 15 adds) but lost BOTH coordinators to committee troikas; FSU kept Norvell but rents portal QBs a third time</a:t>
             </a:r>
           </a:p>
         </p:txBody>
@@ -9439,7 +9439,7 @@
                 </a:solidFill>
                 <a:latin typeface="Arial"/>
               </a:rPr>
-              <a:t>RED ALERT: the machine takes the home dog outright — FSU 52%, market 42%</a:t>
+              <a:t>RED ALERT: machine takes the home dog outright — FSU 52% vs market 42%; strip home field and it actually favors SMU by 1.8</a:t>
             </a:r>
           </a:p>
         </p:txBody>
@@ -9518,7 +9518,7 @@
                 </a:solidFill>
                 <a:latin typeface="Arial"/>
               </a:rPr>
-              <a:t>Respect the backtest: RED alerts hit 49.7% ATS across 2023–25 — below break-even. The flag is a research shortlist, not a pick. And FSU's 36-month whiplash (CFP → 2–10 → reset) makes its preseason prior the least trustworthy number on this card.</a:t>
+              <a:t>Respect the backtest: RED alerts hit 49.7% ATS across 2023–25 — the flag is a research shortlist, not a pick. The entire machine case is the 2.5-point Monday-night home bump — neutralize the Doak and it likes SMU. And FSU's whiplash makes its prior the least trustworthy number on this card.</a:t>
             </a:r>
           </a:p>
         </p:txBody>
@@ -10558,7 +10558,7 @@
                 </a:solidFill>
                 <a:latin typeface="Arial"/>
               </a:rPr>
-              <a:t>Prove the troika can call it: tempo and spacing from drive one</a:t>
+              <a:t>Prove the troika can call it — tempo and spacing from drive one, no committee hesitation on fourth downs</a:t>
             </a:r>
           </a:p>
         </p:txBody>
@@ -10637,7 +10637,7 @@
                 </a:solidFill>
                 <a:latin typeface="Arial"/>
               </a:rPr>
-              <a:t>Protect the new quarterback against a rebuilt FSU front</a:t>
+              <a:t>Protect the new quarterback from FSU's top-10 portal front — line play is the one place SMU is a tier below</a:t>
             </a:r>
           </a:p>
         </p:txBody>
@@ -10716,7 +10716,7 @@
                 </a:solidFill>
                 <a:latin typeface="Arial"/>
               </a:rPr>
-              <a:t>Explosives, not field goals — White's 3-3-5 bends on purpose</a:t>
+              <a:t>Explosives, not field goals: White's 3-3-5 bends on purpose — long drives are the trap, chunk plays are the answer</a:t>
             </a:r>
           </a:p>
         </p:txBody>
@@ -10795,7 +10795,7 @@
                 </a:solidFill>
                 <a:latin typeface="Arial"/>
               </a:rPr>
-              <a:t>Win the takeaway ledger: the gambling profile has to cash</a:t>
+              <a:t>Win the takeaway ledger — the gambling back seven has to cash on the road, Monday night</a:t>
             </a:r>
           </a:p>
         </p:txBody>
@@ -11283,7 +11283,7 @@
                 </a:solidFill>
                 <a:latin typeface="Arial"/>
               </a:rPr>
-              <a:t>Run it with the portal front — make it physical early</a:t>
+              <a:t>Run it with the portal front — make the game physical exactly where the trench classes graded top-10</a:t>
             </a:r>
           </a:p>
         </p:txBody>
@@ -11362,7 +11362,7 @@
                 </a:solidFill>
                 <a:latin typeface="Arial"/>
               </a:rPr>
-              <a:t>Quarterback run as the cheat code in Norvell's heavier hand</a:t>
+              <a:t>Quarterback run is the cheat code in Norvell's heavier-hand offense — the extra hat SMU's smaller front must answer</a:t>
             </a:r>
           </a:p>
         </p:txBody>
@@ -11441,7 +11441,7 @@
                 </a:solidFill>
                 <a:latin typeface="Arial"/>
               </a:rPr>
-              <a:t>No boom-bust: field position over hero ball</a:t>
+              <a:t>No boom-bust: field position over hero ball — the whiplash program cannot beat itself Monday</a:t>
             </a:r>
           </a:p>
         </p:txBody>
@@ -11520,7 +11520,7 @@
                 </a:solidFill>
                 <a:latin typeface="Arial"/>
               </a:rPr>
-              <a:t>Start fast and let the Monday-night Doak crowd matter</a:t>
+              <a:t>Start fast and make the Doak matter — the machine's whole case for FSU is worth 2.5 points of Monday night</a:t>
             </a:r>
           </a:p>
         </p:txBody>
@@ -14923,7 +14923,7 @@
                 </a:solidFill>
                 <a:latin typeface="Arial"/>
               </a:rPr>
-              <a:t>Two rebooted programs on a neutral floor: Golesh's Auburn debut vs the biggest QB get in Baylor history</a:t>
+              <a:t>Two rebooted programs, one neutral floor: Golesh's Auburn debut (USF's No. 2 total offense travels with him) vs Lagway's Baylor debut</a:t>
             </a:r>
           </a:p>
         </p:txBody>
@@ -15002,7 +15002,7 @@
                 </a:solidFill>
                 <a:latin typeface="Arial"/>
               </a:rPr>
-              <a:t>The card's starkest contrast — Auburn returns 14% of production (39 portal adds), Baylor returns 60%</a:t>
+              <a:t>The starkest contrast on the card: Auburn returns 14% of its offense and rebuilt with 39 transfers — Baylor returns 60%, the most continuity here</a:t>
             </a:r>
           </a:p>
         </p:txBody>
@@ -15081,7 +15081,7 @@
                 </a:solidFill>
                 <a:latin typeface="Arial"/>
               </a:rPr>
-              <a:t>Lagway's health is the single biggest variable in the Big 12 season</a:t>
+              <a:t>Lagway's health (shoulder and leg in 2025) is the Big 12 season's biggest single variable — Auburn's top-10 DL is the first test</a:t>
             </a:r>
           </a:p>
         </p:txBody>
@@ -15160,7 +15160,7 @@
                 </a:solidFill>
                 <a:latin typeface="Arial"/>
               </a:rPr>
-              <a:t>The 59.5 total is top-decile — five years of closing lines say that class of game goes UNDER 55% of the time</a:t>
+              <a:t>The 59.5 total is top-decile — five years of closing lines say that class goes UNDER 55% of the time, and two year-one offenses in a dome only helps</a:t>
             </a:r>
           </a:p>
         </p:txBody>
@@ -15239,7 +15239,7 @@
                 </a:solidFill>
                 <a:latin typeface="Arial"/>
               </a:rPr>
-              <a:t>Both sidelines are running year-one installs the preseason numbers can't see — and the machine's prior hasn't ingested a single 2026 snap yet (first in-season FPI refresh lands Tuesday). Machine −5.5 vs market −7 is a quibble, not a position.</a:t>
+              <a:t>Both sidelines are running year-one installs the preseason numbers can't see — the machine's prior hasn't ingested a single 2026 snap. Auburn's edge is a talent prior; Baylor's counter is cohesion. Machine −5.5 vs market −7.5: a quibble, not a position.</a:t>
             </a:r>
           </a:p>
         </p:txBody>
@@ -16279,7 +16279,7 @@
                 </a:solidFill>
                 <a:latin typeface="Arial"/>
               </a:rPr>
-              <a:t>Keep Lagway upright and healthy — everything else is decoration</a:t>
+              <a:t>Keep Lagway upright — his 2025 injury file is the season's whole risk profile; everything else is decoration</a:t>
             </a:r>
           </a:p>
         </p:txBody>
@@ -16358,7 +16358,7 @@
                 </a:solidFill>
                 <a:latin typeface="Arial"/>
               </a:rPr>
-              <a:t>Beat the sim pressures on early downs; don't let Durkin tee off</a:t>
+              <a:t>Attack the rebuilt secondary: four transfer corners arrived — Auburn's front returned, the back end didn't</a:t>
             </a:r>
           </a:p>
         </p:txBody>
@@ -16437,7 +16437,7 @@
                 </a:solidFill>
                 <a:latin typeface="Arial"/>
               </a:rPr>
-              <a:t>Steal a possession with tempo of your own</a:t>
+              <a:t>Steal a possession with tempo — a halftime double-up covers the whole spread by itself</a:t>
             </a:r>
           </a:p>
         </p:txBody>
@@ -16516,7 +16516,7 @@
                 </a:solidFill>
                 <a:latin typeface="Arial"/>
               </a:rPr>
-              <a:t>Make Auburn's first-year offense play from behind</a:t>
+              <a:t>Make the install-week offense chase: an early lead forces a unit that's never played together to hurry</a:t>
             </a:r>
           </a:p>
         </p:txBody>
@@ -17004,7 +17004,7 @@
                 </a:solidFill>
                 <a:latin typeface="Arial"/>
               </a:rPr>
-              <a:t>Lean on the defense that didn't change</a:t>
+              <a:t>Lean on the defense that didn't change — 27 of the 39 transfers went to offense; Durkin's side kept its spine</a:t>
             </a:r>
           </a:p>
         </p:txBody>
@@ -17083,7 +17083,7 @@
                 </a:solidFill>
                 <a:latin typeface="Arial"/>
               </a:rPr>
-              <a:t>Tempo without turnovers — install-week ball security</a:t>
+              <a:t>Tempo without turnovers: speed multiplies mistakes in week one of an install — take the give, live with punts</a:t>
             </a:r>
           </a:p>
         </p:txBody>
@@ -17162,7 +17162,7 @@
                 </a:solidFill>
                 <a:latin typeface="Arial"/>
               </a:rPr>
-              <a:t>Feed the tight ends where Golesh's system lives</a:t>
+              <a:t>Feed the tight ends where Golesh's 12-personnel system lives</a:t>
             </a:r>
           </a:p>
         </p:txBody>
@@ -17241,7 +17241,7 @@
                 </a:solidFill>
                 <a:latin typeface="Arial"/>
               </a:rPr>
-              <a:t>Let the defensive line end drives on third down</a:t>
+              <a:t>Win the line with top-10 DL talent — Lagway under duress is the whole ballgame</a:t>
             </a:r>
           </a:p>
         </p:txBody>
@@ -20215,7 +20215,7 @@
                 </a:solidFill>
                 <a:latin typeface="Arial"/>
               </a:rPr>
-              <a:t>Golding's first game as the head man — keeping a 13-win CFP program's identity after Kiffin left with it</a:t>
+              <a:t>Golding's first game as the head man — can a promoted DC keep a 13-win CFP program's identity after Kiffin took its brain to Baton Rouge?</a:t>
             </a:r>
           </a:p>
         </p:txBody>
@@ -20294,7 +20294,7 @@
                 </a:solidFill>
                 <a:latin typeface="Arial"/>
               </a:rPr>
-              <a:t>Chambliss is the rare continuity star (50% of production back); Brohm counters with his third new QB1 in three years</a:t>
+              <a:t>Chambliss chose Oxford over following Kiffin — the rarest continuity win (50% back); Brohm counters with his third new QB1 in three years</a:t>
             </a:r>
           </a:p>
         </p:txBody>
@@ -20373,7 +20373,7 @@
                 </a:solidFill>
                 <a:latin typeface="Arial"/>
               </a:rPr>
-              <a:t>Sunday night in Nashville — neutral on paper, Ole Miss crowd in practice</a:t>
+              <a:t>Ranked vs ranked, Sunday night in Nashville: #24 Louisville, #9 Ole Miss — neutral on paper, an Ole Miss crowd in practice</a:t>
             </a:r>
           </a:p>
         </p:txBody>
@@ -20452,7 +20452,7 @@
                 </a:solidFill>
                 <a:latin typeface="Arial"/>
               </a:rPr>
-              <a:t>Both need this one: Louisville's easiest big-name scalp; Ole Miss defending the CFP-program label</a:t>
+              <a:t>SP+ projects Louisville favored in every game AFTER this one — win here and the huge ACC script is live; Ole Miss defends the CFP label</a:t>
             </a:r>
           </a:p>
         </p:txBody>
@@ -20531,7 +20531,7 @@
                 </a:solidFill>
                 <a:latin typeface="Arial"/>
               </a:rPr>
-              <a:t>The market opened −8.5 and walked to −6.5/−7 — it has come to the machine's −6.5. That's agreement, not edge. And nothing in a preseason prior prices a first-year head coach's game management on a Sunday neutral floor.</a:t>
+              <a:t>The market opened −8.5 and walked to −7 — it has come to the machine's −6.5. That's agreement, not edge. And nothing in a preseason prior prices a first-year head coach's clock-and-timeout management on a Sunday neutral floor.</a:t>
             </a:r>
           </a:p>
         </p:txBody>

--- a/decks/2026_Week1_Episode2.pptx
+++ b/decks/2026_Week1_Episode2.pptx
@@ -9360,7 +9360,7 @@
                 </a:solidFill>
                 <a:latin typeface="Arial"/>
               </a:rPr>
-              <a:t>SMU kept the roster (57% back, 15 adds) but lost BOTH coordinators to committee troikas; FSU kept Norvell but rents portal QBs a third time</a:t>
+              <a:t>SMU kept the roster AND Jennings (57% back) but lost BOTH coordinators to troikas; FSU kept Norvell but rents portal QBs a third time</a:t>
             </a:r>
           </a:p>
         </p:txBody>
@@ -10409,7 +10409,7 @@
                 </a:solidFill>
                 <a:latin typeface="Arial"/>
               </a:rPr>
-              <a:t>NEW — post-Jennings; the system made 3 straight top-25 offenses with 3 QBs</a:t>
+              <a:t>RETURNS — Kevin Jennings; the system's made 3 straight top-25 offenses</a:t>
             </a:r>
           </a:p>
         </p:txBody>
@@ -10637,7 +10637,7 @@
                 </a:solidFill>
                 <a:latin typeface="Arial"/>
               </a:rPr>
-              <a:t>Protect the new quarterback from FSU's top-10 portal front — line play is the one place SMU is a tier below</a:t>
+              <a:t>Protect Jennings from FSU's top-10 portal front — line play is the one place SMU is a tier below</a:t>
             </a:r>
           </a:p>
         </p:txBody>
